--- a/MainPPT.pptx
+++ b/MainPPT.pptx
@@ -10,11 +10,12 @@
   <p:sldIdLst>
     <p:sldId id="256" r:id="rId5"/>
     <p:sldId id="257" r:id="rId6"/>
-    <p:sldId id="258" r:id="rId7"/>
-    <p:sldId id="259" r:id="rId8"/>
-    <p:sldId id="260" r:id="rId9"/>
-    <p:sldId id="261" r:id="rId10"/>
-    <p:sldId id="262" r:id="rId11"/>
+    <p:sldId id="263" r:id="rId7"/>
+    <p:sldId id="258" r:id="rId8"/>
+    <p:sldId id="259" r:id="rId9"/>
+    <p:sldId id="260" r:id="rId10"/>
+    <p:sldId id="261" r:id="rId11"/>
+    <p:sldId id="262" r:id="rId12"/>
   </p:sldIdLst>
   <p:sldSz cx="12192000" cy="6858000"/>
   <p:notesSz cx="6858000" cy="9144000"/>
@@ -3109,7 +3110,2483 @@
 </dgm:colorsDef>
 </file>
 
+<file path=ppt/diagrams/colors5.xml><?xml version="1.0" encoding="utf-8"?>
+<dgm:colorsDef xmlns:dgm="http://schemas.openxmlformats.org/drawingml/2006/diagram" xmlns:a="http://schemas.openxmlformats.org/drawingml/2006/main" uniqueId="urn:microsoft.com/office/officeart/2005/8/colors/accent1_2">
+  <dgm:title val=""/>
+  <dgm:desc val=""/>
+  <dgm:catLst>
+    <dgm:cat type="accent1" pri="11200"/>
+  </dgm:catLst>
+  <dgm:styleLbl name="node0">
+    <dgm:fillClrLst meth="repeat">
+      <a:schemeClr val="accent1"/>
+    </dgm:fillClrLst>
+    <dgm:linClrLst meth="repeat">
+      <a:schemeClr val="lt1"/>
+    </dgm:linClrLst>
+    <dgm:effectClrLst/>
+    <dgm:txLinClrLst/>
+    <dgm:txFillClrLst/>
+    <dgm:txEffectClrLst/>
+  </dgm:styleLbl>
+  <dgm:styleLbl name="alignNode1">
+    <dgm:fillClrLst meth="repeat">
+      <a:schemeClr val="accent1"/>
+    </dgm:fillClrLst>
+    <dgm:linClrLst meth="repeat">
+      <a:schemeClr val="accent1"/>
+    </dgm:linClrLst>
+    <dgm:effectClrLst/>
+    <dgm:txLinClrLst/>
+    <dgm:txFillClrLst/>
+    <dgm:txEffectClrLst/>
+  </dgm:styleLbl>
+  <dgm:styleLbl name="node1">
+    <dgm:fillClrLst meth="repeat">
+      <a:schemeClr val="accent1"/>
+    </dgm:fillClrLst>
+    <dgm:linClrLst meth="repeat">
+      <a:schemeClr val="lt1"/>
+    </dgm:linClrLst>
+    <dgm:effectClrLst/>
+    <dgm:txLinClrLst/>
+    <dgm:txFillClrLst/>
+    <dgm:txEffectClrLst/>
+  </dgm:styleLbl>
+  <dgm:styleLbl name="lnNode1">
+    <dgm:fillClrLst meth="repeat">
+      <a:schemeClr val="accent1"/>
+    </dgm:fillClrLst>
+    <dgm:linClrLst meth="repeat">
+      <a:schemeClr val="lt1"/>
+    </dgm:linClrLst>
+    <dgm:effectClrLst/>
+    <dgm:txLinClrLst/>
+    <dgm:txFillClrLst/>
+    <dgm:txEffectClrLst/>
+  </dgm:styleLbl>
+  <dgm:styleLbl name="vennNode1">
+    <dgm:fillClrLst meth="repeat">
+      <a:schemeClr val="accent1">
+        <a:alpha val="50000"/>
+      </a:schemeClr>
+    </dgm:fillClrLst>
+    <dgm:linClrLst meth="repeat">
+      <a:schemeClr val="lt1"/>
+    </dgm:linClrLst>
+    <dgm:effectClrLst/>
+    <dgm:txLinClrLst/>
+    <dgm:txFillClrLst/>
+    <dgm:txEffectClrLst/>
+  </dgm:styleLbl>
+  <dgm:styleLbl name="node2">
+    <dgm:fillClrLst meth="repeat">
+      <a:schemeClr val="accent1"/>
+    </dgm:fillClrLst>
+    <dgm:linClrLst meth="repeat">
+      <a:schemeClr val="lt1"/>
+    </dgm:linClrLst>
+    <dgm:effectClrLst/>
+    <dgm:txLinClrLst/>
+    <dgm:txFillClrLst/>
+    <dgm:txEffectClrLst/>
+  </dgm:styleLbl>
+  <dgm:styleLbl name="node3">
+    <dgm:fillClrLst meth="repeat">
+      <a:schemeClr val="accent1"/>
+    </dgm:fillClrLst>
+    <dgm:linClrLst meth="repeat">
+      <a:schemeClr val="lt1"/>
+    </dgm:linClrLst>
+    <dgm:effectClrLst/>
+    <dgm:txLinClrLst/>
+    <dgm:txFillClrLst/>
+    <dgm:txEffectClrLst/>
+  </dgm:styleLbl>
+  <dgm:styleLbl name="node4">
+    <dgm:fillClrLst meth="repeat">
+      <a:schemeClr val="accent1"/>
+    </dgm:fillClrLst>
+    <dgm:linClrLst meth="repeat">
+      <a:schemeClr val="lt1"/>
+    </dgm:linClrLst>
+    <dgm:effectClrLst/>
+    <dgm:txLinClrLst/>
+    <dgm:txFillClrLst/>
+    <dgm:txEffectClrLst/>
+  </dgm:styleLbl>
+  <dgm:styleLbl name="fgImgPlace1">
+    <dgm:fillClrLst meth="repeat">
+      <a:schemeClr val="accent1">
+        <a:tint val="50000"/>
+      </a:schemeClr>
+    </dgm:fillClrLst>
+    <dgm:linClrLst meth="repeat">
+      <a:schemeClr val="lt1"/>
+    </dgm:linClrLst>
+    <dgm:effectClrLst/>
+    <dgm:txLinClrLst/>
+    <dgm:txFillClrLst meth="repeat">
+      <a:schemeClr val="lt1"/>
+    </dgm:txFillClrLst>
+    <dgm:txEffectClrLst/>
+  </dgm:styleLbl>
+  <dgm:styleLbl name="alignImgPlace1">
+    <dgm:fillClrLst meth="repeat">
+      <a:schemeClr val="accent1">
+        <a:tint val="50000"/>
+      </a:schemeClr>
+    </dgm:fillClrLst>
+    <dgm:linClrLst meth="repeat">
+      <a:schemeClr val="lt1"/>
+    </dgm:linClrLst>
+    <dgm:effectClrLst/>
+    <dgm:txLinClrLst/>
+    <dgm:txFillClrLst meth="repeat">
+      <a:schemeClr val="lt1"/>
+    </dgm:txFillClrLst>
+    <dgm:txEffectClrLst/>
+  </dgm:styleLbl>
+  <dgm:styleLbl name="bgImgPlace1">
+    <dgm:fillClrLst meth="repeat">
+      <a:schemeClr val="accent1">
+        <a:tint val="50000"/>
+      </a:schemeClr>
+    </dgm:fillClrLst>
+    <dgm:linClrLst meth="repeat">
+      <a:schemeClr val="lt1"/>
+    </dgm:linClrLst>
+    <dgm:effectClrLst/>
+    <dgm:txLinClrLst/>
+    <dgm:txFillClrLst meth="repeat">
+      <a:schemeClr val="lt1"/>
+    </dgm:txFillClrLst>
+    <dgm:txEffectClrLst/>
+  </dgm:styleLbl>
+  <dgm:styleLbl name="sibTrans2D1">
+    <dgm:fillClrLst meth="repeat">
+      <a:schemeClr val="accent1">
+        <a:tint val="60000"/>
+      </a:schemeClr>
+    </dgm:fillClrLst>
+    <dgm:linClrLst meth="repeat">
+      <a:schemeClr val="accent1">
+        <a:tint val="60000"/>
+      </a:schemeClr>
+    </dgm:linClrLst>
+    <dgm:effectClrLst/>
+    <dgm:txLinClrLst/>
+    <dgm:txFillClrLst/>
+    <dgm:txEffectClrLst/>
+  </dgm:styleLbl>
+  <dgm:styleLbl name="fgSibTrans2D1">
+    <dgm:fillClrLst meth="repeat">
+      <a:schemeClr val="accent1">
+        <a:tint val="60000"/>
+      </a:schemeClr>
+    </dgm:fillClrLst>
+    <dgm:linClrLst meth="repeat">
+      <a:schemeClr val="accent1">
+        <a:tint val="60000"/>
+      </a:schemeClr>
+    </dgm:linClrLst>
+    <dgm:effectClrLst/>
+    <dgm:txLinClrLst/>
+    <dgm:txFillClrLst/>
+    <dgm:txEffectClrLst/>
+  </dgm:styleLbl>
+  <dgm:styleLbl name="bgSibTrans2D1">
+    <dgm:fillClrLst meth="repeat">
+      <a:schemeClr val="accent1">
+        <a:tint val="60000"/>
+      </a:schemeClr>
+    </dgm:fillClrLst>
+    <dgm:linClrLst meth="repeat">
+      <a:schemeClr val="accent1">
+        <a:tint val="60000"/>
+      </a:schemeClr>
+    </dgm:linClrLst>
+    <dgm:effectClrLst/>
+    <dgm:txLinClrLst/>
+    <dgm:txFillClrLst/>
+    <dgm:txEffectClrLst/>
+  </dgm:styleLbl>
+  <dgm:styleLbl name="sibTrans1D1">
+    <dgm:fillClrLst meth="repeat">
+      <a:schemeClr val="accent1"/>
+    </dgm:fillClrLst>
+    <dgm:linClrLst meth="repeat">
+      <a:schemeClr val="accent1"/>
+    </dgm:linClrLst>
+    <dgm:effectClrLst/>
+    <dgm:txLinClrLst/>
+    <dgm:txFillClrLst meth="repeat">
+      <a:schemeClr val="tx1"/>
+    </dgm:txFillClrLst>
+    <dgm:txEffectClrLst/>
+  </dgm:styleLbl>
+  <dgm:styleLbl name="callout">
+    <dgm:fillClrLst meth="repeat">
+      <a:schemeClr val="accent1"/>
+    </dgm:fillClrLst>
+    <dgm:linClrLst meth="repeat">
+      <a:schemeClr val="accent1">
+        <a:tint val="50000"/>
+      </a:schemeClr>
+    </dgm:linClrLst>
+    <dgm:effectClrLst/>
+    <dgm:txLinClrLst/>
+    <dgm:txFillClrLst meth="repeat">
+      <a:schemeClr val="tx1"/>
+    </dgm:txFillClrLst>
+    <dgm:txEffectClrLst/>
+  </dgm:styleLbl>
+  <dgm:styleLbl name="asst0">
+    <dgm:fillClrLst meth="repeat">
+      <a:schemeClr val="accent1"/>
+    </dgm:fillClrLst>
+    <dgm:linClrLst meth="repeat">
+      <a:schemeClr val="lt1"/>
+    </dgm:linClrLst>
+    <dgm:effectClrLst/>
+    <dgm:txLinClrLst/>
+    <dgm:txFillClrLst/>
+    <dgm:txEffectClrLst/>
+  </dgm:styleLbl>
+  <dgm:styleLbl name="asst1">
+    <dgm:fillClrLst meth="repeat">
+      <a:schemeClr val="accent1"/>
+    </dgm:fillClrLst>
+    <dgm:linClrLst meth="repeat">
+      <a:schemeClr val="lt1"/>
+    </dgm:linClrLst>
+    <dgm:effectClrLst/>
+    <dgm:txLinClrLst/>
+    <dgm:txFillClrLst/>
+    <dgm:txEffectClrLst/>
+  </dgm:styleLbl>
+  <dgm:styleLbl name="asst2">
+    <dgm:fillClrLst meth="repeat">
+      <a:schemeClr val="accent1"/>
+    </dgm:fillClrLst>
+    <dgm:linClrLst meth="repeat">
+      <a:schemeClr val="lt1"/>
+    </dgm:linClrLst>
+    <dgm:effectClrLst/>
+    <dgm:txLinClrLst/>
+    <dgm:txFillClrLst/>
+    <dgm:txEffectClrLst/>
+  </dgm:styleLbl>
+  <dgm:styleLbl name="asst3">
+    <dgm:fillClrLst meth="repeat">
+      <a:schemeClr val="accent1"/>
+    </dgm:fillClrLst>
+    <dgm:linClrLst meth="repeat">
+      <a:schemeClr val="lt1"/>
+    </dgm:linClrLst>
+    <dgm:effectClrLst/>
+    <dgm:txLinClrLst/>
+    <dgm:txFillClrLst/>
+    <dgm:txEffectClrLst/>
+  </dgm:styleLbl>
+  <dgm:styleLbl name="asst4">
+    <dgm:fillClrLst meth="repeat">
+      <a:schemeClr val="accent1"/>
+    </dgm:fillClrLst>
+    <dgm:linClrLst meth="repeat">
+      <a:schemeClr val="lt1"/>
+    </dgm:linClrLst>
+    <dgm:effectClrLst/>
+    <dgm:txLinClrLst/>
+    <dgm:txFillClrLst/>
+    <dgm:txEffectClrLst/>
+  </dgm:styleLbl>
+  <dgm:styleLbl name="parChTrans2D1">
+    <dgm:fillClrLst meth="repeat">
+      <a:schemeClr val="accent1">
+        <a:tint val="60000"/>
+      </a:schemeClr>
+    </dgm:fillClrLst>
+    <dgm:linClrLst meth="repeat">
+      <a:schemeClr val="accent1">
+        <a:tint val="60000"/>
+      </a:schemeClr>
+    </dgm:linClrLst>
+    <dgm:effectClrLst/>
+    <dgm:txLinClrLst/>
+    <dgm:txFillClrLst meth="repeat">
+      <a:schemeClr val="lt1"/>
+    </dgm:txFillClrLst>
+    <dgm:txEffectClrLst/>
+  </dgm:styleLbl>
+  <dgm:styleLbl name="parChTrans2D2">
+    <dgm:fillClrLst meth="repeat">
+      <a:schemeClr val="accent1"/>
+    </dgm:fillClrLst>
+    <dgm:linClrLst meth="repeat">
+      <a:schemeClr val="accent1"/>
+    </dgm:linClrLst>
+    <dgm:effectClrLst/>
+    <dgm:txLinClrLst/>
+    <dgm:txFillClrLst meth="repeat">
+      <a:schemeClr val="lt1"/>
+    </dgm:txFillClrLst>
+    <dgm:txEffectClrLst/>
+  </dgm:styleLbl>
+  <dgm:styleLbl name="parChTrans2D3">
+    <dgm:fillClrLst meth="repeat">
+      <a:schemeClr val="accent1"/>
+    </dgm:fillClrLst>
+    <dgm:linClrLst meth="repeat">
+      <a:schemeClr val="accent1"/>
+    </dgm:linClrLst>
+    <dgm:effectClrLst/>
+    <dgm:txLinClrLst/>
+    <dgm:txFillClrLst meth="repeat">
+      <a:schemeClr val="lt1"/>
+    </dgm:txFillClrLst>
+    <dgm:txEffectClrLst/>
+  </dgm:styleLbl>
+  <dgm:styleLbl name="parChTrans2D4">
+    <dgm:fillClrLst meth="repeat">
+      <a:schemeClr val="accent1"/>
+    </dgm:fillClrLst>
+    <dgm:linClrLst meth="repeat">
+      <a:schemeClr val="accent1"/>
+    </dgm:linClrLst>
+    <dgm:effectClrLst/>
+    <dgm:txLinClrLst/>
+    <dgm:txFillClrLst meth="repeat">
+      <a:schemeClr val="lt1"/>
+    </dgm:txFillClrLst>
+    <dgm:txEffectClrLst/>
+  </dgm:styleLbl>
+  <dgm:styleLbl name="parChTrans1D1">
+    <dgm:fillClrLst meth="repeat">
+      <a:schemeClr val="accent1"/>
+    </dgm:fillClrLst>
+    <dgm:linClrLst meth="repeat">
+      <a:schemeClr val="accent1">
+        <a:shade val="60000"/>
+      </a:schemeClr>
+    </dgm:linClrLst>
+    <dgm:effectClrLst/>
+    <dgm:txLinClrLst/>
+    <dgm:txFillClrLst meth="repeat">
+      <a:schemeClr val="tx1"/>
+    </dgm:txFillClrLst>
+    <dgm:txEffectClrLst/>
+  </dgm:styleLbl>
+  <dgm:styleLbl name="parChTrans1D2">
+    <dgm:fillClrLst meth="repeat">
+      <a:schemeClr val="accent1"/>
+    </dgm:fillClrLst>
+    <dgm:linClrLst meth="repeat">
+      <a:schemeClr val="accent1">
+        <a:shade val="60000"/>
+      </a:schemeClr>
+    </dgm:linClrLst>
+    <dgm:effectClrLst/>
+    <dgm:txLinClrLst/>
+    <dgm:txFillClrLst meth="repeat">
+      <a:schemeClr val="tx1"/>
+    </dgm:txFillClrLst>
+    <dgm:txEffectClrLst/>
+  </dgm:styleLbl>
+  <dgm:styleLbl name="parChTrans1D3">
+    <dgm:fillClrLst meth="repeat">
+      <a:schemeClr val="accent1"/>
+    </dgm:fillClrLst>
+    <dgm:linClrLst meth="repeat">
+      <a:schemeClr val="accent1">
+        <a:shade val="80000"/>
+      </a:schemeClr>
+    </dgm:linClrLst>
+    <dgm:effectClrLst/>
+    <dgm:txLinClrLst/>
+    <dgm:txFillClrLst meth="repeat">
+      <a:schemeClr val="tx1"/>
+    </dgm:txFillClrLst>
+    <dgm:txEffectClrLst/>
+  </dgm:styleLbl>
+  <dgm:styleLbl name="parChTrans1D4">
+    <dgm:fillClrLst meth="repeat">
+      <a:schemeClr val="accent1"/>
+    </dgm:fillClrLst>
+    <dgm:linClrLst meth="repeat">
+      <a:schemeClr val="accent1">
+        <a:shade val="80000"/>
+      </a:schemeClr>
+    </dgm:linClrLst>
+    <dgm:effectClrLst/>
+    <dgm:txLinClrLst/>
+    <dgm:txFillClrLst meth="repeat">
+      <a:schemeClr val="tx1"/>
+    </dgm:txFillClrLst>
+    <dgm:txEffectClrLst/>
+  </dgm:styleLbl>
+  <dgm:styleLbl name="fgAcc1">
+    <dgm:fillClrLst meth="repeat">
+      <a:schemeClr val="lt1">
+        <a:alpha val="90000"/>
+      </a:schemeClr>
+    </dgm:fillClrLst>
+    <dgm:linClrLst meth="repeat">
+      <a:schemeClr val="accent1"/>
+    </dgm:linClrLst>
+    <dgm:effectClrLst/>
+    <dgm:txLinClrLst/>
+    <dgm:txFillClrLst meth="repeat">
+      <a:schemeClr val="dk1"/>
+    </dgm:txFillClrLst>
+    <dgm:txEffectClrLst/>
+  </dgm:styleLbl>
+  <dgm:styleLbl name="conFgAcc1">
+    <dgm:fillClrLst meth="repeat">
+      <a:schemeClr val="lt1">
+        <a:alpha val="90000"/>
+      </a:schemeClr>
+    </dgm:fillClrLst>
+    <dgm:linClrLst meth="repeat">
+      <a:schemeClr val="accent1"/>
+    </dgm:linClrLst>
+    <dgm:effectClrLst/>
+    <dgm:txLinClrLst/>
+    <dgm:txFillClrLst meth="repeat">
+      <a:schemeClr val="dk1"/>
+    </dgm:txFillClrLst>
+    <dgm:txEffectClrLst/>
+  </dgm:styleLbl>
+  <dgm:styleLbl name="alignAcc1">
+    <dgm:fillClrLst meth="repeat">
+      <a:schemeClr val="lt1">
+        <a:alpha val="90000"/>
+      </a:schemeClr>
+    </dgm:fillClrLst>
+    <dgm:linClrLst meth="repeat">
+      <a:schemeClr val="accent1"/>
+    </dgm:linClrLst>
+    <dgm:effectClrLst/>
+    <dgm:txLinClrLst/>
+    <dgm:txFillClrLst meth="repeat">
+      <a:schemeClr val="dk1"/>
+    </dgm:txFillClrLst>
+    <dgm:txEffectClrLst/>
+  </dgm:styleLbl>
+  <dgm:styleLbl name="trAlignAcc1">
+    <dgm:fillClrLst meth="repeat">
+      <a:schemeClr val="lt1">
+        <a:alpha val="40000"/>
+      </a:schemeClr>
+    </dgm:fillClrLst>
+    <dgm:linClrLst meth="repeat">
+      <a:schemeClr val="accent1"/>
+    </dgm:linClrLst>
+    <dgm:effectClrLst/>
+    <dgm:txLinClrLst/>
+    <dgm:txFillClrLst meth="repeat">
+      <a:schemeClr val="dk1"/>
+    </dgm:txFillClrLst>
+    <dgm:txEffectClrLst/>
+  </dgm:styleLbl>
+  <dgm:styleLbl name="bgAcc1">
+    <dgm:fillClrLst meth="repeat">
+      <a:schemeClr val="lt1">
+        <a:alpha val="90000"/>
+      </a:schemeClr>
+    </dgm:fillClrLst>
+    <dgm:linClrLst meth="repeat">
+      <a:schemeClr val="accent1"/>
+    </dgm:linClrLst>
+    <dgm:effectClrLst/>
+    <dgm:txLinClrLst/>
+    <dgm:txFillClrLst meth="repeat">
+      <a:schemeClr val="dk1"/>
+    </dgm:txFillClrLst>
+    <dgm:txEffectClrLst/>
+  </dgm:styleLbl>
+  <dgm:styleLbl name="solidFgAcc1">
+    <dgm:fillClrLst meth="repeat">
+      <a:schemeClr val="lt1"/>
+    </dgm:fillClrLst>
+    <dgm:linClrLst meth="repeat">
+      <a:schemeClr val="accent1"/>
+    </dgm:linClrLst>
+    <dgm:effectClrLst/>
+    <dgm:txLinClrLst/>
+    <dgm:txFillClrLst meth="repeat">
+      <a:schemeClr val="dk1"/>
+    </dgm:txFillClrLst>
+    <dgm:txEffectClrLst/>
+  </dgm:styleLbl>
+  <dgm:styleLbl name="solidAlignAcc1">
+    <dgm:fillClrLst meth="repeat">
+      <a:schemeClr val="lt1"/>
+    </dgm:fillClrLst>
+    <dgm:linClrLst meth="repeat">
+      <a:schemeClr val="accent1"/>
+    </dgm:linClrLst>
+    <dgm:effectClrLst/>
+    <dgm:txLinClrLst/>
+    <dgm:txFillClrLst meth="repeat">
+      <a:schemeClr val="dk1"/>
+    </dgm:txFillClrLst>
+    <dgm:txEffectClrLst/>
+  </dgm:styleLbl>
+  <dgm:styleLbl name="solidBgAcc1">
+    <dgm:fillClrLst meth="repeat">
+      <a:schemeClr val="lt1"/>
+    </dgm:fillClrLst>
+    <dgm:linClrLst meth="repeat">
+      <a:schemeClr val="accent1"/>
+    </dgm:linClrLst>
+    <dgm:effectClrLst/>
+    <dgm:txLinClrLst/>
+    <dgm:txFillClrLst meth="repeat">
+      <a:schemeClr val="dk1"/>
+    </dgm:txFillClrLst>
+    <dgm:txEffectClrLst/>
+  </dgm:styleLbl>
+  <dgm:styleLbl name="fgAccFollowNode1">
+    <dgm:fillClrLst meth="repeat">
+      <a:schemeClr val="accent1">
+        <a:alpha val="90000"/>
+        <a:tint val="40000"/>
+      </a:schemeClr>
+    </dgm:fillClrLst>
+    <dgm:linClrLst meth="repeat">
+      <a:schemeClr val="accent1">
+        <a:alpha val="90000"/>
+        <a:tint val="40000"/>
+      </a:schemeClr>
+    </dgm:linClrLst>
+    <dgm:effectClrLst/>
+    <dgm:txLinClrLst/>
+    <dgm:txFillClrLst meth="repeat">
+      <a:schemeClr val="dk1"/>
+    </dgm:txFillClrLst>
+    <dgm:txEffectClrLst/>
+  </dgm:styleLbl>
+  <dgm:styleLbl name="alignAccFollowNode1">
+    <dgm:fillClrLst meth="repeat">
+      <a:schemeClr val="accent1">
+        <a:alpha val="90000"/>
+        <a:tint val="40000"/>
+      </a:schemeClr>
+    </dgm:fillClrLst>
+    <dgm:linClrLst meth="repeat">
+      <a:schemeClr val="accent1">
+        <a:alpha val="90000"/>
+        <a:tint val="40000"/>
+      </a:schemeClr>
+    </dgm:linClrLst>
+    <dgm:effectClrLst/>
+    <dgm:txLinClrLst/>
+    <dgm:txFillClrLst meth="repeat">
+      <a:schemeClr val="dk1"/>
+    </dgm:txFillClrLst>
+    <dgm:txEffectClrLst/>
+  </dgm:styleLbl>
+  <dgm:styleLbl name="bgAccFollowNode1">
+    <dgm:fillClrLst meth="repeat">
+      <a:schemeClr val="accent1">
+        <a:alpha val="90000"/>
+        <a:tint val="40000"/>
+      </a:schemeClr>
+    </dgm:fillClrLst>
+    <dgm:linClrLst meth="repeat">
+      <a:schemeClr val="accent1">
+        <a:alpha val="90000"/>
+        <a:tint val="40000"/>
+      </a:schemeClr>
+    </dgm:linClrLst>
+    <dgm:effectClrLst/>
+    <dgm:txLinClrLst/>
+    <dgm:txFillClrLst meth="repeat">
+      <a:schemeClr val="dk1"/>
+    </dgm:txFillClrLst>
+    <dgm:txEffectClrLst/>
+  </dgm:styleLbl>
+  <dgm:styleLbl name="fgAcc0">
+    <dgm:fillClrLst meth="repeat">
+      <a:schemeClr val="lt1">
+        <a:alpha val="90000"/>
+      </a:schemeClr>
+    </dgm:fillClrLst>
+    <dgm:linClrLst meth="repeat">
+      <a:schemeClr val="accent1"/>
+    </dgm:linClrLst>
+    <dgm:effectClrLst/>
+    <dgm:txLinClrLst/>
+    <dgm:txFillClrLst meth="repeat">
+      <a:schemeClr val="dk1"/>
+    </dgm:txFillClrLst>
+    <dgm:txEffectClrLst/>
+  </dgm:styleLbl>
+  <dgm:styleLbl name="fgAcc2">
+    <dgm:fillClrLst meth="repeat">
+      <a:schemeClr val="lt1">
+        <a:alpha val="90000"/>
+      </a:schemeClr>
+    </dgm:fillClrLst>
+    <dgm:linClrLst meth="repeat">
+      <a:schemeClr val="accent1"/>
+    </dgm:linClrLst>
+    <dgm:effectClrLst/>
+    <dgm:txLinClrLst/>
+    <dgm:txFillClrLst meth="repeat">
+      <a:schemeClr val="dk1"/>
+    </dgm:txFillClrLst>
+    <dgm:txEffectClrLst/>
+  </dgm:styleLbl>
+  <dgm:styleLbl name="fgAcc3">
+    <dgm:fillClrLst meth="repeat">
+      <a:schemeClr val="lt1">
+        <a:alpha val="90000"/>
+      </a:schemeClr>
+    </dgm:fillClrLst>
+    <dgm:linClrLst meth="repeat">
+      <a:schemeClr val="accent1"/>
+    </dgm:linClrLst>
+    <dgm:effectClrLst/>
+    <dgm:txLinClrLst/>
+    <dgm:txFillClrLst meth="repeat">
+      <a:schemeClr val="dk1"/>
+    </dgm:txFillClrLst>
+    <dgm:txEffectClrLst/>
+  </dgm:styleLbl>
+  <dgm:styleLbl name="fgAcc4">
+    <dgm:fillClrLst meth="repeat">
+      <a:schemeClr val="lt1">
+        <a:alpha val="90000"/>
+      </a:schemeClr>
+    </dgm:fillClrLst>
+    <dgm:linClrLst meth="repeat">
+      <a:schemeClr val="accent1"/>
+    </dgm:linClrLst>
+    <dgm:effectClrLst/>
+    <dgm:txLinClrLst/>
+    <dgm:txFillClrLst meth="repeat">
+      <a:schemeClr val="dk1"/>
+    </dgm:txFillClrLst>
+    <dgm:txEffectClrLst/>
+  </dgm:styleLbl>
+  <dgm:styleLbl name="bgShp">
+    <dgm:fillClrLst meth="repeat">
+      <a:schemeClr val="accent1">
+        <a:tint val="40000"/>
+      </a:schemeClr>
+    </dgm:fillClrLst>
+    <dgm:linClrLst meth="repeat">
+      <a:schemeClr val="accent1"/>
+    </dgm:linClrLst>
+    <dgm:effectClrLst/>
+    <dgm:txLinClrLst/>
+    <dgm:txFillClrLst meth="repeat">
+      <a:schemeClr val="dk1"/>
+    </dgm:txFillClrLst>
+    <dgm:txEffectClrLst/>
+  </dgm:styleLbl>
+  <dgm:styleLbl name="dkBgShp">
+    <dgm:fillClrLst meth="repeat">
+      <a:schemeClr val="accent1">
+        <a:shade val="80000"/>
+      </a:schemeClr>
+    </dgm:fillClrLst>
+    <dgm:linClrLst meth="repeat">
+      <a:schemeClr val="accent1"/>
+    </dgm:linClrLst>
+    <dgm:effectClrLst/>
+    <dgm:txLinClrLst/>
+    <dgm:txFillClrLst meth="repeat">
+      <a:schemeClr val="lt1"/>
+    </dgm:txFillClrLst>
+    <dgm:txEffectClrLst/>
+  </dgm:styleLbl>
+  <dgm:styleLbl name="trBgShp">
+    <dgm:fillClrLst meth="repeat">
+      <a:schemeClr val="accent1">
+        <a:tint val="50000"/>
+        <a:alpha val="40000"/>
+      </a:schemeClr>
+    </dgm:fillClrLst>
+    <dgm:linClrLst meth="repeat">
+      <a:schemeClr val="accent1"/>
+    </dgm:linClrLst>
+    <dgm:effectClrLst/>
+    <dgm:txLinClrLst/>
+    <dgm:txFillClrLst meth="repeat">
+      <a:schemeClr val="lt1"/>
+    </dgm:txFillClrLst>
+    <dgm:txEffectClrLst/>
+  </dgm:styleLbl>
+  <dgm:styleLbl name="fgShp">
+    <dgm:fillClrLst meth="repeat">
+      <a:schemeClr val="accent1">
+        <a:tint val="60000"/>
+      </a:schemeClr>
+    </dgm:fillClrLst>
+    <dgm:linClrLst meth="repeat">
+      <a:schemeClr val="lt1"/>
+    </dgm:linClrLst>
+    <dgm:effectClrLst/>
+    <dgm:txLinClrLst/>
+    <dgm:txFillClrLst meth="repeat">
+      <a:schemeClr val="dk1"/>
+    </dgm:txFillClrLst>
+    <dgm:txEffectClrLst/>
+  </dgm:styleLbl>
+  <dgm:styleLbl name="revTx">
+    <dgm:fillClrLst meth="repeat">
+      <a:schemeClr val="lt1">
+        <a:alpha val="0"/>
+      </a:schemeClr>
+    </dgm:fillClrLst>
+    <dgm:linClrLst meth="repeat">
+      <a:schemeClr val="dk1">
+        <a:alpha val="0"/>
+      </a:schemeClr>
+    </dgm:linClrLst>
+    <dgm:effectClrLst/>
+    <dgm:txLinClrLst/>
+    <dgm:txFillClrLst meth="repeat">
+      <a:schemeClr val="tx1"/>
+    </dgm:txFillClrLst>
+    <dgm:txEffectClrLst/>
+  </dgm:styleLbl>
+</dgm:colorsDef>
+</file>
+
+<file path=ppt/diagrams/colors6.xml><?xml version="1.0" encoding="utf-8"?>
+<dgm:colorsDef xmlns:dgm="http://schemas.openxmlformats.org/drawingml/2006/diagram" xmlns:a="http://schemas.openxmlformats.org/drawingml/2006/main" uniqueId="urn:microsoft.com/office/officeart/2005/8/colors/accent1_2">
+  <dgm:title val=""/>
+  <dgm:desc val=""/>
+  <dgm:catLst>
+    <dgm:cat type="accent1" pri="11200"/>
+  </dgm:catLst>
+  <dgm:styleLbl name="node0">
+    <dgm:fillClrLst meth="repeat">
+      <a:schemeClr val="accent1"/>
+    </dgm:fillClrLst>
+    <dgm:linClrLst meth="repeat">
+      <a:schemeClr val="lt1"/>
+    </dgm:linClrLst>
+    <dgm:effectClrLst/>
+    <dgm:txLinClrLst/>
+    <dgm:txFillClrLst/>
+    <dgm:txEffectClrLst/>
+  </dgm:styleLbl>
+  <dgm:styleLbl name="alignNode1">
+    <dgm:fillClrLst meth="repeat">
+      <a:schemeClr val="accent1"/>
+    </dgm:fillClrLst>
+    <dgm:linClrLst meth="repeat">
+      <a:schemeClr val="accent1"/>
+    </dgm:linClrLst>
+    <dgm:effectClrLst/>
+    <dgm:txLinClrLst/>
+    <dgm:txFillClrLst/>
+    <dgm:txEffectClrLst/>
+  </dgm:styleLbl>
+  <dgm:styleLbl name="node1">
+    <dgm:fillClrLst meth="repeat">
+      <a:schemeClr val="accent1"/>
+    </dgm:fillClrLst>
+    <dgm:linClrLst meth="repeat">
+      <a:schemeClr val="lt1"/>
+    </dgm:linClrLst>
+    <dgm:effectClrLst/>
+    <dgm:txLinClrLst/>
+    <dgm:txFillClrLst/>
+    <dgm:txEffectClrLst/>
+  </dgm:styleLbl>
+  <dgm:styleLbl name="lnNode1">
+    <dgm:fillClrLst meth="repeat">
+      <a:schemeClr val="accent1"/>
+    </dgm:fillClrLst>
+    <dgm:linClrLst meth="repeat">
+      <a:schemeClr val="lt1"/>
+    </dgm:linClrLst>
+    <dgm:effectClrLst/>
+    <dgm:txLinClrLst/>
+    <dgm:txFillClrLst/>
+    <dgm:txEffectClrLst/>
+  </dgm:styleLbl>
+  <dgm:styleLbl name="vennNode1">
+    <dgm:fillClrLst meth="repeat">
+      <a:schemeClr val="accent1">
+        <a:alpha val="50000"/>
+      </a:schemeClr>
+    </dgm:fillClrLst>
+    <dgm:linClrLst meth="repeat">
+      <a:schemeClr val="lt1"/>
+    </dgm:linClrLst>
+    <dgm:effectClrLst/>
+    <dgm:txLinClrLst/>
+    <dgm:txFillClrLst/>
+    <dgm:txEffectClrLst/>
+  </dgm:styleLbl>
+  <dgm:styleLbl name="node2">
+    <dgm:fillClrLst meth="repeat">
+      <a:schemeClr val="accent1"/>
+    </dgm:fillClrLst>
+    <dgm:linClrLst meth="repeat">
+      <a:schemeClr val="lt1"/>
+    </dgm:linClrLst>
+    <dgm:effectClrLst/>
+    <dgm:txLinClrLst/>
+    <dgm:txFillClrLst/>
+    <dgm:txEffectClrLst/>
+  </dgm:styleLbl>
+  <dgm:styleLbl name="node3">
+    <dgm:fillClrLst meth="repeat">
+      <a:schemeClr val="accent1"/>
+    </dgm:fillClrLst>
+    <dgm:linClrLst meth="repeat">
+      <a:schemeClr val="lt1"/>
+    </dgm:linClrLst>
+    <dgm:effectClrLst/>
+    <dgm:txLinClrLst/>
+    <dgm:txFillClrLst/>
+    <dgm:txEffectClrLst/>
+  </dgm:styleLbl>
+  <dgm:styleLbl name="node4">
+    <dgm:fillClrLst meth="repeat">
+      <a:schemeClr val="accent1"/>
+    </dgm:fillClrLst>
+    <dgm:linClrLst meth="repeat">
+      <a:schemeClr val="lt1"/>
+    </dgm:linClrLst>
+    <dgm:effectClrLst/>
+    <dgm:txLinClrLst/>
+    <dgm:txFillClrLst/>
+    <dgm:txEffectClrLst/>
+  </dgm:styleLbl>
+  <dgm:styleLbl name="fgImgPlace1">
+    <dgm:fillClrLst meth="repeat">
+      <a:schemeClr val="accent1">
+        <a:tint val="50000"/>
+      </a:schemeClr>
+    </dgm:fillClrLst>
+    <dgm:linClrLst meth="repeat">
+      <a:schemeClr val="lt1"/>
+    </dgm:linClrLst>
+    <dgm:effectClrLst/>
+    <dgm:txLinClrLst/>
+    <dgm:txFillClrLst meth="repeat">
+      <a:schemeClr val="lt1"/>
+    </dgm:txFillClrLst>
+    <dgm:txEffectClrLst/>
+  </dgm:styleLbl>
+  <dgm:styleLbl name="alignImgPlace1">
+    <dgm:fillClrLst meth="repeat">
+      <a:schemeClr val="accent1">
+        <a:tint val="50000"/>
+      </a:schemeClr>
+    </dgm:fillClrLst>
+    <dgm:linClrLst meth="repeat">
+      <a:schemeClr val="lt1"/>
+    </dgm:linClrLst>
+    <dgm:effectClrLst/>
+    <dgm:txLinClrLst/>
+    <dgm:txFillClrLst meth="repeat">
+      <a:schemeClr val="lt1"/>
+    </dgm:txFillClrLst>
+    <dgm:txEffectClrLst/>
+  </dgm:styleLbl>
+  <dgm:styleLbl name="bgImgPlace1">
+    <dgm:fillClrLst meth="repeat">
+      <a:schemeClr val="accent1">
+        <a:tint val="50000"/>
+      </a:schemeClr>
+    </dgm:fillClrLst>
+    <dgm:linClrLst meth="repeat">
+      <a:schemeClr val="lt1"/>
+    </dgm:linClrLst>
+    <dgm:effectClrLst/>
+    <dgm:txLinClrLst/>
+    <dgm:txFillClrLst meth="repeat">
+      <a:schemeClr val="lt1"/>
+    </dgm:txFillClrLst>
+    <dgm:txEffectClrLst/>
+  </dgm:styleLbl>
+  <dgm:styleLbl name="sibTrans2D1">
+    <dgm:fillClrLst meth="repeat">
+      <a:schemeClr val="accent1">
+        <a:tint val="60000"/>
+      </a:schemeClr>
+    </dgm:fillClrLst>
+    <dgm:linClrLst meth="repeat">
+      <a:schemeClr val="accent1">
+        <a:tint val="60000"/>
+      </a:schemeClr>
+    </dgm:linClrLst>
+    <dgm:effectClrLst/>
+    <dgm:txLinClrLst/>
+    <dgm:txFillClrLst/>
+    <dgm:txEffectClrLst/>
+  </dgm:styleLbl>
+  <dgm:styleLbl name="fgSibTrans2D1">
+    <dgm:fillClrLst meth="repeat">
+      <a:schemeClr val="accent1">
+        <a:tint val="60000"/>
+      </a:schemeClr>
+    </dgm:fillClrLst>
+    <dgm:linClrLst meth="repeat">
+      <a:schemeClr val="accent1">
+        <a:tint val="60000"/>
+      </a:schemeClr>
+    </dgm:linClrLst>
+    <dgm:effectClrLst/>
+    <dgm:txLinClrLst/>
+    <dgm:txFillClrLst/>
+    <dgm:txEffectClrLst/>
+  </dgm:styleLbl>
+  <dgm:styleLbl name="bgSibTrans2D1">
+    <dgm:fillClrLst meth="repeat">
+      <a:schemeClr val="accent1">
+        <a:tint val="60000"/>
+      </a:schemeClr>
+    </dgm:fillClrLst>
+    <dgm:linClrLst meth="repeat">
+      <a:schemeClr val="accent1">
+        <a:tint val="60000"/>
+      </a:schemeClr>
+    </dgm:linClrLst>
+    <dgm:effectClrLst/>
+    <dgm:txLinClrLst/>
+    <dgm:txFillClrLst/>
+    <dgm:txEffectClrLst/>
+  </dgm:styleLbl>
+  <dgm:styleLbl name="sibTrans1D1">
+    <dgm:fillClrLst meth="repeat">
+      <a:schemeClr val="accent1"/>
+    </dgm:fillClrLst>
+    <dgm:linClrLst meth="repeat">
+      <a:schemeClr val="accent1"/>
+    </dgm:linClrLst>
+    <dgm:effectClrLst/>
+    <dgm:txLinClrLst/>
+    <dgm:txFillClrLst meth="repeat">
+      <a:schemeClr val="tx1"/>
+    </dgm:txFillClrLst>
+    <dgm:txEffectClrLst/>
+  </dgm:styleLbl>
+  <dgm:styleLbl name="callout">
+    <dgm:fillClrLst meth="repeat">
+      <a:schemeClr val="accent1"/>
+    </dgm:fillClrLst>
+    <dgm:linClrLst meth="repeat">
+      <a:schemeClr val="accent1">
+        <a:tint val="50000"/>
+      </a:schemeClr>
+    </dgm:linClrLst>
+    <dgm:effectClrLst/>
+    <dgm:txLinClrLst/>
+    <dgm:txFillClrLst meth="repeat">
+      <a:schemeClr val="tx1"/>
+    </dgm:txFillClrLst>
+    <dgm:txEffectClrLst/>
+  </dgm:styleLbl>
+  <dgm:styleLbl name="asst0">
+    <dgm:fillClrLst meth="repeat">
+      <a:schemeClr val="accent1"/>
+    </dgm:fillClrLst>
+    <dgm:linClrLst meth="repeat">
+      <a:schemeClr val="lt1"/>
+    </dgm:linClrLst>
+    <dgm:effectClrLst/>
+    <dgm:txLinClrLst/>
+    <dgm:txFillClrLst/>
+    <dgm:txEffectClrLst/>
+  </dgm:styleLbl>
+  <dgm:styleLbl name="asst1">
+    <dgm:fillClrLst meth="repeat">
+      <a:schemeClr val="accent1"/>
+    </dgm:fillClrLst>
+    <dgm:linClrLst meth="repeat">
+      <a:schemeClr val="lt1"/>
+    </dgm:linClrLst>
+    <dgm:effectClrLst/>
+    <dgm:txLinClrLst/>
+    <dgm:txFillClrLst/>
+    <dgm:txEffectClrLst/>
+  </dgm:styleLbl>
+  <dgm:styleLbl name="asst2">
+    <dgm:fillClrLst meth="repeat">
+      <a:schemeClr val="accent1"/>
+    </dgm:fillClrLst>
+    <dgm:linClrLst meth="repeat">
+      <a:schemeClr val="lt1"/>
+    </dgm:linClrLst>
+    <dgm:effectClrLst/>
+    <dgm:txLinClrLst/>
+    <dgm:txFillClrLst/>
+    <dgm:txEffectClrLst/>
+  </dgm:styleLbl>
+  <dgm:styleLbl name="asst3">
+    <dgm:fillClrLst meth="repeat">
+      <a:schemeClr val="accent1"/>
+    </dgm:fillClrLst>
+    <dgm:linClrLst meth="repeat">
+      <a:schemeClr val="lt1"/>
+    </dgm:linClrLst>
+    <dgm:effectClrLst/>
+    <dgm:txLinClrLst/>
+    <dgm:txFillClrLst/>
+    <dgm:txEffectClrLst/>
+  </dgm:styleLbl>
+  <dgm:styleLbl name="asst4">
+    <dgm:fillClrLst meth="repeat">
+      <a:schemeClr val="accent1"/>
+    </dgm:fillClrLst>
+    <dgm:linClrLst meth="repeat">
+      <a:schemeClr val="lt1"/>
+    </dgm:linClrLst>
+    <dgm:effectClrLst/>
+    <dgm:txLinClrLst/>
+    <dgm:txFillClrLst/>
+    <dgm:txEffectClrLst/>
+  </dgm:styleLbl>
+  <dgm:styleLbl name="parChTrans2D1">
+    <dgm:fillClrLst meth="repeat">
+      <a:schemeClr val="accent1">
+        <a:tint val="60000"/>
+      </a:schemeClr>
+    </dgm:fillClrLst>
+    <dgm:linClrLst meth="repeat">
+      <a:schemeClr val="accent1">
+        <a:tint val="60000"/>
+      </a:schemeClr>
+    </dgm:linClrLst>
+    <dgm:effectClrLst/>
+    <dgm:txLinClrLst/>
+    <dgm:txFillClrLst meth="repeat">
+      <a:schemeClr val="lt1"/>
+    </dgm:txFillClrLst>
+    <dgm:txEffectClrLst/>
+  </dgm:styleLbl>
+  <dgm:styleLbl name="parChTrans2D2">
+    <dgm:fillClrLst meth="repeat">
+      <a:schemeClr val="accent1"/>
+    </dgm:fillClrLst>
+    <dgm:linClrLst meth="repeat">
+      <a:schemeClr val="accent1"/>
+    </dgm:linClrLst>
+    <dgm:effectClrLst/>
+    <dgm:txLinClrLst/>
+    <dgm:txFillClrLst meth="repeat">
+      <a:schemeClr val="lt1"/>
+    </dgm:txFillClrLst>
+    <dgm:txEffectClrLst/>
+  </dgm:styleLbl>
+  <dgm:styleLbl name="parChTrans2D3">
+    <dgm:fillClrLst meth="repeat">
+      <a:schemeClr val="accent1"/>
+    </dgm:fillClrLst>
+    <dgm:linClrLst meth="repeat">
+      <a:schemeClr val="accent1"/>
+    </dgm:linClrLst>
+    <dgm:effectClrLst/>
+    <dgm:txLinClrLst/>
+    <dgm:txFillClrLst meth="repeat">
+      <a:schemeClr val="lt1"/>
+    </dgm:txFillClrLst>
+    <dgm:txEffectClrLst/>
+  </dgm:styleLbl>
+  <dgm:styleLbl name="parChTrans2D4">
+    <dgm:fillClrLst meth="repeat">
+      <a:schemeClr val="accent1"/>
+    </dgm:fillClrLst>
+    <dgm:linClrLst meth="repeat">
+      <a:schemeClr val="accent1"/>
+    </dgm:linClrLst>
+    <dgm:effectClrLst/>
+    <dgm:txLinClrLst/>
+    <dgm:txFillClrLst meth="repeat">
+      <a:schemeClr val="lt1"/>
+    </dgm:txFillClrLst>
+    <dgm:txEffectClrLst/>
+  </dgm:styleLbl>
+  <dgm:styleLbl name="parChTrans1D1">
+    <dgm:fillClrLst meth="repeat">
+      <a:schemeClr val="accent1"/>
+    </dgm:fillClrLst>
+    <dgm:linClrLst meth="repeat">
+      <a:schemeClr val="accent1">
+        <a:shade val="60000"/>
+      </a:schemeClr>
+    </dgm:linClrLst>
+    <dgm:effectClrLst/>
+    <dgm:txLinClrLst/>
+    <dgm:txFillClrLst meth="repeat">
+      <a:schemeClr val="tx1"/>
+    </dgm:txFillClrLst>
+    <dgm:txEffectClrLst/>
+  </dgm:styleLbl>
+  <dgm:styleLbl name="parChTrans1D2">
+    <dgm:fillClrLst meth="repeat">
+      <a:schemeClr val="accent1"/>
+    </dgm:fillClrLst>
+    <dgm:linClrLst meth="repeat">
+      <a:schemeClr val="accent1">
+        <a:shade val="60000"/>
+      </a:schemeClr>
+    </dgm:linClrLst>
+    <dgm:effectClrLst/>
+    <dgm:txLinClrLst/>
+    <dgm:txFillClrLst meth="repeat">
+      <a:schemeClr val="tx1"/>
+    </dgm:txFillClrLst>
+    <dgm:txEffectClrLst/>
+  </dgm:styleLbl>
+  <dgm:styleLbl name="parChTrans1D3">
+    <dgm:fillClrLst meth="repeat">
+      <a:schemeClr val="accent1"/>
+    </dgm:fillClrLst>
+    <dgm:linClrLst meth="repeat">
+      <a:schemeClr val="accent1">
+        <a:shade val="80000"/>
+      </a:schemeClr>
+    </dgm:linClrLst>
+    <dgm:effectClrLst/>
+    <dgm:txLinClrLst/>
+    <dgm:txFillClrLst meth="repeat">
+      <a:schemeClr val="tx1"/>
+    </dgm:txFillClrLst>
+    <dgm:txEffectClrLst/>
+  </dgm:styleLbl>
+  <dgm:styleLbl name="parChTrans1D4">
+    <dgm:fillClrLst meth="repeat">
+      <a:schemeClr val="accent1"/>
+    </dgm:fillClrLst>
+    <dgm:linClrLst meth="repeat">
+      <a:schemeClr val="accent1">
+        <a:shade val="80000"/>
+      </a:schemeClr>
+    </dgm:linClrLst>
+    <dgm:effectClrLst/>
+    <dgm:txLinClrLst/>
+    <dgm:txFillClrLst meth="repeat">
+      <a:schemeClr val="tx1"/>
+    </dgm:txFillClrLst>
+    <dgm:txEffectClrLst/>
+  </dgm:styleLbl>
+  <dgm:styleLbl name="fgAcc1">
+    <dgm:fillClrLst meth="repeat">
+      <a:schemeClr val="lt1">
+        <a:alpha val="90000"/>
+      </a:schemeClr>
+    </dgm:fillClrLst>
+    <dgm:linClrLst meth="repeat">
+      <a:schemeClr val="accent1"/>
+    </dgm:linClrLst>
+    <dgm:effectClrLst/>
+    <dgm:txLinClrLst/>
+    <dgm:txFillClrLst meth="repeat">
+      <a:schemeClr val="dk1"/>
+    </dgm:txFillClrLst>
+    <dgm:txEffectClrLst/>
+  </dgm:styleLbl>
+  <dgm:styleLbl name="conFgAcc1">
+    <dgm:fillClrLst meth="repeat">
+      <a:schemeClr val="lt1">
+        <a:alpha val="90000"/>
+      </a:schemeClr>
+    </dgm:fillClrLst>
+    <dgm:linClrLst meth="repeat">
+      <a:schemeClr val="accent1"/>
+    </dgm:linClrLst>
+    <dgm:effectClrLst/>
+    <dgm:txLinClrLst/>
+    <dgm:txFillClrLst meth="repeat">
+      <a:schemeClr val="dk1"/>
+    </dgm:txFillClrLst>
+    <dgm:txEffectClrLst/>
+  </dgm:styleLbl>
+  <dgm:styleLbl name="alignAcc1">
+    <dgm:fillClrLst meth="repeat">
+      <a:schemeClr val="lt1">
+        <a:alpha val="90000"/>
+      </a:schemeClr>
+    </dgm:fillClrLst>
+    <dgm:linClrLst meth="repeat">
+      <a:schemeClr val="accent1"/>
+    </dgm:linClrLst>
+    <dgm:effectClrLst/>
+    <dgm:txLinClrLst/>
+    <dgm:txFillClrLst meth="repeat">
+      <a:schemeClr val="dk1"/>
+    </dgm:txFillClrLst>
+    <dgm:txEffectClrLst/>
+  </dgm:styleLbl>
+  <dgm:styleLbl name="trAlignAcc1">
+    <dgm:fillClrLst meth="repeat">
+      <a:schemeClr val="lt1">
+        <a:alpha val="40000"/>
+      </a:schemeClr>
+    </dgm:fillClrLst>
+    <dgm:linClrLst meth="repeat">
+      <a:schemeClr val="accent1"/>
+    </dgm:linClrLst>
+    <dgm:effectClrLst/>
+    <dgm:txLinClrLst/>
+    <dgm:txFillClrLst meth="repeat">
+      <a:schemeClr val="dk1"/>
+    </dgm:txFillClrLst>
+    <dgm:txEffectClrLst/>
+  </dgm:styleLbl>
+  <dgm:styleLbl name="bgAcc1">
+    <dgm:fillClrLst meth="repeat">
+      <a:schemeClr val="lt1">
+        <a:alpha val="90000"/>
+      </a:schemeClr>
+    </dgm:fillClrLst>
+    <dgm:linClrLst meth="repeat">
+      <a:schemeClr val="accent1"/>
+    </dgm:linClrLst>
+    <dgm:effectClrLst/>
+    <dgm:txLinClrLst/>
+    <dgm:txFillClrLst meth="repeat">
+      <a:schemeClr val="dk1"/>
+    </dgm:txFillClrLst>
+    <dgm:txEffectClrLst/>
+  </dgm:styleLbl>
+  <dgm:styleLbl name="solidFgAcc1">
+    <dgm:fillClrLst meth="repeat">
+      <a:schemeClr val="lt1"/>
+    </dgm:fillClrLst>
+    <dgm:linClrLst meth="repeat">
+      <a:schemeClr val="accent1"/>
+    </dgm:linClrLst>
+    <dgm:effectClrLst/>
+    <dgm:txLinClrLst/>
+    <dgm:txFillClrLst meth="repeat">
+      <a:schemeClr val="dk1"/>
+    </dgm:txFillClrLst>
+    <dgm:txEffectClrLst/>
+  </dgm:styleLbl>
+  <dgm:styleLbl name="solidAlignAcc1">
+    <dgm:fillClrLst meth="repeat">
+      <a:schemeClr val="lt1"/>
+    </dgm:fillClrLst>
+    <dgm:linClrLst meth="repeat">
+      <a:schemeClr val="accent1"/>
+    </dgm:linClrLst>
+    <dgm:effectClrLst/>
+    <dgm:txLinClrLst/>
+    <dgm:txFillClrLst meth="repeat">
+      <a:schemeClr val="dk1"/>
+    </dgm:txFillClrLst>
+    <dgm:txEffectClrLst/>
+  </dgm:styleLbl>
+  <dgm:styleLbl name="solidBgAcc1">
+    <dgm:fillClrLst meth="repeat">
+      <a:schemeClr val="lt1"/>
+    </dgm:fillClrLst>
+    <dgm:linClrLst meth="repeat">
+      <a:schemeClr val="accent1"/>
+    </dgm:linClrLst>
+    <dgm:effectClrLst/>
+    <dgm:txLinClrLst/>
+    <dgm:txFillClrLst meth="repeat">
+      <a:schemeClr val="dk1"/>
+    </dgm:txFillClrLst>
+    <dgm:txEffectClrLst/>
+  </dgm:styleLbl>
+  <dgm:styleLbl name="fgAccFollowNode1">
+    <dgm:fillClrLst meth="repeat">
+      <a:schemeClr val="accent1">
+        <a:alpha val="90000"/>
+        <a:tint val="40000"/>
+      </a:schemeClr>
+    </dgm:fillClrLst>
+    <dgm:linClrLst meth="repeat">
+      <a:schemeClr val="accent1">
+        <a:alpha val="90000"/>
+        <a:tint val="40000"/>
+      </a:schemeClr>
+    </dgm:linClrLst>
+    <dgm:effectClrLst/>
+    <dgm:txLinClrLst/>
+    <dgm:txFillClrLst meth="repeat">
+      <a:schemeClr val="dk1"/>
+    </dgm:txFillClrLst>
+    <dgm:txEffectClrLst/>
+  </dgm:styleLbl>
+  <dgm:styleLbl name="alignAccFollowNode1">
+    <dgm:fillClrLst meth="repeat">
+      <a:schemeClr val="accent1">
+        <a:alpha val="90000"/>
+        <a:tint val="40000"/>
+      </a:schemeClr>
+    </dgm:fillClrLst>
+    <dgm:linClrLst meth="repeat">
+      <a:schemeClr val="accent1">
+        <a:alpha val="90000"/>
+        <a:tint val="40000"/>
+      </a:schemeClr>
+    </dgm:linClrLst>
+    <dgm:effectClrLst/>
+    <dgm:txLinClrLst/>
+    <dgm:txFillClrLst meth="repeat">
+      <a:schemeClr val="dk1"/>
+    </dgm:txFillClrLst>
+    <dgm:txEffectClrLst/>
+  </dgm:styleLbl>
+  <dgm:styleLbl name="bgAccFollowNode1">
+    <dgm:fillClrLst meth="repeat">
+      <a:schemeClr val="accent1">
+        <a:alpha val="90000"/>
+        <a:tint val="40000"/>
+      </a:schemeClr>
+    </dgm:fillClrLst>
+    <dgm:linClrLst meth="repeat">
+      <a:schemeClr val="accent1">
+        <a:alpha val="90000"/>
+        <a:tint val="40000"/>
+      </a:schemeClr>
+    </dgm:linClrLst>
+    <dgm:effectClrLst/>
+    <dgm:txLinClrLst/>
+    <dgm:txFillClrLst meth="repeat">
+      <a:schemeClr val="dk1"/>
+    </dgm:txFillClrLst>
+    <dgm:txEffectClrLst/>
+  </dgm:styleLbl>
+  <dgm:styleLbl name="fgAcc0">
+    <dgm:fillClrLst meth="repeat">
+      <a:schemeClr val="lt1">
+        <a:alpha val="90000"/>
+      </a:schemeClr>
+    </dgm:fillClrLst>
+    <dgm:linClrLst meth="repeat">
+      <a:schemeClr val="accent1"/>
+    </dgm:linClrLst>
+    <dgm:effectClrLst/>
+    <dgm:txLinClrLst/>
+    <dgm:txFillClrLst meth="repeat">
+      <a:schemeClr val="dk1"/>
+    </dgm:txFillClrLst>
+    <dgm:txEffectClrLst/>
+  </dgm:styleLbl>
+  <dgm:styleLbl name="fgAcc2">
+    <dgm:fillClrLst meth="repeat">
+      <a:schemeClr val="lt1">
+        <a:alpha val="90000"/>
+      </a:schemeClr>
+    </dgm:fillClrLst>
+    <dgm:linClrLst meth="repeat">
+      <a:schemeClr val="accent1"/>
+    </dgm:linClrLst>
+    <dgm:effectClrLst/>
+    <dgm:txLinClrLst/>
+    <dgm:txFillClrLst meth="repeat">
+      <a:schemeClr val="dk1"/>
+    </dgm:txFillClrLst>
+    <dgm:txEffectClrLst/>
+  </dgm:styleLbl>
+  <dgm:styleLbl name="fgAcc3">
+    <dgm:fillClrLst meth="repeat">
+      <a:schemeClr val="lt1">
+        <a:alpha val="90000"/>
+      </a:schemeClr>
+    </dgm:fillClrLst>
+    <dgm:linClrLst meth="repeat">
+      <a:schemeClr val="accent1"/>
+    </dgm:linClrLst>
+    <dgm:effectClrLst/>
+    <dgm:txLinClrLst/>
+    <dgm:txFillClrLst meth="repeat">
+      <a:schemeClr val="dk1"/>
+    </dgm:txFillClrLst>
+    <dgm:txEffectClrLst/>
+  </dgm:styleLbl>
+  <dgm:styleLbl name="fgAcc4">
+    <dgm:fillClrLst meth="repeat">
+      <a:schemeClr val="lt1">
+        <a:alpha val="90000"/>
+      </a:schemeClr>
+    </dgm:fillClrLst>
+    <dgm:linClrLst meth="repeat">
+      <a:schemeClr val="accent1"/>
+    </dgm:linClrLst>
+    <dgm:effectClrLst/>
+    <dgm:txLinClrLst/>
+    <dgm:txFillClrLst meth="repeat">
+      <a:schemeClr val="dk1"/>
+    </dgm:txFillClrLst>
+    <dgm:txEffectClrLst/>
+  </dgm:styleLbl>
+  <dgm:styleLbl name="bgShp">
+    <dgm:fillClrLst meth="repeat">
+      <a:schemeClr val="accent1">
+        <a:tint val="40000"/>
+      </a:schemeClr>
+    </dgm:fillClrLst>
+    <dgm:linClrLst meth="repeat">
+      <a:schemeClr val="accent1"/>
+    </dgm:linClrLst>
+    <dgm:effectClrLst/>
+    <dgm:txLinClrLst/>
+    <dgm:txFillClrLst meth="repeat">
+      <a:schemeClr val="dk1"/>
+    </dgm:txFillClrLst>
+    <dgm:txEffectClrLst/>
+  </dgm:styleLbl>
+  <dgm:styleLbl name="dkBgShp">
+    <dgm:fillClrLst meth="repeat">
+      <a:schemeClr val="accent1">
+        <a:shade val="80000"/>
+      </a:schemeClr>
+    </dgm:fillClrLst>
+    <dgm:linClrLst meth="repeat">
+      <a:schemeClr val="accent1"/>
+    </dgm:linClrLst>
+    <dgm:effectClrLst/>
+    <dgm:txLinClrLst/>
+    <dgm:txFillClrLst meth="repeat">
+      <a:schemeClr val="lt1"/>
+    </dgm:txFillClrLst>
+    <dgm:txEffectClrLst/>
+  </dgm:styleLbl>
+  <dgm:styleLbl name="trBgShp">
+    <dgm:fillClrLst meth="repeat">
+      <a:schemeClr val="accent1">
+        <a:tint val="50000"/>
+        <a:alpha val="40000"/>
+      </a:schemeClr>
+    </dgm:fillClrLst>
+    <dgm:linClrLst meth="repeat">
+      <a:schemeClr val="accent1"/>
+    </dgm:linClrLst>
+    <dgm:effectClrLst/>
+    <dgm:txLinClrLst/>
+    <dgm:txFillClrLst meth="repeat">
+      <a:schemeClr val="lt1"/>
+    </dgm:txFillClrLst>
+    <dgm:txEffectClrLst/>
+  </dgm:styleLbl>
+  <dgm:styleLbl name="fgShp">
+    <dgm:fillClrLst meth="repeat">
+      <a:schemeClr val="accent1">
+        <a:tint val="60000"/>
+      </a:schemeClr>
+    </dgm:fillClrLst>
+    <dgm:linClrLst meth="repeat">
+      <a:schemeClr val="lt1"/>
+    </dgm:linClrLst>
+    <dgm:effectClrLst/>
+    <dgm:txLinClrLst/>
+    <dgm:txFillClrLst meth="repeat">
+      <a:schemeClr val="dk1"/>
+    </dgm:txFillClrLst>
+    <dgm:txEffectClrLst/>
+  </dgm:styleLbl>
+  <dgm:styleLbl name="revTx">
+    <dgm:fillClrLst meth="repeat">
+      <a:schemeClr val="lt1">
+        <a:alpha val="0"/>
+      </a:schemeClr>
+    </dgm:fillClrLst>
+    <dgm:linClrLst meth="repeat">
+      <a:schemeClr val="dk1">
+        <a:alpha val="0"/>
+      </a:schemeClr>
+    </dgm:linClrLst>
+    <dgm:effectClrLst/>
+    <dgm:txLinClrLst/>
+    <dgm:txFillClrLst meth="repeat">
+      <a:schemeClr val="tx1"/>
+    </dgm:txFillClrLst>
+    <dgm:txEffectClrLst/>
+  </dgm:styleLbl>
+</dgm:colorsDef>
+</file>
+
 <file path=ppt/diagrams/data1.xml><?xml version="1.0" encoding="utf-8"?>
+<dgm:dataModel xmlns:dgm="http://schemas.openxmlformats.org/drawingml/2006/diagram" xmlns:a="http://schemas.openxmlformats.org/drawingml/2006/main">
+  <dgm:ptLst>
+    <dgm:pt modelId="{31ABE9CE-A2CF-4B8B-8C72-275F0C077D2F}" type="doc">
+      <dgm:prSet loTypeId="urn:diagrams.loki3.com/BracketList" loCatId="list" qsTypeId="urn:microsoft.com/office/officeart/2005/8/quickstyle/simple1" qsCatId="simple" csTypeId="urn:microsoft.com/office/officeart/2005/8/colors/accent1_2" csCatId="accent1" phldr="1"/>
+      <dgm:spPr/>
+      <dgm:t>
+        <a:bodyPr/>
+        <a:lstStyle/>
+        <a:p>
+          <a:endParaRPr lang="en-IN"/>
+        </a:p>
+      </dgm:t>
+    </dgm:pt>
+    <dgm:pt modelId="{C0B89E38-1D2E-4777-94A1-2FA0024C4703}">
+      <dgm:prSet phldrT="[Text]" phldr="0"/>
+      <dgm:spPr/>
+      <dgm:t>
+        <a:bodyPr/>
+        <a:lstStyle/>
+        <a:p>
+          <a:r>
+            <a:rPr lang="en-IN" dirty="0"/>
+            <a:t>Name</a:t>
+          </a:r>
+        </a:p>
+      </dgm:t>
+    </dgm:pt>
+    <dgm:pt modelId="{BE9ED5F9-CCF5-4A74-8F9E-257E8C0838FB}" type="parTrans" cxnId="{8A38E858-39DB-402E-AE70-51EE421C14E3}">
+      <dgm:prSet/>
+      <dgm:spPr/>
+      <dgm:t>
+        <a:bodyPr/>
+        <a:lstStyle/>
+        <a:p>
+          <a:endParaRPr lang="en-IN"/>
+        </a:p>
+      </dgm:t>
+    </dgm:pt>
+    <dgm:pt modelId="{84D5FA49-771B-4A79-A704-B6BFA5C83635}" type="sibTrans" cxnId="{8A38E858-39DB-402E-AE70-51EE421C14E3}">
+      <dgm:prSet/>
+      <dgm:spPr/>
+      <dgm:t>
+        <a:bodyPr/>
+        <a:lstStyle/>
+        <a:p>
+          <a:endParaRPr lang="en-IN"/>
+        </a:p>
+      </dgm:t>
+    </dgm:pt>
+    <dgm:pt modelId="{256A08B2-D66E-4B35-A1CF-7015488F85B9}">
+      <dgm:prSet phldrT="[Text]" phldr="0"/>
+      <dgm:spPr/>
+      <dgm:t>
+        <a:bodyPr/>
+        <a:lstStyle/>
+        <a:p>
+          <a:r>
+            <a:rPr lang="en-IN" dirty="0"/>
+            <a:t>January 2025</a:t>
+          </a:r>
+        </a:p>
+      </dgm:t>
+    </dgm:pt>
+    <dgm:pt modelId="{B7F80C2B-FA0E-45A2-B734-1EF4CDF9FDCA}" type="parTrans" cxnId="{11945C8A-483F-4FC0-8121-B8A9FAEBAA30}">
+      <dgm:prSet/>
+      <dgm:spPr/>
+      <dgm:t>
+        <a:bodyPr/>
+        <a:lstStyle/>
+        <a:p>
+          <a:endParaRPr lang="en-IN"/>
+        </a:p>
+      </dgm:t>
+    </dgm:pt>
+    <dgm:pt modelId="{30ACB3E3-3BF2-40DF-AE92-1D179AF52958}" type="sibTrans" cxnId="{11945C8A-483F-4FC0-8121-B8A9FAEBAA30}">
+      <dgm:prSet/>
+      <dgm:spPr/>
+      <dgm:t>
+        <a:bodyPr/>
+        <a:lstStyle/>
+        <a:p>
+          <a:endParaRPr lang="en-IN"/>
+        </a:p>
+      </dgm:t>
+    </dgm:pt>
+    <dgm:pt modelId="{B4B8CF6C-B074-4592-9797-19A8164FF698}">
+      <dgm:prSet phldrT="[Text]" phldr="0"/>
+      <dgm:spPr/>
+      <dgm:t>
+        <a:bodyPr/>
+        <a:lstStyle/>
+        <a:p>
+          <a:r>
+            <a:rPr lang="en-IN" dirty="0"/>
+            <a:t>Location</a:t>
+          </a:r>
+        </a:p>
+      </dgm:t>
+    </dgm:pt>
+    <dgm:pt modelId="{448774FB-C75F-447B-AAB2-8E6664487DA7}" type="parTrans" cxnId="{8B4A2CBB-A5E3-4634-A3A4-EA78D8BF590A}">
+      <dgm:prSet/>
+      <dgm:spPr/>
+      <dgm:t>
+        <a:bodyPr/>
+        <a:lstStyle/>
+        <a:p>
+          <a:endParaRPr lang="en-IN"/>
+        </a:p>
+      </dgm:t>
+    </dgm:pt>
+    <dgm:pt modelId="{1822FB53-0929-4903-A799-46D77E815478}" type="sibTrans" cxnId="{8B4A2CBB-A5E3-4634-A3A4-EA78D8BF590A}">
+      <dgm:prSet/>
+      <dgm:spPr/>
+      <dgm:t>
+        <a:bodyPr/>
+        <a:lstStyle/>
+        <a:p>
+          <a:endParaRPr lang="en-IN"/>
+        </a:p>
+      </dgm:t>
+    </dgm:pt>
+    <dgm:pt modelId="{E67CCB40-47B5-4182-B591-F791C0FC5A40}">
+      <dgm:prSet phldrT="[Text]" phldr="0"/>
+      <dgm:spPr/>
+      <dgm:t>
+        <a:bodyPr/>
+        <a:lstStyle/>
+        <a:p>
+          <a:r>
+            <a:rPr lang="en-IN" dirty="0"/>
+            <a:t>Satna, Madhya Pradesh</a:t>
+          </a:r>
+        </a:p>
+      </dgm:t>
+    </dgm:pt>
+    <dgm:pt modelId="{FFE12B05-7FE9-440E-A452-13054E2F3F29}" type="parTrans" cxnId="{A4D63483-23C0-4179-A619-E6614CEF5D45}">
+      <dgm:prSet/>
+      <dgm:spPr/>
+      <dgm:t>
+        <a:bodyPr/>
+        <a:lstStyle/>
+        <a:p>
+          <a:endParaRPr lang="en-IN"/>
+        </a:p>
+      </dgm:t>
+    </dgm:pt>
+    <dgm:pt modelId="{11AB6AD9-2FA2-4C02-B7BA-84139A60326F}" type="sibTrans" cxnId="{A4D63483-23C0-4179-A619-E6614CEF5D45}">
+      <dgm:prSet/>
+      <dgm:spPr/>
+      <dgm:t>
+        <a:bodyPr/>
+        <a:lstStyle/>
+        <a:p>
+          <a:endParaRPr lang="en-IN"/>
+        </a:p>
+      </dgm:t>
+    </dgm:pt>
+    <dgm:pt modelId="{CACBD0F7-8CB9-404B-AEDC-B647F6749847}">
+      <dgm:prSet phldrT="[Text]" phldr="0"/>
+      <dgm:spPr/>
+      <dgm:t>
+        <a:bodyPr/>
+        <a:lstStyle/>
+        <a:p>
+          <a:r>
+            <a:rPr lang="en-IN"/>
+            <a:t>Co-Founder</a:t>
+          </a:r>
+          <a:endParaRPr lang="en-IN" dirty="0"/>
+        </a:p>
+      </dgm:t>
+    </dgm:pt>
+    <dgm:pt modelId="{E26C920E-8397-4C7C-8AA5-330474D91885}" type="parTrans" cxnId="{A7741CD0-A699-4DB9-8D5E-7E6D015DD72F}">
+      <dgm:prSet/>
+      <dgm:spPr/>
+      <dgm:t>
+        <a:bodyPr/>
+        <a:lstStyle/>
+        <a:p>
+          <a:endParaRPr lang="en-IN"/>
+        </a:p>
+      </dgm:t>
+    </dgm:pt>
+    <dgm:pt modelId="{71801061-4AEE-462C-9AD7-D6263441434D}" type="sibTrans" cxnId="{A7741CD0-A699-4DB9-8D5E-7E6D015DD72F}">
+      <dgm:prSet/>
+      <dgm:spPr/>
+      <dgm:t>
+        <a:bodyPr/>
+        <a:lstStyle/>
+        <a:p>
+          <a:endParaRPr lang="en-IN"/>
+        </a:p>
+      </dgm:t>
+    </dgm:pt>
+    <dgm:pt modelId="{A7729BE8-6315-4DE3-AEB5-4323EC34FB44}">
+      <dgm:prSet phldrT="[Text]" phldr="0"/>
+      <dgm:spPr/>
+      <dgm:t>
+        <a:bodyPr/>
+        <a:lstStyle/>
+        <a:p>
+          <a:r>
+            <a:rPr lang="en-IN"/>
+            <a:t>Shubham Agarwal</a:t>
+          </a:r>
+          <a:endParaRPr lang="en-IN" dirty="0"/>
+        </a:p>
+      </dgm:t>
+    </dgm:pt>
+    <dgm:pt modelId="{132DB702-3086-4008-930B-C496025983EF}" type="parTrans" cxnId="{657C4CA1-B181-4744-B239-E2001CACB003}">
+      <dgm:prSet/>
+      <dgm:spPr/>
+      <dgm:t>
+        <a:bodyPr/>
+        <a:lstStyle/>
+        <a:p>
+          <a:endParaRPr lang="en-IN"/>
+        </a:p>
+      </dgm:t>
+    </dgm:pt>
+    <dgm:pt modelId="{45E1C83D-330E-4725-AEE9-38A383612744}" type="sibTrans" cxnId="{657C4CA1-B181-4744-B239-E2001CACB003}">
+      <dgm:prSet/>
+      <dgm:spPr/>
+      <dgm:t>
+        <a:bodyPr/>
+        <a:lstStyle/>
+        <a:p>
+          <a:endParaRPr lang="en-IN"/>
+        </a:p>
+      </dgm:t>
+    </dgm:pt>
+    <dgm:pt modelId="{003DDF66-8BE7-4790-A7AF-0D942E1254B4}">
+      <dgm:prSet phldrT="[Text]" phldr="0"/>
+      <dgm:spPr/>
+      <dgm:t>
+        <a:bodyPr/>
+        <a:lstStyle/>
+        <a:p>
+          <a:r>
+            <a:rPr lang="en-IN"/>
+            <a:t>Tushar Jaiswal</a:t>
+          </a:r>
+          <a:endParaRPr lang="en-IN" dirty="0"/>
+        </a:p>
+      </dgm:t>
+    </dgm:pt>
+    <dgm:pt modelId="{39086F15-1466-4B87-9646-961FCA4C5A9B}" type="parTrans" cxnId="{F622BF15-70F7-4CDE-84F5-EA25D8C40E06}">
+      <dgm:prSet/>
+      <dgm:spPr/>
+      <dgm:t>
+        <a:bodyPr/>
+        <a:lstStyle/>
+        <a:p>
+          <a:endParaRPr lang="en-IN"/>
+        </a:p>
+      </dgm:t>
+    </dgm:pt>
+    <dgm:pt modelId="{3C0D05C4-B717-4B90-831D-DF1EEB641092}" type="sibTrans" cxnId="{F622BF15-70F7-4CDE-84F5-EA25D8C40E06}">
+      <dgm:prSet/>
+      <dgm:spPr/>
+      <dgm:t>
+        <a:bodyPr/>
+        <a:lstStyle/>
+        <a:p>
+          <a:endParaRPr lang="en-IN"/>
+        </a:p>
+      </dgm:t>
+    </dgm:pt>
+    <dgm:pt modelId="{0EBDB6CA-3825-4CDE-BF9C-862A732026F7}">
+      <dgm:prSet phldrT="[Text]" phldr="0"/>
+      <dgm:spPr/>
+      <dgm:t>
+        <a:bodyPr/>
+        <a:lstStyle/>
+        <a:p>
+          <a:r>
+            <a:rPr lang="en-IN"/>
+            <a:t>Origin</a:t>
+          </a:r>
+        </a:p>
+      </dgm:t>
+    </dgm:pt>
+    <dgm:pt modelId="{10B41553-2B25-4F07-883A-A0EB6F7D1CEE}" type="parTrans" cxnId="{7BB0AC24-8AD7-417A-B98F-EDB1869B8192}">
+      <dgm:prSet/>
+      <dgm:spPr/>
+      <dgm:t>
+        <a:bodyPr/>
+        <a:lstStyle/>
+        <a:p>
+          <a:endParaRPr lang="en-IN"/>
+        </a:p>
+      </dgm:t>
+    </dgm:pt>
+    <dgm:pt modelId="{055D9798-56FA-4B25-BDA9-02236393F85D}" type="sibTrans" cxnId="{7BB0AC24-8AD7-417A-B98F-EDB1869B8192}">
+      <dgm:prSet/>
+      <dgm:spPr/>
+      <dgm:t>
+        <a:bodyPr/>
+        <a:lstStyle/>
+        <a:p>
+          <a:endParaRPr lang="en-IN"/>
+        </a:p>
+      </dgm:t>
+    </dgm:pt>
+    <dgm:pt modelId="{8E69025F-3999-4BA5-863F-59A0384E61B4}">
+      <dgm:prSet phldrT="[Text]" phldr="0"/>
+      <dgm:spPr/>
+      <dgm:t>
+        <a:bodyPr/>
+        <a:lstStyle/>
+        <a:p>
+          <a:r>
+            <a:rPr lang="en-IN"/>
+            <a:t>ThousandX Ventures LLP</a:t>
+          </a:r>
+        </a:p>
+      </dgm:t>
+    </dgm:pt>
+    <dgm:pt modelId="{4C5582E0-AD81-487C-BF21-4DB679DE5916}" type="parTrans" cxnId="{B4FB0A80-D96E-4DA6-BD0E-F63175545648}">
+      <dgm:prSet/>
+      <dgm:spPr/>
+      <dgm:t>
+        <a:bodyPr/>
+        <a:lstStyle/>
+        <a:p>
+          <a:endParaRPr lang="en-IN"/>
+        </a:p>
+      </dgm:t>
+    </dgm:pt>
+    <dgm:pt modelId="{73954F01-853C-433C-A880-AE23C496BB48}" type="sibTrans" cxnId="{B4FB0A80-D96E-4DA6-BD0E-F63175545648}">
+      <dgm:prSet/>
+      <dgm:spPr/>
+      <dgm:t>
+        <a:bodyPr/>
+        <a:lstStyle/>
+        <a:p>
+          <a:endParaRPr lang="en-IN"/>
+        </a:p>
+      </dgm:t>
+    </dgm:pt>
+    <dgm:pt modelId="{48787486-B434-43CA-8E78-D29D771369A3}" type="pres">
+      <dgm:prSet presAssocID="{31ABE9CE-A2CF-4B8B-8C72-275F0C077D2F}" presName="Name0" presStyleCnt="0">
+        <dgm:presLayoutVars>
+          <dgm:dir/>
+          <dgm:animLvl val="lvl"/>
+          <dgm:resizeHandles val="exact"/>
+        </dgm:presLayoutVars>
+      </dgm:prSet>
+      <dgm:spPr/>
+    </dgm:pt>
+    <dgm:pt modelId="{0C803C25-78D3-4057-BA39-EB263315A48D}" type="pres">
+      <dgm:prSet presAssocID="{C0B89E38-1D2E-4777-94A1-2FA0024C4703}" presName="linNode" presStyleCnt="0"/>
+      <dgm:spPr/>
+    </dgm:pt>
+    <dgm:pt modelId="{627CFD93-BDF9-4BF2-B056-99120554CFCB}" type="pres">
+      <dgm:prSet presAssocID="{C0B89E38-1D2E-4777-94A1-2FA0024C4703}" presName="parTx" presStyleLbl="revTx" presStyleIdx="0" presStyleCnt="4">
+        <dgm:presLayoutVars>
+          <dgm:chMax val="1"/>
+          <dgm:bulletEnabled val="1"/>
+        </dgm:presLayoutVars>
+      </dgm:prSet>
+      <dgm:spPr/>
+    </dgm:pt>
+    <dgm:pt modelId="{9E2825F5-2BA7-4F4A-8152-BFDBCA07375D}" type="pres">
+      <dgm:prSet presAssocID="{C0B89E38-1D2E-4777-94A1-2FA0024C4703}" presName="bracket" presStyleLbl="parChTrans1D1" presStyleIdx="0" presStyleCnt="4"/>
+      <dgm:spPr/>
+    </dgm:pt>
+    <dgm:pt modelId="{D33DD7FC-950B-4352-BE8C-1485087C1248}" type="pres">
+      <dgm:prSet presAssocID="{C0B89E38-1D2E-4777-94A1-2FA0024C4703}" presName="spH" presStyleCnt="0"/>
+      <dgm:spPr/>
+    </dgm:pt>
+    <dgm:pt modelId="{4D93818D-E233-49E2-B914-104B7D262605}" type="pres">
+      <dgm:prSet presAssocID="{C0B89E38-1D2E-4777-94A1-2FA0024C4703}" presName="desTx" presStyleLbl="node1" presStyleIdx="0" presStyleCnt="4">
+        <dgm:presLayoutVars>
+          <dgm:bulletEnabled val="1"/>
+        </dgm:presLayoutVars>
+      </dgm:prSet>
+      <dgm:spPr/>
+    </dgm:pt>
+    <dgm:pt modelId="{F2F5EF17-AA7A-4611-A7D4-6003543C4D78}" type="pres">
+      <dgm:prSet presAssocID="{84D5FA49-771B-4A79-A704-B6BFA5C83635}" presName="spV" presStyleCnt="0"/>
+      <dgm:spPr/>
+    </dgm:pt>
+    <dgm:pt modelId="{2184389D-5AC1-4561-B1B1-A3766859F5A6}" type="pres">
+      <dgm:prSet presAssocID="{0EBDB6CA-3825-4CDE-BF9C-862A732026F7}" presName="linNode" presStyleCnt="0"/>
+      <dgm:spPr/>
+    </dgm:pt>
+    <dgm:pt modelId="{A6BE4494-167B-4C99-A2C2-9780C7AAD5CB}" type="pres">
+      <dgm:prSet presAssocID="{0EBDB6CA-3825-4CDE-BF9C-862A732026F7}" presName="parTx" presStyleLbl="revTx" presStyleIdx="1" presStyleCnt="4">
+        <dgm:presLayoutVars>
+          <dgm:chMax val="1"/>
+          <dgm:bulletEnabled val="1"/>
+        </dgm:presLayoutVars>
+      </dgm:prSet>
+      <dgm:spPr/>
+    </dgm:pt>
+    <dgm:pt modelId="{AA46FB30-C8E3-4F8E-B10D-06ACED20C07B}" type="pres">
+      <dgm:prSet presAssocID="{0EBDB6CA-3825-4CDE-BF9C-862A732026F7}" presName="bracket" presStyleLbl="parChTrans1D1" presStyleIdx="1" presStyleCnt="4"/>
+      <dgm:spPr/>
+    </dgm:pt>
+    <dgm:pt modelId="{48F9F7A4-6740-49DE-B28F-D3011020A0F5}" type="pres">
+      <dgm:prSet presAssocID="{0EBDB6CA-3825-4CDE-BF9C-862A732026F7}" presName="spH" presStyleCnt="0"/>
+      <dgm:spPr/>
+    </dgm:pt>
+    <dgm:pt modelId="{9829DF46-306D-47C2-8BCE-4154421700AE}" type="pres">
+      <dgm:prSet presAssocID="{0EBDB6CA-3825-4CDE-BF9C-862A732026F7}" presName="desTx" presStyleLbl="node1" presStyleIdx="1" presStyleCnt="4">
+        <dgm:presLayoutVars>
+          <dgm:bulletEnabled val="1"/>
+        </dgm:presLayoutVars>
+      </dgm:prSet>
+      <dgm:spPr/>
+    </dgm:pt>
+    <dgm:pt modelId="{C792CEE9-B400-4EEB-BD11-317F47403790}" type="pres">
+      <dgm:prSet presAssocID="{055D9798-56FA-4B25-BDA9-02236393F85D}" presName="spV" presStyleCnt="0"/>
+      <dgm:spPr/>
+    </dgm:pt>
+    <dgm:pt modelId="{36339D22-4E2E-4CF6-BBE3-8A64F8D3B42A}" type="pres">
+      <dgm:prSet presAssocID="{B4B8CF6C-B074-4592-9797-19A8164FF698}" presName="linNode" presStyleCnt="0"/>
+      <dgm:spPr/>
+    </dgm:pt>
+    <dgm:pt modelId="{53889986-D178-4BD0-BF65-89A642B05593}" type="pres">
+      <dgm:prSet presAssocID="{B4B8CF6C-B074-4592-9797-19A8164FF698}" presName="parTx" presStyleLbl="revTx" presStyleIdx="2" presStyleCnt="4">
+        <dgm:presLayoutVars>
+          <dgm:chMax val="1"/>
+          <dgm:bulletEnabled val="1"/>
+        </dgm:presLayoutVars>
+      </dgm:prSet>
+      <dgm:spPr/>
+    </dgm:pt>
+    <dgm:pt modelId="{EF094E06-9E93-4682-A72C-EBE52A384597}" type="pres">
+      <dgm:prSet presAssocID="{B4B8CF6C-B074-4592-9797-19A8164FF698}" presName="bracket" presStyleLbl="parChTrans1D1" presStyleIdx="2" presStyleCnt="4"/>
+      <dgm:spPr/>
+    </dgm:pt>
+    <dgm:pt modelId="{E5D93038-F00C-42F3-9A1B-3A3142DCB1F0}" type="pres">
+      <dgm:prSet presAssocID="{B4B8CF6C-B074-4592-9797-19A8164FF698}" presName="spH" presStyleCnt="0"/>
+      <dgm:spPr/>
+    </dgm:pt>
+    <dgm:pt modelId="{9457566C-7E01-4D79-B5D4-2CDDDC008EEA}" type="pres">
+      <dgm:prSet presAssocID="{B4B8CF6C-B074-4592-9797-19A8164FF698}" presName="desTx" presStyleLbl="node1" presStyleIdx="2" presStyleCnt="4">
+        <dgm:presLayoutVars>
+          <dgm:bulletEnabled val="1"/>
+        </dgm:presLayoutVars>
+      </dgm:prSet>
+      <dgm:spPr/>
+    </dgm:pt>
+    <dgm:pt modelId="{B2E92154-24E7-4FB2-B8B1-34F2A43ABD7D}" type="pres">
+      <dgm:prSet presAssocID="{1822FB53-0929-4903-A799-46D77E815478}" presName="spV" presStyleCnt="0"/>
+      <dgm:spPr/>
+    </dgm:pt>
+    <dgm:pt modelId="{CA744355-FEBB-4B68-9F71-555F037843C8}" type="pres">
+      <dgm:prSet presAssocID="{CACBD0F7-8CB9-404B-AEDC-B647F6749847}" presName="linNode" presStyleCnt="0"/>
+      <dgm:spPr/>
+    </dgm:pt>
+    <dgm:pt modelId="{E98D9AA4-DAA4-4566-8A3C-C7EC33F4E1C9}" type="pres">
+      <dgm:prSet presAssocID="{CACBD0F7-8CB9-404B-AEDC-B647F6749847}" presName="parTx" presStyleLbl="revTx" presStyleIdx="3" presStyleCnt="4">
+        <dgm:presLayoutVars>
+          <dgm:chMax val="1"/>
+          <dgm:bulletEnabled val="1"/>
+        </dgm:presLayoutVars>
+      </dgm:prSet>
+      <dgm:spPr/>
+    </dgm:pt>
+    <dgm:pt modelId="{84042C5C-68EA-4F13-8FD2-AC142F927076}" type="pres">
+      <dgm:prSet presAssocID="{CACBD0F7-8CB9-404B-AEDC-B647F6749847}" presName="bracket" presStyleLbl="parChTrans1D1" presStyleIdx="3" presStyleCnt="4"/>
+      <dgm:spPr/>
+    </dgm:pt>
+    <dgm:pt modelId="{17FB654C-24C1-48AC-87BC-C7C5C22204F8}" type="pres">
+      <dgm:prSet presAssocID="{CACBD0F7-8CB9-404B-AEDC-B647F6749847}" presName="spH" presStyleCnt="0"/>
+      <dgm:spPr/>
+    </dgm:pt>
+    <dgm:pt modelId="{9110D3E0-31E9-4A57-9A18-526DA69C7C1A}" type="pres">
+      <dgm:prSet presAssocID="{CACBD0F7-8CB9-404B-AEDC-B647F6749847}" presName="desTx" presStyleLbl="node1" presStyleIdx="3" presStyleCnt="4">
+        <dgm:presLayoutVars>
+          <dgm:bulletEnabled val="1"/>
+        </dgm:presLayoutVars>
+      </dgm:prSet>
+      <dgm:spPr/>
+    </dgm:pt>
+  </dgm:ptLst>
+  <dgm:cxnLst>
+    <dgm:cxn modelId="{937F4E09-4A4B-4203-8B5F-3C7A1C09131A}" type="presOf" srcId="{31ABE9CE-A2CF-4B8B-8C72-275F0C077D2F}" destId="{48787486-B434-43CA-8E78-D29D771369A3}" srcOrd="0" destOrd="0" presId="urn:diagrams.loki3.com/BracketList"/>
+    <dgm:cxn modelId="{F622BF15-70F7-4CDE-84F5-EA25D8C40E06}" srcId="{CACBD0F7-8CB9-404B-AEDC-B647F6749847}" destId="{003DDF66-8BE7-4790-A7AF-0D942E1254B4}" srcOrd="1" destOrd="0" parTransId="{39086F15-1466-4B87-9646-961FCA4C5A9B}" sibTransId="{3C0D05C4-B717-4B90-831D-DF1EEB641092}"/>
+    <dgm:cxn modelId="{7BB0AC24-8AD7-417A-B98F-EDB1869B8192}" srcId="{31ABE9CE-A2CF-4B8B-8C72-275F0C077D2F}" destId="{0EBDB6CA-3825-4CDE-BF9C-862A732026F7}" srcOrd="1" destOrd="0" parTransId="{10B41553-2B25-4F07-883A-A0EB6F7D1CEE}" sibTransId="{055D9798-56FA-4B25-BDA9-02236393F85D}"/>
+    <dgm:cxn modelId="{2647F52F-EEEB-4EF7-B6B4-ABB0954E0070}" type="presOf" srcId="{003DDF66-8BE7-4790-A7AF-0D942E1254B4}" destId="{9110D3E0-31E9-4A57-9A18-526DA69C7C1A}" srcOrd="0" destOrd="1" presId="urn:diagrams.loki3.com/BracketList"/>
+    <dgm:cxn modelId="{09CBA03F-7243-49A3-AA64-DA84C4C85D58}" type="presOf" srcId="{E67CCB40-47B5-4182-B591-F791C0FC5A40}" destId="{9457566C-7E01-4D79-B5D4-2CDDDC008EEA}" srcOrd="0" destOrd="0" presId="urn:diagrams.loki3.com/BracketList"/>
+    <dgm:cxn modelId="{E3489674-85F4-434C-A40C-B7C0EA2380E8}" type="presOf" srcId="{256A08B2-D66E-4B35-A1CF-7015488F85B9}" destId="{9829DF46-306D-47C2-8BCE-4154421700AE}" srcOrd="0" destOrd="0" presId="urn:diagrams.loki3.com/BracketList"/>
+    <dgm:cxn modelId="{8A38E858-39DB-402E-AE70-51EE421C14E3}" srcId="{31ABE9CE-A2CF-4B8B-8C72-275F0C077D2F}" destId="{C0B89E38-1D2E-4777-94A1-2FA0024C4703}" srcOrd="0" destOrd="0" parTransId="{BE9ED5F9-CCF5-4A74-8F9E-257E8C0838FB}" sibTransId="{84D5FA49-771B-4A79-A704-B6BFA5C83635}"/>
+    <dgm:cxn modelId="{B4FB0A80-D96E-4DA6-BD0E-F63175545648}" srcId="{C0B89E38-1D2E-4777-94A1-2FA0024C4703}" destId="{8E69025F-3999-4BA5-863F-59A0384E61B4}" srcOrd="0" destOrd="0" parTransId="{4C5582E0-AD81-487C-BF21-4DB679DE5916}" sibTransId="{73954F01-853C-433C-A880-AE23C496BB48}"/>
+    <dgm:cxn modelId="{A4D63483-23C0-4179-A619-E6614CEF5D45}" srcId="{B4B8CF6C-B074-4592-9797-19A8164FF698}" destId="{E67CCB40-47B5-4182-B591-F791C0FC5A40}" srcOrd="0" destOrd="0" parTransId="{FFE12B05-7FE9-440E-A452-13054E2F3F29}" sibTransId="{11AB6AD9-2FA2-4C02-B7BA-84139A60326F}"/>
+    <dgm:cxn modelId="{11945C8A-483F-4FC0-8121-B8A9FAEBAA30}" srcId="{0EBDB6CA-3825-4CDE-BF9C-862A732026F7}" destId="{256A08B2-D66E-4B35-A1CF-7015488F85B9}" srcOrd="0" destOrd="0" parTransId="{B7F80C2B-FA0E-45A2-B734-1EF4CDF9FDCA}" sibTransId="{30ACB3E3-3BF2-40DF-AE92-1D179AF52958}"/>
+    <dgm:cxn modelId="{AFD4278F-FCF8-43C8-8A7F-7EF4A6BC06A0}" type="presOf" srcId="{C0B89E38-1D2E-4777-94A1-2FA0024C4703}" destId="{627CFD93-BDF9-4BF2-B056-99120554CFCB}" srcOrd="0" destOrd="0" presId="urn:diagrams.loki3.com/BracketList"/>
+    <dgm:cxn modelId="{657C4CA1-B181-4744-B239-E2001CACB003}" srcId="{CACBD0F7-8CB9-404B-AEDC-B647F6749847}" destId="{A7729BE8-6315-4DE3-AEB5-4323EC34FB44}" srcOrd="0" destOrd="0" parTransId="{132DB702-3086-4008-930B-C496025983EF}" sibTransId="{45E1C83D-330E-4725-AEE9-38A383612744}"/>
+    <dgm:cxn modelId="{4A8A9BBA-9DD6-4752-A518-4EFFB35C215F}" type="presOf" srcId="{A7729BE8-6315-4DE3-AEB5-4323EC34FB44}" destId="{9110D3E0-31E9-4A57-9A18-526DA69C7C1A}" srcOrd="0" destOrd="0" presId="urn:diagrams.loki3.com/BracketList"/>
+    <dgm:cxn modelId="{8B4A2CBB-A5E3-4634-A3A4-EA78D8BF590A}" srcId="{31ABE9CE-A2CF-4B8B-8C72-275F0C077D2F}" destId="{B4B8CF6C-B074-4592-9797-19A8164FF698}" srcOrd="2" destOrd="0" parTransId="{448774FB-C75F-447B-AAB2-8E6664487DA7}" sibTransId="{1822FB53-0929-4903-A799-46D77E815478}"/>
+    <dgm:cxn modelId="{A7741CD0-A699-4DB9-8D5E-7E6D015DD72F}" srcId="{31ABE9CE-A2CF-4B8B-8C72-275F0C077D2F}" destId="{CACBD0F7-8CB9-404B-AEDC-B647F6749847}" srcOrd="3" destOrd="0" parTransId="{E26C920E-8397-4C7C-8AA5-330474D91885}" sibTransId="{71801061-4AEE-462C-9AD7-D6263441434D}"/>
+    <dgm:cxn modelId="{121437DA-5058-43F3-B5A6-9544539E0AFD}" type="presOf" srcId="{B4B8CF6C-B074-4592-9797-19A8164FF698}" destId="{53889986-D178-4BD0-BF65-89A642B05593}" srcOrd="0" destOrd="0" presId="urn:diagrams.loki3.com/BracketList"/>
+    <dgm:cxn modelId="{8C75A5E4-C09A-4E98-A4E0-971B3BDC796D}" type="presOf" srcId="{8E69025F-3999-4BA5-863F-59A0384E61B4}" destId="{4D93818D-E233-49E2-B914-104B7D262605}" srcOrd="0" destOrd="0" presId="urn:diagrams.loki3.com/BracketList"/>
+    <dgm:cxn modelId="{E43181FD-6DC7-4013-8D6A-AD939970ECEE}" type="presOf" srcId="{0EBDB6CA-3825-4CDE-BF9C-862A732026F7}" destId="{A6BE4494-167B-4C99-A2C2-9780C7AAD5CB}" srcOrd="0" destOrd="0" presId="urn:diagrams.loki3.com/BracketList"/>
+    <dgm:cxn modelId="{4EAEBAFD-EACA-4E42-854E-B89921D5F103}" type="presOf" srcId="{CACBD0F7-8CB9-404B-AEDC-B647F6749847}" destId="{E98D9AA4-DAA4-4566-8A3C-C7EC33F4E1C9}" srcOrd="0" destOrd="0" presId="urn:diagrams.loki3.com/BracketList"/>
+    <dgm:cxn modelId="{527FF35F-AD9E-4E0E-98D0-A18C76F217E7}" type="presParOf" srcId="{48787486-B434-43CA-8E78-D29D771369A3}" destId="{0C803C25-78D3-4057-BA39-EB263315A48D}" srcOrd="0" destOrd="0" presId="urn:diagrams.loki3.com/BracketList"/>
+    <dgm:cxn modelId="{0AAC896B-35C8-4339-9E6F-A1FAE0104054}" type="presParOf" srcId="{0C803C25-78D3-4057-BA39-EB263315A48D}" destId="{627CFD93-BDF9-4BF2-B056-99120554CFCB}" srcOrd="0" destOrd="0" presId="urn:diagrams.loki3.com/BracketList"/>
+    <dgm:cxn modelId="{6A9F53EE-8C99-40A1-B647-57514C029FCD}" type="presParOf" srcId="{0C803C25-78D3-4057-BA39-EB263315A48D}" destId="{9E2825F5-2BA7-4F4A-8152-BFDBCA07375D}" srcOrd="1" destOrd="0" presId="urn:diagrams.loki3.com/BracketList"/>
+    <dgm:cxn modelId="{A1EF4D88-4578-4C38-A8C6-B00CB34638A3}" type="presParOf" srcId="{0C803C25-78D3-4057-BA39-EB263315A48D}" destId="{D33DD7FC-950B-4352-BE8C-1485087C1248}" srcOrd="2" destOrd="0" presId="urn:diagrams.loki3.com/BracketList"/>
+    <dgm:cxn modelId="{D4951609-B972-44EC-B7C6-D2D09891DA4A}" type="presParOf" srcId="{0C803C25-78D3-4057-BA39-EB263315A48D}" destId="{4D93818D-E233-49E2-B914-104B7D262605}" srcOrd="3" destOrd="0" presId="urn:diagrams.loki3.com/BracketList"/>
+    <dgm:cxn modelId="{31C764C1-4846-48FC-A7A3-21EDACF51BA1}" type="presParOf" srcId="{48787486-B434-43CA-8E78-D29D771369A3}" destId="{F2F5EF17-AA7A-4611-A7D4-6003543C4D78}" srcOrd="1" destOrd="0" presId="urn:diagrams.loki3.com/BracketList"/>
+    <dgm:cxn modelId="{E59ABF74-7999-4B83-82C3-68E339E12959}" type="presParOf" srcId="{48787486-B434-43CA-8E78-D29D771369A3}" destId="{2184389D-5AC1-4561-B1B1-A3766859F5A6}" srcOrd="2" destOrd="0" presId="urn:diagrams.loki3.com/BracketList"/>
+    <dgm:cxn modelId="{D07E0472-8009-48F3-8975-1C6663059834}" type="presParOf" srcId="{2184389D-5AC1-4561-B1B1-A3766859F5A6}" destId="{A6BE4494-167B-4C99-A2C2-9780C7AAD5CB}" srcOrd="0" destOrd="0" presId="urn:diagrams.loki3.com/BracketList"/>
+    <dgm:cxn modelId="{E4477EFE-56E9-4374-B611-AE88B211A57C}" type="presParOf" srcId="{2184389D-5AC1-4561-B1B1-A3766859F5A6}" destId="{AA46FB30-C8E3-4F8E-B10D-06ACED20C07B}" srcOrd="1" destOrd="0" presId="urn:diagrams.loki3.com/BracketList"/>
+    <dgm:cxn modelId="{F2DBC6C2-D26E-4F24-BE3D-FC886EB9822E}" type="presParOf" srcId="{2184389D-5AC1-4561-B1B1-A3766859F5A6}" destId="{48F9F7A4-6740-49DE-B28F-D3011020A0F5}" srcOrd="2" destOrd="0" presId="urn:diagrams.loki3.com/BracketList"/>
+    <dgm:cxn modelId="{8F7984AC-439F-42BE-B102-99DC66BBCFA0}" type="presParOf" srcId="{2184389D-5AC1-4561-B1B1-A3766859F5A6}" destId="{9829DF46-306D-47C2-8BCE-4154421700AE}" srcOrd="3" destOrd="0" presId="urn:diagrams.loki3.com/BracketList"/>
+    <dgm:cxn modelId="{14391EC0-883D-4555-9CF0-07A670F90EFD}" type="presParOf" srcId="{48787486-B434-43CA-8E78-D29D771369A3}" destId="{C792CEE9-B400-4EEB-BD11-317F47403790}" srcOrd="3" destOrd="0" presId="urn:diagrams.loki3.com/BracketList"/>
+    <dgm:cxn modelId="{F2D0A5D1-9CDA-4142-807F-3E3F1CB3AB17}" type="presParOf" srcId="{48787486-B434-43CA-8E78-D29D771369A3}" destId="{36339D22-4E2E-4CF6-BBE3-8A64F8D3B42A}" srcOrd="4" destOrd="0" presId="urn:diagrams.loki3.com/BracketList"/>
+    <dgm:cxn modelId="{BFFA020F-4570-42BF-87E7-2AA0D58BAB77}" type="presParOf" srcId="{36339D22-4E2E-4CF6-BBE3-8A64F8D3B42A}" destId="{53889986-D178-4BD0-BF65-89A642B05593}" srcOrd="0" destOrd="0" presId="urn:diagrams.loki3.com/BracketList"/>
+    <dgm:cxn modelId="{8F2D1813-1081-4083-A913-D82400375B67}" type="presParOf" srcId="{36339D22-4E2E-4CF6-BBE3-8A64F8D3B42A}" destId="{EF094E06-9E93-4682-A72C-EBE52A384597}" srcOrd="1" destOrd="0" presId="urn:diagrams.loki3.com/BracketList"/>
+    <dgm:cxn modelId="{E0EDAE5A-479F-4D57-BEED-266D46B50662}" type="presParOf" srcId="{36339D22-4E2E-4CF6-BBE3-8A64F8D3B42A}" destId="{E5D93038-F00C-42F3-9A1B-3A3142DCB1F0}" srcOrd="2" destOrd="0" presId="urn:diagrams.loki3.com/BracketList"/>
+    <dgm:cxn modelId="{E774CD9E-9D9C-4C1E-9475-0F10C6BA93F1}" type="presParOf" srcId="{36339D22-4E2E-4CF6-BBE3-8A64F8D3B42A}" destId="{9457566C-7E01-4D79-B5D4-2CDDDC008EEA}" srcOrd="3" destOrd="0" presId="urn:diagrams.loki3.com/BracketList"/>
+    <dgm:cxn modelId="{494E6AA5-CEFE-4AB0-9069-672399FAE70F}" type="presParOf" srcId="{48787486-B434-43CA-8E78-D29D771369A3}" destId="{B2E92154-24E7-4FB2-B8B1-34F2A43ABD7D}" srcOrd="5" destOrd="0" presId="urn:diagrams.loki3.com/BracketList"/>
+    <dgm:cxn modelId="{E399A5D4-7DD4-44C0-BD3B-8B33257D8242}" type="presParOf" srcId="{48787486-B434-43CA-8E78-D29D771369A3}" destId="{CA744355-FEBB-4B68-9F71-555F037843C8}" srcOrd="6" destOrd="0" presId="urn:diagrams.loki3.com/BracketList"/>
+    <dgm:cxn modelId="{2CFB6C0B-D86B-4388-9472-3A7213AD7317}" type="presParOf" srcId="{CA744355-FEBB-4B68-9F71-555F037843C8}" destId="{E98D9AA4-DAA4-4566-8A3C-C7EC33F4E1C9}" srcOrd="0" destOrd="0" presId="urn:diagrams.loki3.com/BracketList"/>
+    <dgm:cxn modelId="{71CA974E-30F7-4242-A036-97D05F6B39F9}" type="presParOf" srcId="{CA744355-FEBB-4B68-9F71-555F037843C8}" destId="{84042C5C-68EA-4F13-8FD2-AC142F927076}" srcOrd="1" destOrd="0" presId="urn:diagrams.loki3.com/BracketList"/>
+    <dgm:cxn modelId="{994DC53E-A38B-476B-A6FB-5022177604DB}" type="presParOf" srcId="{CA744355-FEBB-4B68-9F71-555F037843C8}" destId="{17FB654C-24C1-48AC-87BC-C7C5C22204F8}" srcOrd="2" destOrd="0" presId="urn:diagrams.loki3.com/BracketList"/>
+    <dgm:cxn modelId="{F1D713DF-ADFE-4B27-95BC-45B4557BF607}" type="presParOf" srcId="{CA744355-FEBB-4B68-9F71-555F037843C8}" destId="{9110D3E0-31E9-4A57-9A18-526DA69C7C1A}" srcOrd="3" destOrd="0" presId="urn:diagrams.loki3.com/BracketList"/>
+  </dgm:cxnLst>
+  <dgm:bg/>
+  <dgm:whole/>
+  <dgm:extLst>
+    <a:ext uri="http://schemas.microsoft.com/office/drawing/2008/diagram">
+      <dsp:dataModelExt xmlns:dsp="http://schemas.microsoft.com/office/drawing/2008/diagram" relId="rId6" minVer="http://schemas.openxmlformats.org/drawingml/2006/diagram"/>
+    </a:ext>
+  </dgm:extLst>
+</dgm:dataModel>
+</file>
+
+<file path=ppt/diagrams/data2.xml><?xml version="1.0" encoding="utf-8"?>
+<dgm:dataModel xmlns:dgm="http://schemas.openxmlformats.org/drawingml/2006/diagram" xmlns:a="http://schemas.openxmlformats.org/drawingml/2006/main">
+  <dgm:ptLst>
+    <dgm:pt modelId="{3FFE7022-C712-4D04-B0DA-DB26BF1522A4}" type="doc">
+      <dgm:prSet loTypeId="urn:microsoft.com/office/officeart/2005/8/layout/hList1" loCatId="list" qsTypeId="urn:microsoft.com/office/officeart/2005/8/quickstyle/simple1" qsCatId="simple" csTypeId="urn:microsoft.com/office/officeart/2005/8/colors/accent1_2" csCatId="accent1" phldr="1"/>
+      <dgm:spPr/>
+      <dgm:t>
+        <a:bodyPr/>
+        <a:lstStyle/>
+        <a:p>
+          <a:endParaRPr lang="en-IN"/>
+        </a:p>
+      </dgm:t>
+    </dgm:pt>
+    <dgm:pt modelId="{1864292A-279F-44D1-ACD1-05A428E383D9}">
+      <dgm:prSet phldrT="[Text]" phldr="0"/>
+      <dgm:spPr/>
+      <dgm:t>
+        <a:bodyPr/>
+        <a:lstStyle/>
+        <a:p>
+          <a:r>
+            <a:rPr lang="en-IN" dirty="0"/>
+            <a:t>Vision</a:t>
+          </a:r>
+        </a:p>
+      </dgm:t>
+    </dgm:pt>
+    <dgm:pt modelId="{D3F16C45-A460-4512-A63A-7A7382A1B8BB}" type="parTrans" cxnId="{37DE1785-78EA-4AAB-906B-66AC89455261}">
+      <dgm:prSet/>
+      <dgm:spPr/>
+      <dgm:t>
+        <a:bodyPr/>
+        <a:lstStyle/>
+        <a:p>
+          <a:endParaRPr lang="en-IN"/>
+        </a:p>
+      </dgm:t>
+    </dgm:pt>
+    <dgm:pt modelId="{4DBE228E-F0B8-4C50-A82C-CB8009C0A2F2}" type="sibTrans" cxnId="{37DE1785-78EA-4AAB-906B-66AC89455261}">
+      <dgm:prSet/>
+      <dgm:spPr/>
+      <dgm:t>
+        <a:bodyPr/>
+        <a:lstStyle/>
+        <a:p>
+          <a:endParaRPr lang="en-IN"/>
+        </a:p>
+      </dgm:t>
+    </dgm:pt>
+    <dgm:pt modelId="{8872B9A7-4EBE-402E-8659-71B919714F34}">
+      <dgm:prSet phldrT="[Text]" phldr="0"/>
+      <dgm:spPr/>
+      <dgm:t>
+        <a:bodyPr/>
+        <a:lstStyle/>
+        <a:p>
+          <a:r>
+            <a:rPr lang="en-IN" dirty="0"/>
+            <a:t>Develop </a:t>
+          </a:r>
+          <a:r>
+            <a:rPr lang="en-IN" b="1" dirty="0"/>
+            <a:t>AI-powered</a:t>
+          </a:r>
+          <a:r>
+            <a:rPr lang="en-IN" dirty="0"/>
+            <a:t> application</a:t>
+          </a:r>
+        </a:p>
+      </dgm:t>
+    </dgm:pt>
+    <dgm:pt modelId="{6A506D21-3285-4E0D-9E1D-0BF6952207B1}" type="parTrans" cxnId="{6B74C4A4-AE28-4064-8DEE-39CEB85BB6EB}">
+      <dgm:prSet/>
+      <dgm:spPr/>
+      <dgm:t>
+        <a:bodyPr/>
+        <a:lstStyle/>
+        <a:p>
+          <a:endParaRPr lang="en-IN"/>
+        </a:p>
+      </dgm:t>
+    </dgm:pt>
+    <dgm:pt modelId="{4522C468-7B85-4CED-BA08-BFA205E36080}" type="sibTrans" cxnId="{6B74C4A4-AE28-4064-8DEE-39CEB85BB6EB}">
+      <dgm:prSet/>
+      <dgm:spPr/>
+      <dgm:t>
+        <a:bodyPr/>
+        <a:lstStyle/>
+        <a:p>
+          <a:endParaRPr lang="en-IN"/>
+        </a:p>
+      </dgm:t>
+    </dgm:pt>
+    <dgm:pt modelId="{AA3AFA8A-AEE0-4E8C-A6A1-F9AA7CC7D94F}">
+      <dgm:prSet phldrT="[Text]" phldr="0"/>
+      <dgm:spPr/>
+      <dgm:t>
+        <a:bodyPr/>
+        <a:lstStyle/>
+        <a:p>
+          <a:r>
+            <a:rPr lang="en-IN" dirty="0"/>
+            <a:t>Scalable </a:t>
+          </a:r>
+          <a:r>
+            <a:rPr lang="en-IN" b="1" dirty="0"/>
+            <a:t>Web</a:t>
+          </a:r>
+          <a:r>
+            <a:rPr lang="en-IN" dirty="0"/>
+            <a:t> and </a:t>
+          </a:r>
+          <a:r>
+            <a:rPr lang="en-IN" b="1" dirty="0"/>
+            <a:t>Android</a:t>
+          </a:r>
+          <a:r>
+            <a:rPr lang="en-IN" dirty="0"/>
+            <a:t> application</a:t>
+          </a:r>
+        </a:p>
+      </dgm:t>
+    </dgm:pt>
+    <dgm:pt modelId="{64AD000B-B10D-4B93-9FA7-69DFF760E736}" type="parTrans" cxnId="{D9722964-80FC-4195-BF81-B90C7E85B26E}">
+      <dgm:prSet/>
+      <dgm:spPr/>
+      <dgm:t>
+        <a:bodyPr/>
+        <a:lstStyle/>
+        <a:p>
+          <a:endParaRPr lang="en-IN"/>
+        </a:p>
+      </dgm:t>
+    </dgm:pt>
+    <dgm:pt modelId="{C75E3C77-3A53-48C1-A7A7-0FBC1D96D217}" type="sibTrans" cxnId="{D9722964-80FC-4195-BF81-B90C7E85B26E}">
+      <dgm:prSet/>
+      <dgm:spPr/>
+      <dgm:t>
+        <a:bodyPr/>
+        <a:lstStyle/>
+        <a:p>
+          <a:endParaRPr lang="en-IN"/>
+        </a:p>
+      </dgm:t>
+    </dgm:pt>
+    <dgm:pt modelId="{5E7D51D4-0A94-409A-AE1E-BB930126D9D7}">
+      <dgm:prSet phldrT="[Text]" phldr="0"/>
+      <dgm:spPr/>
+      <dgm:t>
+        <a:bodyPr/>
+        <a:lstStyle/>
+        <a:p>
+          <a:r>
+            <a:rPr lang="en-IN" dirty="0"/>
+            <a:t>Adopt emerging technologies like </a:t>
+          </a:r>
+          <a:r>
+            <a:rPr lang="en-IN" b="1" dirty="0"/>
+            <a:t>AI, Automation and Cloud Computing</a:t>
+          </a:r>
+        </a:p>
+      </dgm:t>
+    </dgm:pt>
+    <dgm:pt modelId="{BEF837A6-D0D8-426E-A807-FDAF410B1E01}" type="parTrans" cxnId="{7DACF9CB-6B23-4838-A5B5-03950A767CA4}">
+      <dgm:prSet/>
+      <dgm:spPr/>
+      <dgm:t>
+        <a:bodyPr/>
+        <a:lstStyle/>
+        <a:p>
+          <a:endParaRPr lang="en-IN"/>
+        </a:p>
+      </dgm:t>
+    </dgm:pt>
+    <dgm:pt modelId="{33826297-1E86-4A15-9B9D-3ACA0496003D}" type="sibTrans" cxnId="{7DACF9CB-6B23-4838-A5B5-03950A767CA4}">
+      <dgm:prSet/>
+      <dgm:spPr/>
+      <dgm:t>
+        <a:bodyPr/>
+        <a:lstStyle/>
+        <a:p>
+          <a:endParaRPr lang="en-IN"/>
+        </a:p>
+      </dgm:t>
+    </dgm:pt>
+    <dgm:pt modelId="{2E892629-FE56-4307-9282-A8CE5E6E1871}">
+      <dgm:prSet phldrT="[Text]" phldr="0"/>
+      <dgm:spPr/>
+      <dgm:t>
+        <a:bodyPr/>
+        <a:lstStyle/>
+        <a:p>
+          <a:r>
+            <a:rPr lang="en-IN"/>
+            <a:t>Mission</a:t>
+          </a:r>
+          <a:endParaRPr lang="en-IN" dirty="0"/>
+        </a:p>
+      </dgm:t>
+    </dgm:pt>
+    <dgm:pt modelId="{D3D8B67E-EF37-4792-92FA-FD951B6ED395}" type="parTrans" cxnId="{0113E546-6E28-48C3-B820-3456CEF69614}">
+      <dgm:prSet/>
+      <dgm:spPr/>
+      <dgm:t>
+        <a:bodyPr/>
+        <a:lstStyle/>
+        <a:p>
+          <a:endParaRPr lang="en-IN"/>
+        </a:p>
+      </dgm:t>
+    </dgm:pt>
+    <dgm:pt modelId="{67C9F58B-481B-4497-B65C-B61255E431B6}" type="sibTrans" cxnId="{0113E546-6E28-48C3-B820-3456CEF69614}">
+      <dgm:prSet/>
+      <dgm:spPr/>
+      <dgm:t>
+        <a:bodyPr/>
+        <a:lstStyle/>
+        <a:p>
+          <a:endParaRPr lang="en-IN"/>
+        </a:p>
+      </dgm:t>
+    </dgm:pt>
+    <dgm:pt modelId="{4DFEB65F-2831-41E2-81E8-EAF07699077B}">
+      <dgm:prSet phldrT="[Text]" phldr="0"/>
+      <dgm:spPr/>
+      <dgm:t>
+        <a:bodyPr/>
+        <a:lstStyle/>
+        <a:p>
+          <a:r>
+            <a:rPr lang="en-IN" dirty="0"/>
+            <a:t>Leading Technology company in </a:t>
+          </a:r>
+          <a:r>
+            <a:rPr lang="en-IN" b="1" dirty="0"/>
+            <a:t>AI-native web and mobile solution</a:t>
+          </a:r>
+        </a:p>
+      </dgm:t>
+    </dgm:pt>
+    <dgm:pt modelId="{A5385738-473B-4169-BF10-0B133073B5E0}" type="parTrans" cxnId="{18089455-DDD9-4F77-A4B5-BAB0A8AF1F73}">
+      <dgm:prSet/>
+      <dgm:spPr/>
+      <dgm:t>
+        <a:bodyPr/>
+        <a:lstStyle/>
+        <a:p>
+          <a:endParaRPr lang="en-IN"/>
+        </a:p>
+      </dgm:t>
+    </dgm:pt>
+    <dgm:pt modelId="{60F165B2-E209-4D76-8119-E1DAAED8C23D}" type="sibTrans" cxnId="{18089455-DDD9-4F77-A4B5-BAB0A8AF1F73}">
+      <dgm:prSet/>
+      <dgm:spPr/>
+      <dgm:t>
+        <a:bodyPr/>
+        <a:lstStyle/>
+        <a:p>
+          <a:endParaRPr lang="en-IN"/>
+        </a:p>
+      </dgm:t>
+    </dgm:pt>
+    <dgm:pt modelId="{E062D729-F822-48B4-BEED-44B67A1F9A7C}">
+      <dgm:prSet phldrT="[Text]" phldr="0"/>
+      <dgm:spPr/>
+      <dgm:t>
+        <a:bodyPr/>
+        <a:lstStyle/>
+        <a:p>
+          <a:r>
+            <a:rPr lang="en-IN" b="0" dirty="0"/>
+            <a:t>Building </a:t>
+          </a:r>
+          <a:r>
+            <a:rPr lang="en-IN" b="1" dirty="0"/>
+            <a:t>intelligent and </a:t>
+          </a:r>
+          <a:r>
+            <a:rPr lang="en-US" b="1" dirty="0"/>
+            <a:t>scalable, and user-centric digital products</a:t>
+          </a:r>
+          <a:endParaRPr lang="en-IN" b="1" dirty="0"/>
+        </a:p>
+      </dgm:t>
+    </dgm:pt>
+    <dgm:pt modelId="{6E441636-E748-45E1-9B35-5778CB6991E7}" type="parTrans" cxnId="{C557D69B-1A76-4555-9735-EF74612B1926}">
+      <dgm:prSet/>
+      <dgm:spPr/>
+      <dgm:t>
+        <a:bodyPr/>
+        <a:lstStyle/>
+        <a:p>
+          <a:endParaRPr lang="en-IN"/>
+        </a:p>
+      </dgm:t>
+    </dgm:pt>
+    <dgm:pt modelId="{3DBCC349-97FC-483C-B3CD-7CA7EE7F3C79}" type="sibTrans" cxnId="{C557D69B-1A76-4555-9735-EF74612B1926}">
+      <dgm:prSet/>
+      <dgm:spPr/>
+      <dgm:t>
+        <a:bodyPr/>
+        <a:lstStyle/>
+        <a:p>
+          <a:endParaRPr lang="en-IN"/>
+        </a:p>
+      </dgm:t>
+    </dgm:pt>
+    <dgm:pt modelId="{2B1E9243-3E9B-4DD8-93BB-F02649FBEBB2}">
+      <dgm:prSet phldrT="[Text]" phldr="0"/>
+      <dgm:spPr/>
+      <dgm:t>
+        <a:bodyPr/>
+        <a:lstStyle/>
+        <a:p>
+          <a:r>
+            <a:rPr lang="en-IN" b="0"/>
+            <a:t>Deliver</a:t>
+          </a:r>
+          <a:r>
+            <a:rPr lang="en-IN" b="1"/>
+            <a:t> </a:t>
+          </a:r>
+          <a:r>
+            <a:rPr lang="en-IN"/>
+            <a:t>high-performance applications across platforms</a:t>
+          </a:r>
+          <a:endParaRPr lang="en-IN" b="0" dirty="0"/>
+        </a:p>
+      </dgm:t>
+    </dgm:pt>
+    <dgm:pt modelId="{30287AC5-5CA5-45B3-82B2-14E9C794C876}" type="parTrans" cxnId="{8F208333-32A7-478F-B793-5299BC3B1E2F}">
+      <dgm:prSet/>
+      <dgm:spPr/>
+      <dgm:t>
+        <a:bodyPr/>
+        <a:lstStyle/>
+        <a:p>
+          <a:endParaRPr lang="en-IN"/>
+        </a:p>
+      </dgm:t>
+    </dgm:pt>
+    <dgm:pt modelId="{3CE75951-0A0A-4908-A77C-A040CF559ABB}" type="sibTrans" cxnId="{8F208333-32A7-478F-B793-5299BC3B1E2F}">
+      <dgm:prSet/>
+      <dgm:spPr/>
+      <dgm:t>
+        <a:bodyPr/>
+        <a:lstStyle/>
+        <a:p>
+          <a:endParaRPr lang="en-IN"/>
+        </a:p>
+      </dgm:t>
+    </dgm:pt>
+    <dgm:pt modelId="{5D60222A-CB10-4FCF-9741-08484D7391B1}" type="pres">
+      <dgm:prSet presAssocID="{3FFE7022-C712-4D04-B0DA-DB26BF1522A4}" presName="Name0" presStyleCnt="0">
+        <dgm:presLayoutVars>
+          <dgm:dir/>
+          <dgm:animLvl val="lvl"/>
+          <dgm:resizeHandles val="exact"/>
+        </dgm:presLayoutVars>
+      </dgm:prSet>
+      <dgm:spPr/>
+    </dgm:pt>
+    <dgm:pt modelId="{A60690AE-B141-46BB-879D-A732D9A02D66}" type="pres">
+      <dgm:prSet presAssocID="{1864292A-279F-44D1-ACD1-05A428E383D9}" presName="composite" presStyleCnt="0"/>
+      <dgm:spPr/>
+    </dgm:pt>
+    <dgm:pt modelId="{B2EC4D11-144D-4B41-AACB-98C449109F80}" type="pres">
+      <dgm:prSet presAssocID="{1864292A-279F-44D1-ACD1-05A428E383D9}" presName="parTx" presStyleLbl="alignNode1" presStyleIdx="0" presStyleCnt="2">
+        <dgm:presLayoutVars>
+          <dgm:chMax val="0"/>
+          <dgm:chPref val="0"/>
+          <dgm:bulletEnabled val="1"/>
+        </dgm:presLayoutVars>
+      </dgm:prSet>
+      <dgm:spPr/>
+    </dgm:pt>
+    <dgm:pt modelId="{63853D33-8147-4807-B5D6-C81D86F6B43D}" type="pres">
+      <dgm:prSet presAssocID="{1864292A-279F-44D1-ACD1-05A428E383D9}" presName="desTx" presStyleLbl="alignAccFollowNode1" presStyleIdx="0" presStyleCnt="2">
+        <dgm:presLayoutVars>
+          <dgm:bulletEnabled val="1"/>
+        </dgm:presLayoutVars>
+      </dgm:prSet>
+      <dgm:spPr/>
+    </dgm:pt>
+    <dgm:pt modelId="{43F7DCAA-8397-4954-8D2C-1EFB0EBB0DDC}" type="pres">
+      <dgm:prSet presAssocID="{4DBE228E-F0B8-4C50-A82C-CB8009C0A2F2}" presName="space" presStyleCnt="0"/>
+      <dgm:spPr/>
+    </dgm:pt>
+    <dgm:pt modelId="{ECD573CD-F1BE-4C58-9150-A030EC34E027}" type="pres">
+      <dgm:prSet presAssocID="{2E892629-FE56-4307-9282-A8CE5E6E1871}" presName="composite" presStyleCnt="0"/>
+      <dgm:spPr/>
+    </dgm:pt>
+    <dgm:pt modelId="{E34F7B5E-DB52-47D9-A342-A29A39CAC83C}" type="pres">
+      <dgm:prSet presAssocID="{2E892629-FE56-4307-9282-A8CE5E6E1871}" presName="parTx" presStyleLbl="alignNode1" presStyleIdx="1" presStyleCnt="2">
+        <dgm:presLayoutVars>
+          <dgm:chMax val="0"/>
+          <dgm:chPref val="0"/>
+          <dgm:bulletEnabled val="1"/>
+        </dgm:presLayoutVars>
+      </dgm:prSet>
+      <dgm:spPr/>
+    </dgm:pt>
+    <dgm:pt modelId="{472554A7-6B74-4F73-83E1-A24CAA246678}" type="pres">
+      <dgm:prSet presAssocID="{2E892629-FE56-4307-9282-A8CE5E6E1871}" presName="desTx" presStyleLbl="alignAccFollowNode1" presStyleIdx="1" presStyleCnt="2">
+        <dgm:presLayoutVars>
+          <dgm:bulletEnabled val="1"/>
+        </dgm:presLayoutVars>
+      </dgm:prSet>
+      <dgm:spPr/>
+    </dgm:pt>
+  </dgm:ptLst>
+  <dgm:cxnLst>
+    <dgm:cxn modelId="{F2020D0C-28BB-41D0-8CE0-6C09EA0BE7AB}" type="presOf" srcId="{E062D729-F822-48B4-BEED-44B67A1F9A7C}" destId="{63853D33-8147-4807-B5D6-C81D86F6B43D}" srcOrd="0" destOrd="1" presId="urn:microsoft.com/office/officeart/2005/8/layout/hList1"/>
+    <dgm:cxn modelId="{8F208333-32A7-478F-B793-5299BC3B1E2F}" srcId="{1864292A-279F-44D1-ACD1-05A428E383D9}" destId="{2B1E9243-3E9B-4DD8-93BB-F02649FBEBB2}" srcOrd="2" destOrd="0" parTransId="{30287AC5-5CA5-45B3-82B2-14E9C794C876}" sibTransId="{3CE75951-0A0A-4908-A77C-A040CF559ABB}"/>
+    <dgm:cxn modelId="{91F47942-C257-4731-91E6-3A8FA01643BA}" type="presOf" srcId="{1864292A-279F-44D1-ACD1-05A428E383D9}" destId="{B2EC4D11-144D-4B41-AACB-98C449109F80}" srcOrd="0" destOrd="0" presId="urn:microsoft.com/office/officeart/2005/8/layout/hList1"/>
+    <dgm:cxn modelId="{D9722964-80FC-4195-BF81-B90C7E85B26E}" srcId="{2E892629-FE56-4307-9282-A8CE5E6E1871}" destId="{AA3AFA8A-AEE0-4E8C-A6A1-F9AA7CC7D94F}" srcOrd="1" destOrd="0" parTransId="{64AD000B-B10D-4B93-9FA7-69DFF760E736}" sibTransId="{C75E3C77-3A53-48C1-A7A7-0FBC1D96D217}"/>
+    <dgm:cxn modelId="{26896366-0866-41C9-9664-5B276A3ECBF0}" type="presOf" srcId="{5E7D51D4-0A94-409A-AE1E-BB930126D9D7}" destId="{472554A7-6B74-4F73-83E1-A24CAA246678}" srcOrd="0" destOrd="2" presId="urn:microsoft.com/office/officeart/2005/8/layout/hList1"/>
+    <dgm:cxn modelId="{0113E546-6E28-48C3-B820-3456CEF69614}" srcId="{3FFE7022-C712-4D04-B0DA-DB26BF1522A4}" destId="{2E892629-FE56-4307-9282-A8CE5E6E1871}" srcOrd="1" destOrd="0" parTransId="{D3D8B67E-EF37-4792-92FA-FD951B6ED395}" sibTransId="{67C9F58B-481B-4497-B65C-B61255E431B6}"/>
+    <dgm:cxn modelId="{8ACC4A6C-4773-4CAD-BAD2-93AE65C55B37}" type="presOf" srcId="{2E892629-FE56-4307-9282-A8CE5E6E1871}" destId="{E34F7B5E-DB52-47D9-A342-A29A39CAC83C}" srcOrd="0" destOrd="0" presId="urn:microsoft.com/office/officeart/2005/8/layout/hList1"/>
+    <dgm:cxn modelId="{371AD474-D247-4886-B046-D0AC6A9A58CC}" type="presOf" srcId="{2B1E9243-3E9B-4DD8-93BB-F02649FBEBB2}" destId="{63853D33-8147-4807-B5D6-C81D86F6B43D}" srcOrd="0" destOrd="2" presId="urn:microsoft.com/office/officeart/2005/8/layout/hList1"/>
+    <dgm:cxn modelId="{18089455-DDD9-4F77-A4B5-BAB0A8AF1F73}" srcId="{1864292A-279F-44D1-ACD1-05A428E383D9}" destId="{4DFEB65F-2831-41E2-81E8-EAF07699077B}" srcOrd="0" destOrd="0" parTransId="{A5385738-473B-4169-BF10-0B133073B5E0}" sibTransId="{60F165B2-E209-4D76-8119-E1DAAED8C23D}"/>
+    <dgm:cxn modelId="{FB804557-81B9-427B-BD59-40FD1A5E27A4}" type="presOf" srcId="{AA3AFA8A-AEE0-4E8C-A6A1-F9AA7CC7D94F}" destId="{472554A7-6B74-4F73-83E1-A24CAA246678}" srcOrd="0" destOrd="1" presId="urn:microsoft.com/office/officeart/2005/8/layout/hList1"/>
+    <dgm:cxn modelId="{37DE1785-78EA-4AAB-906B-66AC89455261}" srcId="{3FFE7022-C712-4D04-B0DA-DB26BF1522A4}" destId="{1864292A-279F-44D1-ACD1-05A428E383D9}" srcOrd="0" destOrd="0" parTransId="{D3F16C45-A460-4512-A63A-7A7382A1B8BB}" sibTransId="{4DBE228E-F0B8-4C50-A82C-CB8009C0A2F2}"/>
+    <dgm:cxn modelId="{858B4193-7B05-42B4-BE92-620282ACE49B}" type="presOf" srcId="{8872B9A7-4EBE-402E-8659-71B919714F34}" destId="{472554A7-6B74-4F73-83E1-A24CAA246678}" srcOrd="0" destOrd="0" presId="urn:microsoft.com/office/officeart/2005/8/layout/hList1"/>
+    <dgm:cxn modelId="{A8479193-A2FA-45CE-9279-01586657F0CB}" type="presOf" srcId="{3FFE7022-C712-4D04-B0DA-DB26BF1522A4}" destId="{5D60222A-CB10-4FCF-9741-08484D7391B1}" srcOrd="0" destOrd="0" presId="urn:microsoft.com/office/officeart/2005/8/layout/hList1"/>
+    <dgm:cxn modelId="{C557D69B-1A76-4555-9735-EF74612B1926}" srcId="{1864292A-279F-44D1-ACD1-05A428E383D9}" destId="{E062D729-F822-48B4-BEED-44B67A1F9A7C}" srcOrd="1" destOrd="0" parTransId="{6E441636-E748-45E1-9B35-5778CB6991E7}" sibTransId="{3DBCC349-97FC-483C-B3CD-7CA7EE7F3C79}"/>
+    <dgm:cxn modelId="{6B74C4A4-AE28-4064-8DEE-39CEB85BB6EB}" srcId="{2E892629-FE56-4307-9282-A8CE5E6E1871}" destId="{8872B9A7-4EBE-402E-8659-71B919714F34}" srcOrd="0" destOrd="0" parTransId="{6A506D21-3285-4E0D-9E1D-0BF6952207B1}" sibTransId="{4522C468-7B85-4CED-BA08-BFA205E36080}"/>
+    <dgm:cxn modelId="{FE1188C3-0D7C-437B-860F-84D79011DDCF}" type="presOf" srcId="{4DFEB65F-2831-41E2-81E8-EAF07699077B}" destId="{63853D33-8147-4807-B5D6-C81D86F6B43D}" srcOrd="0" destOrd="0" presId="urn:microsoft.com/office/officeart/2005/8/layout/hList1"/>
+    <dgm:cxn modelId="{7DACF9CB-6B23-4838-A5B5-03950A767CA4}" srcId="{2E892629-FE56-4307-9282-A8CE5E6E1871}" destId="{5E7D51D4-0A94-409A-AE1E-BB930126D9D7}" srcOrd="2" destOrd="0" parTransId="{BEF837A6-D0D8-426E-A807-FDAF410B1E01}" sibTransId="{33826297-1E86-4A15-9B9D-3ACA0496003D}"/>
+    <dgm:cxn modelId="{4DB3CF63-E4BD-41B7-B97E-29C61269A33B}" type="presParOf" srcId="{5D60222A-CB10-4FCF-9741-08484D7391B1}" destId="{A60690AE-B141-46BB-879D-A732D9A02D66}" srcOrd="0" destOrd="0" presId="urn:microsoft.com/office/officeart/2005/8/layout/hList1"/>
+    <dgm:cxn modelId="{ACB6BA6B-6D03-4EDF-8967-B940CB5534B4}" type="presParOf" srcId="{A60690AE-B141-46BB-879D-A732D9A02D66}" destId="{B2EC4D11-144D-4B41-AACB-98C449109F80}" srcOrd="0" destOrd="0" presId="urn:microsoft.com/office/officeart/2005/8/layout/hList1"/>
+    <dgm:cxn modelId="{F32F4EAA-78C1-4B18-BBDB-0B0108FEBDEE}" type="presParOf" srcId="{A60690AE-B141-46BB-879D-A732D9A02D66}" destId="{63853D33-8147-4807-B5D6-C81D86F6B43D}" srcOrd="1" destOrd="0" presId="urn:microsoft.com/office/officeart/2005/8/layout/hList1"/>
+    <dgm:cxn modelId="{7F519BA5-B8BB-4831-9933-E95F405556FE}" type="presParOf" srcId="{5D60222A-CB10-4FCF-9741-08484D7391B1}" destId="{43F7DCAA-8397-4954-8D2C-1EFB0EBB0DDC}" srcOrd="1" destOrd="0" presId="urn:microsoft.com/office/officeart/2005/8/layout/hList1"/>
+    <dgm:cxn modelId="{1ABE4A60-3C18-4068-858B-ADFFAFA8C569}" type="presParOf" srcId="{5D60222A-CB10-4FCF-9741-08484D7391B1}" destId="{ECD573CD-F1BE-4C58-9150-A030EC34E027}" srcOrd="2" destOrd="0" presId="urn:microsoft.com/office/officeart/2005/8/layout/hList1"/>
+    <dgm:cxn modelId="{8BD08131-0F3E-479E-8C59-0E9B3111BC7C}" type="presParOf" srcId="{ECD573CD-F1BE-4C58-9150-A030EC34E027}" destId="{E34F7B5E-DB52-47D9-A342-A29A39CAC83C}" srcOrd="0" destOrd="0" presId="urn:microsoft.com/office/officeart/2005/8/layout/hList1"/>
+    <dgm:cxn modelId="{EDFD4BCB-2E78-4CCD-B1FD-35C67FE732C9}" type="presParOf" srcId="{ECD573CD-F1BE-4C58-9150-A030EC34E027}" destId="{472554A7-6B74-4F73-83E1-A24CAA246678}" srcOrd="1" destOrd="0" presId="urn:microsoft.com/office/officeart/2005/8/layout/hList1"/>
+  </dgm:cxnLst>
+  <dgm:bg/>
+  <dgm:whole/>
+  <dgm:extLst>
+    <a:ext uri="http://schemas.microsoft.com/office/drawing/2008/diagram">
+      <dsp:dataModelExt xmlns:dsp="http://schemas.microsoft.com/office/drawing/2008/diagram" relId="rId6" minVer="http://schemas.openxmlformats.org/drawingml/2006/diagram"/>
+    </a:ext>
+  </dgm:extLst>
+</dgm:dataModel>
+</file>
+
+<file path=ppt/diagrams/data3.xml><?xml version="1.0" encoding="utf-8"?>
 <dgm:dataModel xmlns:dgm="http://schemas.openxmlformats.org/drawingml/2006/diagram" xmlns:a="http://schemas.openxmlformats.org/drawingml/2006/main">
   <dgm:ptLst>
     <dgm:pt modelId="{7533D256-5F87-4760-AD36-A9A62F094AF5}" type="doc">
@@ -3368,7 +5845,7 @@
 </dgm:dataModel>
 </file>
 
-<file path=ppt/diagrams/data2.xml><?xml version="1.0" encoding="utf-8"?>
+<file path=ppt/diagrams/data4.xml><?xml version="1.0" encoding="utf-8"?>
 <dgm:dataModel xmlns:dgm="http://schemas.openxmlformats.org/drawingml/2006/diagram" xmlns:a="http://schemas.openxmlformats.org/drawingml/2006/main">
   <dgm:ptLst>
     <dgm:pt modelId="{1FAD23B5-9804-4566-8659-1832D752FDD0}" type="doc">
@@ -3945,7 +6422,7 @@
 </dgm:dataModel>
 </file>
 
-<file path=ppt/diagrams/data3.xml><?xml version="1.0" encoding="utf-8"?>
+<file path=ppt/diagrams/data5.xml><?xml version="1.0" encoding="utf-8"?>
 <dgm:dataModel xmlns:dgm="http://schemas.openxmlformats.org/drawingml/2006/diagram" xmlns:a="http://schemas.openxmlformats.org/drawingml/2006/main">
   <dgm:ptLst>
     <dgm:pt modelId="{E7782567-7F0C-4E1B-AFCC-767AD976CFB4}" type="doc">
@@ -4700,7 +7177,7 @@
 </dgm:dataModel>
 </file>
 
-<file path=ppt/diagrams/data4.xml><?xml version="1.0" encoding="utf-8"?>
+<file path=ppt/diagrams/data6.xml><?xml version="1.0" encoding="utf-8"?>
 <dgm:dataModel xmlns:dgm="http://schemas.openxmlformats.org/drawingml/2006/diagram" xmlns:a="http://schemas.openxmlformats.org/drawingml/2006/main">
   <dgm:ptLst>
     <dgm:pt modelId="{841D81C0-A4D2-4526-96AC-CE5CDDE75574}" type="doc">
@@ -4960,6 +7437,1210 @@
 </file>
 
 <file path=ppt/diagrams/drawing1.xml><?xml version="1.0" encoding="utf-8"?>
+<dsp:drawing xmlns:dgm="http://schemas.openxmlformats.org/drawingml/2006/diagram" xmlns:dsp="http://schemas.microsoft.com/office/drawing/2008/diagram" xmlns:a="http://schemas.openxmlformats.org/drawingml/2006/main">
+  <dsp:spTree>
+    <dsp:nvGrpSpPr>
+      <dsp:cNvPr id="0" name=""/>
+      <dsp:cNvGrpSpPr/>
+    </dsp:nvGrpSpPr>
+    <dsp:grpSpPr/>
+    <dsp:sp modelId="{627CFD93-BDF9-4BF2-B056-99120554CFCB}">
+      <dsp:nvSpPr>
+        <dsp:cNvPr id="0" name=""/>
+        <dsp:cNvSpPr/>
+      </dsp:nvSpPr>
+      <dsp:spPr>
+        <a:xfrm>
+          <a:off x="0" y="54393"/>
+          <a:ext cx="2915239" cy="772200"/>
+        </a:xfrm>
+        <a:prstGeom prst="rect">
+          <a:avLst/>
+        </a:prstGeom>
+        <a:noFill/>
+        <a:ln>
+          <a:noFill/>
+        </a:ln>
+        <a:effectLst/>
+      </dsp:spPr>
+      <dsp:style>
+        <a:lnRef idx="0">
+          <a:scrgbClr r="0" g="0" b="0"/>
+        </a:lnRef>
+        <a:fillRef idx="0">
+          <a:scrgbClr r="0" g="0" b="0"/>
+        </a:fillRef>
+        <a:effectRef idx="0">
+          <a:scrgbClr r="0" g="0" b="0"/>
+        </a:effectRef>
+        <a:fontRef idx="minor"/>
+      </dsp:style>
+      <dsp:txBody>
+        <a:bodyPr spcFirstLastPara="0" vert="horz" wrap="square" lIns="277368" tIns="99060" rIns="277368" bIns="99060" numCol="1" spcCol="1270" anchor="ctr" anchorCtr="0">
+          <a:noAutofit/>
+        </a:bodyPr>
+        <a:lstStyle/>
+        <a:p>
+          <a:pPr marL="0" lvl="0" indent="0" algn="r" defTabSz="1733550">
+            <a:lnSpc>
+              <a:spcPct val="90000"/>
+            </a:lnSpc>
+            <a:spcBef>
+              <a:spcPct val="0"/>
+            </a:spcBef>
+            <a:spcAft>
+              <a:spcPct val="35000"/>
+            </a:spcAft>
+            <a:buNone/>
+          </a:pPr>
+          <a:r>
+            <a:rPr lang="en-IN" sz="3900" kern="1200" dirty="0"/>
+            <a:t>Name</a:t>
+          </a:r>
+        </a:p>
+      </dsp:txBody>
+      <dsp:txXfrm>
+        <a:off x="0" y="54393"/>
+        <a:ext cx="2915239" cy="772200"/>
+      </dsp:txXfrm>
+    </dsp:sp>
+    <dsp:sp modelId="{9E2825F5-2BA7-4F4A-8152-BFDBCA07375D}">
+      <dsp:nvSpPr>
+        <dsp:cNvPr id="0" name=""/>
+        <dsp:cNvSpPr/>
+      </dsp:nvSpPr>
+      <dsp:spPr>
+        <a:xfrm>
+          <a:off x="2915239" y="18196"/>
+          <a:ext cx="583047" cy="844593"/>
+        </a:xfrm>
+        <a:prstGeom prst="leftBrace">
+          <a:avLst>
+            <a:gd name="adj1" fmla="val 35000"/>
+            <a:gd name="adj2" fmla="val 50000"/>
+          </a:avLst>
+        </a:prstGeom>
+        <a:noFill/>
+        <a:ln w="19050" cap="rnd" cmpd="sng" algn="ctr">
+          <a:solidFill>
+            <a:schemeClr val="accent1">
+              <a:shade val="60000"/>
+              <a:hueOff val="0"/>
+              <a:satOff val="0"/>
+              <a:lumOff val="0"/>
+              <a:alphaOff val="0"/>
+            </a:schemeClr>
+          </a:solidFill>
+          <a:prstDash val="solid"/>
+        </a:ln>
+        <a:effectLst/>
+      </dsp:spPr>
+      <dsp:style>
+        <a:lnRef idx="2">
+          <a:scrgbClr r="0" g="0" b="0"/>
+        </a:lnRef>
+        <a:fillRef idx="0">
+          <a:scrgbClr r="0" g="0" b="0"/>
+        </a:fillRef>
+        <a:effectRef idx="0">
+          <a:scrgbClr r="0" g="0" b="0"/>
+        </a:effectRef>
+        <a:fontRef idx="minor"/>
+      </dsp:style>
+    </dsp:sp>
+    <dsp:sp modelId="{4D93818D-E233-49E2-B914-104B7D262605}">
+      <dsp:nvSpPr>
+        <dsp:cNvPr id="0" name=""/>
+        <dsp:cNvSpPr/>
+      </dsp:nvSpPr>
+      <dsp:spPr>
+        <a:xfrm>
+          <a:off x="3731506" y="18196"/>
+          <a:ext cx="7929450" cy="844593"/>
+        </a:xfrm>
+        <a:prstGeom prst="rect">
+          <a:avLst/>
+        </a:prstGeom>
+        <a:solidFill>
+          <a:schemeClr val="accent1">
+            <a:hueOff val="0"/>
+            <a:satOff val="0"/>
+            <a:lumOff val="0"/>
+            <a:alphaOff val="0"/>
+          </a:schemeClr>
+        </a:solidFill>
+        <a:ln w="19050" cap="rnd" cmpd="sng" algn="ctr">
+          <a:solidFill>
+            <a:schemeClr val="lt1">
+              <a:hueOff val="0"/>
+              <a:satOff val="0"/>
+              <a:lumOff val="0"/>
+              <a:alphaOff val="0"/>
+            </a:schemeClr>
+          </a:solidFill>
+          <a:prstDash val="solid"/>
+        </a:ln>
+        <a:effectLst/>
+      </dsp:spPr>
+      <dsp:style>
+        <a:lnRef idx="2">
+          <a:scrgbClr r="0" g="0" b="0"/>
+        </a:lnRef>
+        <a:fillRef idx="1">
+          <a:scrgbClr r="0" g="0" b="0"/>
+        </a:fillRef>
+        <a:effectRef idx="0">
+          <a:scrgbClr r="0" g="0" b="0"/>
+        </a:effectRef>
+        <a:fontRef idx="minor">
+          <a:schemeClr val="lt1"/>
+        </a:fontRef>
+      </dsp:style>
+      <dsp:txBody>
+        <a:bodyPr spcFirstLastPara="0" vert="horz" wrap="square" lIns="148590" tIns="148590" rIns="148590" bIns="148590" numCol="1" spcCol="1270" anchor="ctr" anchorCtr="0">
+          <a:noAutofit/>
+        </a:bodyPr>
+        <a:lstStyle/>
+        <a:p>
+          <a:pPr marL="285750" lvl="1" indent="-285750" algn="l" defTabSz="1733550">
+            <a:lnSpc>
+              <a:spcPct val="90000"/>
+            </a:lnSpc>
+            <a:spcBef>
+              <a:spcPct val="0"/>
+            </a:spcBef>
+            <a:spcAft>
+              <a:spcPct val="15000"/>
+            </a:spcAft>
+            <a:buChar char="•"/>
+          </a:pPr>
+          <a:r>
+            <a:rPr lang="en-IN" sz="3900" kern="1200"/>
+            <a:t>ThousandX Ventures LLP</a:t>
+          </a:r>
+        </a:p>
+      </dsp:txBody>
+      <dsp:txXfrm>
+        <a:off x="3731506" y="18196"/>
+        <a:ext cx="7929450" cy="844593"/>
+      </dsp:txXfrm>
+    </dsp:sp>
+    <dsp:sp modelId="{A6BE4494-167B-4C99-A2C2-9780C7AAD5CB}">
+      <dsp:nvSpPr>
+        <dsp:cNvPr id="0" name=""/>
+        <dsp:cNvSpPr/>
+      </dsp:nvSpPr>
+      <dsp:spPr>
+        <a:xfrm>
+          <a:off x="0" y="1039387"/>
+          <a:ext cx="2915239" cy="772200"/>
+        </a:xfrm>
+        <a:prstGeom prst="rect">
+          <a:avLst/>
+        </a:prstGeom>
+        <a:noFill/>
+        <a:ln>
+          <a:noFill/>
+        </a:ln>
+        <a:effectLst/>
+      </dsp:spPr>
+      <dsp:style>
+        <a:lnRef idx="0">
+          <a:scrgbClr r="0" g="0" b="0"/>
+        </a:lnRef>
+        <a:fillRef idx="0">
+          <a:scrgbClr r="0" g="0" b="0"/>
+        </a:fillRef>
+        <a:effectRef idx="0">
+          <a:scrgbClr r="0" g="0" b="0"/>
+        </a:effectRef>
+        <a:fontRef idx="minor"/>
+      </dsp:style>
+      <dsp:txBody>
+        <a:bodyPr spcFirstLastPara="0" vert="horz" wrap="square" lIns="277368" tIns="99060" rIns="277368" bIns="99060" numCol="1" spcCol="1270" anchor="ctr" anchorCtr="0">
+          <a:noAutofit/>
+        </a:bodyPr>
+        <a:lstStyle/>
+        <a:p>
+          <a:pPr marL="0" lvl="0" indent="0" algn="r" defTabSz="1733550">
+            <a:lnSpc>
+              <a:spcPct val="90000"/>
+            </a:lnSpc>
+            <a:spcBef>
+              <a:spcPct val="0"/>
+            </a:spcBef>
+            <a:spcAft>
+              <a:spcPct val="35000"/>
+            </a:spcAft>
+            <a:buNone/>
+          </a:pPr>
+          <a:r>
+            <a:rPr lang="en-IN" sz="3900" kern="1200"/>
+            <a:t>Origin</a:t>
+          </a:r>
+        </a:p>
+      </dsp:txBody>
+      <dsp:txXfrm>
+        <a:off x="0" y="1039387"/>
+        <a:ext cx="2915239" cy="772200"/>
+      </dsp:txXfrm>
+    </dsp:sp>
+    <dsp:sp modelId="{AA46FB30-C8E3-4F8E-B10D-06ACED20C07B}">
+      <dsp:nvSpPr>
+        <dsp:cNvPr id="0" name=""/>
+        <dsp:cNvSpPr/>
+      </dsp:nvSpPr>
+      <dsp:spPr>
+        <a:xfrm>
+          <a:off x="2915239" y="1003190"/>
+          <a:ext cx="583047" cy="844593"/>
+        </a:xfrm>
+        <a:prstGeom prst="leftBrace">
+          <a:avLst>
+            <a:gd name="adj1" fmla="val 35000"/>
+            <a:gd name="adj2" fmla="val 50000"/>
+          </a:avLst>
+        </a:prstGeom>
+        <a:noFill/>
+        <a:ln w="19050" cap="rnd" cmpd="sng" algn="ctr">
+          <a:solidFill>
+            <a:schemeClr val="accent1">
+              <a:shade val="60000"/>
+              <a:hueOff val="0"/>
+              <a:satOff val="0"/>
+              <a:lumOff val="0"/>
+              <a:alphaOff val="0"/>
+            </a:schemeClr>
+          </a:solidFill>
+          <a:prstDash val="solid"/>
+        </a:ln>
+        <a:effectLst/>
+      </dsp:spPr>
+      <dsp:style>
+        <a:lnRef idx="2">
+          <a:scrgbClr r="0" g="0" b="0"/>
+        </a:lnRef>
+        <a:fillRef idx="0">
+          <a:scrgbClr r="0" g="0" b="0"/>
+        </a:fillRef>
+        <a:effectRef idx="0">
+          <a:scrgbClr r="0" g="0" b="0"/>
+        </a:effectRef>
+        <a:fontRef idx="minor"/>
+      </dsp:style>
+    </dsp:sp>
+    <dsp:sp modelId="{9829DF46-306D-47C2-8BCE-4154421700AE}">
+      <dsp:nvSpPr>
+        <dsp:cNvPr id="0" name=""/>
+        <dsp:cNvSpPr/>
+      </dsp:nvSpPr>
+      <dsp:spPr>
+        <a:xfrm>
+          <a:off x="3731506" y="1003190"/>
+          <a:ext cx="7929450" cy="844593"/>
+        </a:xfrm>
+        <a:prstGeom prst="rect">
+          <a:avLst/>
+        </a:prstGeom>
+        <a:solidFill>
+          <a:schemeClr val="accent1">
+            <a:hueOff val="0"/>
+            <a:satOff val="0"/>
+            <a:lumOff val="0"/>
+            <a:alphaOff val="0"/>
+          </a:schemeClr>
+        </a:solidFill>
+        <a:ln w="19050" cap="rnd" cmpd="sng" algn="ctr">
+          <a:solidFill>
+            <a:schemeClr val="lt1">
+              <a:hueOff val="0"/>
+              <a:satOff val="0"/>
+              <a:lumOff val="0"/>
+              <a:alphaOff val="0"/>
+            </a:schemeClr>
+          </a:solidFill>
+          <a:prstDash val="solid"/>
+        </a:ln>
+        <a:effectLst/>
+      </dsp:spPr>
+      <dsp:style>
+        <a:lnRef idx="2">
+          <a:scrgbClr r="0" g="0" b="0"/>
+        </a:lnRef>
+        <a:fillRef idx="1">
+          <a:scrgbClr r="0" g="0" b="0"/>
+        </a:fillRef>
+        <a:effectRef idx="0">
+          <a:scrgbClr r="0" g="0" b="0"/>
+        </a:effectRef>
+        <a:fontRef idx="minor">
+          <a:schemeClr val="lt1"/>
+        </a:fontRef>
+      </dsp:style>
+      <dsp:txBody>
+        <a:bodyPr spcFirstLastPara="0" vert="horz" wrap="square" lIns="148590" tIns="148590" rIns="148590" bIns="148590" numCol="1" spcCol="1270" anchor="ctr" anchorCtr="0">
+          <a:noAutofit/>
+        </a:bodyPr>
+        <a:lstStyle/>
+        <a:p>
+          <a:pPr marL="285750" lvl="1" indent="-285750" algn="l" defTabSz="1733550">
+            <a:lnSpc>
+              <a:spcPct val="90000"/>
+            </a:lnSpc>
+            <a:spcBef>
+              <a:spcPct val="0"/>
+            </a:spcBef>
+            <a:spcAft>
+              <a:spcPct val="15000"/>
+            </a:spcAft>
+            <a:buChar char="•"/>
+          </a:pPr>
+          <a:r>
+            <a:rPr lang="en-IN" sz="3900" kern="1200" dirty="0"/>
+            <a:t>January 2025</a:t>
+          </a:r>
+        </a:p>
+      </dsp:txBody>
+      <dsp:txXfrm>
+        <a:off x="3731506" y="1003190"/>
+        <a:ext cx="7929450" cy="844593"/>
+      </dsp:txXfrm>
+    </dsp:sp>
+    <dsp:sp modelId="{53889986-D178-4BD0-BF65-89A642B05593}">
+      <dsp:nvSpPr>
+        <dsp:cNvPr id="0" name=""/>
+        <dsp:cNvSpPr/>
+      </dsp:nvSpPr>
+      <dsp:spPr>
+        <a:xfrm>
+          <a:off x="0" y="2024380"/>
+          <a:ext cx="2915239" cy="772200"/>
+        </a:xfrm>
+        <a:prstGeom prst="rect">
+          <a:avLst/>
+        </a:prstGeom>
+        <a:noFill/>
+        <a:ln>
+          <a:noFill/>
+        </a:ln>
+        <a:effectLst/>
+      </dsp:spPr>
+      <dsp:style>
+        <a:lnRef idx="0">
+          <a:scrgbClr r="0" g="0" b="0"/>
+        </a:lnRef>
+        <a:fillRef idx="0">
+          <a:scrgbClr r="0" g="0" b="0"/>
+        </a:fillRef>
+        <a:effectRef idx="0">
+          <a:scrgbClr r="0" g="0" b="0"/>
+        </a:effectRef>
+        <a:fontRef idx="minor"/>
+      </dsp:style>
+      <dsp:txBody>
+        <a:bodyPr spcFirstLastPara="0" vert="horz" wrap="square" lIns="277368" tIns="99060" rIns="277368" bIns="99060" numCol="1" spcCol="1270" anchor="ctr" anchorCtr="0">
+          <a:noAutofit/>
+        </a:bodyPr>
+        <a:lstStyle/>
+        <a:p>
+          <a:pPr marL="0" lvl="0" indent="0" algn="r" defTabSz="1733550">
+            <a:lnSpc>
+              <a:spcPct val="90000"/>
+            </a:lnSpc>
+            <a:spcBef>
+              <a:spcPct val="0"/>
+            </a:spcBef>
+            <a:spcAft>
+              <a:spcPct val="35000"/>
+            </a:spcAft>
+            <a:buNone/>
+          </a:pPr>
+          <a:r>
+            <a:rPr lang="en-IN" sz="3900" kern="1200" dirty="0"/>
+            <a:t>Location</a:t>
+          </a:r>
+        </a:p>
+      </dsp:txBody>
+      <dsp:txXfrm>
+        <a:off x="0" y="2024380"/>
+        <a:ext cx="2915239" cy="772200"/>
+      </dsp:txXfrm>
+    </dsp:sp>
+    <dsp:sp modelId="{EF094E06-9E93-4682-A72C-EBE52A384597}">
+      <dsp:nvSpPr>
+        <dsp:cNvPr id="0" name=""/>
+        <dsp:cNvSpPr/>
+      </dsp:nvSpPr>
+      <dsp:spPr>
+        <a:xfrm>
+          <a:off x="2915239" y="1988183"/>
+          <a:ext cx="583047" cy="844593"/>
+        </a:xfrm>
+        <a:prstGeom prst="leftBrace">
+          <a:avLst>
+            <a:gd name="adj1" fmla="val 35000"/>
+            <a:gd name="adj2" fmla="val 50000"/>
+          </a:avLst>
+        </a:prstGeom>
+        <a:noFill/>
+        <a:ln w="19050" cap="rnd" cmpd="sng" algn="ctr">
+          <a:solidFill>
+            <a:schemeClr val="accent1">
+              <a:shade val="60000"/>
+              <a:hueOff val="0"/>
+              <a:satOff val="0"/>
+              <a:lumOff val="0"/>
+              <a:alphaOff val="0"/>
+            </a:schemeClr>
+          </a:solidFill>
+          <a:prstDash val="solid"/>
+        </a:ln>
+        <a:effectLst/>
+      </dsp:spPr>
+      <dsp:style>
+        <a:lnRef idx="2">
+          <a:scrgbClr r="0" g="0" b="0"/>
+        </a:lnRef>
+        <a:fillRef idx="0">
+          <a:scrgbClr r="0" g="0" b="0"/>
+        </a:fillRef>
+        <a:effectRef idx="0">
+          <a:scrgbClr r="0" g="0" b="0"/>
+        </a:effectRef>
+        <a:fontRef idx="minor"/>
+      </dsp:style>
+    </dsp:sp>
+    <dsp:sp modelId="{9457566C-7E01-4D79-B5D4-2CDDDC008EEA}">
+      <dsp:nvSpPr>
+        <dsp:cNvPr id="0" name=""/>
+        <dsp:cNvSpPr/>
+      </dsp:nvSpPr>
+      <dsp:spPr>
+        <a:xfrm>
+          <a:off x="3731506" y="1988183"/>
+          <a:ext cx="7929450" cy="844593"/>
+        </a:xfrm>
+        <a:prstGeom prst="rect">
+          <a:avLst/>
+        </a:prstGeom>
+        <a:solidFill>
+          <a:schemeClr val="accent1">
+            <a:hueOff val="0"/>
+            <a:satOff val="0"/>
+            <a:lumOff val="0"/>
+            <a:alphaOff val="0"/>
+          </a:schemeClr>
+        </a:solidFill>
+        <a:ln w="19050" cap="rnd" cmpd="sng" algn="ctr">
+          <a:solidFill>
+            <a:schemeClr val="lt1">
+              <a:hueOff val="0"/>
+              <a:satOff val="0"/>
+              <a:lumOff val="0"/>
+              <a:alphaOff val="0"/>
+            </a:schemeClr>
+          </a:solidFill>
+          <a:prstDash val="solid"/>
+        </a:ln>
+        <a:effectLst/>
+      </dsp:spPr>
+      <dsp:style>
+        <a:lnRef idx="2">
+          <a:scrgbClr r="0" g="0" b="0"/>
+        </a:lnRef>
+        <a:fillRef idx="1">
+          <a:scrgbClr r="0" g="0" b="0"/>
+        </a:fillRef>
+        <a:effectRef idx="0">
+          <a:scrgbClr r="0" g="0" b="0"/>
+        </a:effectRef>
+        <a:fontRef idx="minor">
+          <a:schemeClr val="lt1"/>
+        </a:fontRef>
+      </dsp:style>
+      <dsp:txBody>
+        <a:bodyPr spcFirstLastPara="0" vert="horz" wrap="square" lIns="148590" tIns="148590" rIns="148590" bIns="148590" numCol="1" spcCol="1270" anchor="ctr" anchorCtr="0">
+          <a:noAutofit/>
+        </a:bodyPr>
+        <a:lstStyle/>
+        <a:p>
+          <a:pPr marL="285750" lvl="1" indent="-285750" algn="l" defTabSz="1733550">
+            <a:lnSpc>
+              <a:spcPct val="90000"/>
+            </a:lnSpc>
+            <a:spcBef>
+              <a:spcPct val="0"/>
+            </a:spcBef>
+            <a:spcAft>
+              <a:spcPct val="15000"/>
+            </a:spcAft>
+            <a:buChar char="•"/>
+          </a:pPr>
+          <a:r>
+            <a:rPr lang="en-IN" sz="3900" kern="1200" dirty="0"/>
+            <a:t>Satna, Madhya Pradesh</a:t>
+          </a:r>
+        </a:p>
+      </dsp:txBody>
+      <dsp:txXfrm>
+        <a:off x="3731506" y="1988183"/>
+        <a:ext cx="7929450" cy="844593"/>
+      </dsp:txXfrm>
+    </dsp:sp>
+    <dsp:sp modelId="{E98D9AA4-DAA4-4566-8A3C-C7EC33F4E1C9}">
+      <dsp:nvSpPr>
+        <dsp:cNvPr id="0" name=""/>
+        <dsp:cNvSpPr/>
+      </dsp:nvSpPr>
+      <dsp:spPr>
+        <a:xfrm>
+          <a:off x="0" y="3074981"/>
+          <a:ext cx="2915239" cy="1303087"/>
+        </a:xfrm>
+        <a:prstGeom prst="rect">
+          <a:avLst/>
+        </a:prstGeom>
+        <a:noFill/>
+        <a:ln>
+          <a:noFill/>
+        </a:ln>
+        <a:effectLst/>
+      </dsp:spPr>
+      <dsp:style>
+        <a:lnRef idx="0">
+          <a:scrgbClr r="0" g="0" b="0"/>
+        </a:lnRef>
+        <a:fillRef idx="0">
+          <a:scrgbClr r="0" g="0" b="0"/>
+        </a:fillRef>
+        <a:effectRef idx="0">
+          <a:scrgbClr r="0" g="0" b="0"/>
+        </a:effectRef>
+        <a:fontRef idx="minor"/>
+      </dsp:style>
+      <dsp:txBody>
+        <a:bodyPr spcFirstLastPara="0" vert="horz" wrap="square" lIns="277368" tIns="99060" rIns="277368" bIns="99060" numCol="1" spcCol="1270" anchor="ctr" anchorCtr="0">
+          <a:noAutofit/>
+        </a:bodyPr>
+        <a:lstStyle/>
+        <a:p>
+          <a:pPr marL="0" lvl="0" indent="0" algn="r" defTabSz="1733550">
+            <a:lnSpc>
+              <a:spcPct val="90000"/>
+            </a:lnSpc>
+            <a:spcBef>
+              <a:spcPct val="0"/>
+            </a:spcBef>
+            <a:spcAft>
+              <a:spcPct val="35000"/>
+            </a:spcAft>
+            <a:buNone/>
+          </a:pPr>
+          <a:r>
+            <a:rPr lang="en-IN" sz="3900" kern="1200"/>
+            <a:t>Co-Founder</a:t>
+          </a:r>
+          <a:endParaRPr lang="en-IN" sz="3900" kern="1200" dirty="0"/>
+        </a:p>
+      </dsp:txBody>
+      <dsp:txXfrm>
+        <a:off x="0" y="3074981"/>
+        <a:ext cx="2915239" cy="1303087"/>
+      </dsp:txXfrm>
+    </dsp:sp>
+    <dsp:sp modelId="{84042C5C-68EA-4F13-8FD2-AC142F927076}">
+      <dsp:nvSpPr>
+        <dsp:cNvPr id="0" name=""/>
+        <dsp:cNvSpPr/>
+      </dsp:nvSpPr>
+      <dsp:spPr>
+        <a:xfrm>
+          <a:off x="2915239" y="2973177"/>
+          <a:ext cx="583047" cy="1506694"/>
+        </a:xfrm>
+        <a:prstGeom prst="leftBrace">
+          <a:avLst>
+            <a:gd name="adj1" fmla="val 35000"/>
+            <a:gd name="adj2" fmla="val 50000"/>
+          </a:avLst>
+        </a:prstGeom>
+        <a:noFill/>
+        <a:ln w="19050" cap="rnd" cmpd="sng" algn="ctr">
+          <a:solidFill>
+            <a:schemeClr val="accent1">
+              <a:shade val="60000"/>
+              <a:hueOff val="0"/>
+              <a:satOff val="0"/>
+              <a:lumOff val="0"/>
+              <a:alphaOff val="0"/>
+            </a:schemeClr>
+          </a:solidFill>
+          <a:prstDash val="solid"/>
+        </a:ln>
+        <a:effectLst/>
+      </dsp:spPr>
+      <dsp:style>
+        <a:lnRef idx="2">
+          <a:scrgbClr r="0" g="0" b="0"/>
+        </a:lnRef>
+        <a:fillRef idx="0">
+          <a:scrgbClr r="0" g="0" b="0"/>
+        </a:fillRef>
+        <a:effectRef idx="0">
+          <a:scrgbClr r="0" g="0" b="0"/>
+        </a:effectRef>
+        <a:fontRef idx="minor"/>
+      </dsp:style>
+    </dsp:sp>
+    <dsp:sp modelId="{9110D3E0-31E9-4A57-9A18-526DA69C7C1A}">
+      <dsp:nvSpPr>
+        <dsp:cNvPr id="0" name=""/>
+        <dsp:cNvSpPr/>
+      </dsp:nvSpPr>
+      <dsp:spPr>
+        <a:xfrm>
+          <a:off x="3731506" y="2973177"/>
+          <a:ext cx="7929450" cy="1506694"/>
+        </a:xfrm>
+        <a:prstGeom prst="rect">
+          <a:avLst/>
+        </a:prstGeom>
+        <a:solidFill>
+          <a:schemeClr val="accent1">
+            <a:hueOff val="0"/>
+            <a:satOff val="0"/>
+            <a:lumOff val="0"/>
+            <a:alphaOff val="0"/>
+          </a:schemeClr>
+        </a:solidFill>
+        <a:ln w="19050" cap="rnd" cmpd="sng" algn="ctr">
+          <a:solidFill>
+            <a:schemeClr val="lt1">
+              <a:hueOff val="0"/>
+              <a:satOff val="0"/>
+              <a:lumOff val="0"/>
+              <a:alphaOff val="0"/>
+            </a:schemeClr>
+          </a:solidFill>
+          <a:prstDash val="solid"/>
+        </a:ln>
+        <a:effectLst/>
+      </dsp:spPr>
+      <dsp:style>
+        <a:lnRef idx="2">
+          <a:scrgbClr r="0" g="0" b="0"/>
+        </a:lnRef>
+        <a:fillRef idx="1">
+          <a:scrgbClr r="0" g="0" b="0"/>
+        </a:fillRef>
+        <a:effectRef idx="0">
+          <a:scrgbClr r="0" g="0" b="0"/>
+        </a:effectRef>
+        <a:fontRef idx="minor">
+          <a:schemeClr val="lt1"/>
+        </a:fontRef>
+      </dsp:style>
+      <dsp:txBody>
+        <a:bodyPr spcFirstLastPara="0" vert="horz" wrap="square" lIns="148590" tIns="148590" rIns="148590" bIns="148590" numCol="1" spcCol="1270" anchor="ctr" anchorCtr="0">
+          <a:noAutofit/>
+        </a:bodyPr>
+        <a:lstStyle/>
+        <a:p>
+          <a:pPr marL="285750" lvl="1" indent="-285750" algn="l" defTabSz="1733550">
+            <a:lnSpc>
+              <a:spcPct val="90000"/>
+            </a:lnSpc>
+            <a:spcBef>
+              <a:spcPct val="0"/>
+            </a:spcBef>
+            <a:spcAft>
+              <a:spcPct val="15000"/>
+            </a:spcAft>
+            <a:buChar char="•"/>
+          </a:pPr>
+          <a:r>
+            <a:rPr lang="en-IN" sz="3900" kern="1200"/>
+            <a:t>Shubham Agarwal</a:t>
+          </a:r>
+          <a:endParaRPr lang="en-IN" sz="3900" kern="1200" dirty="0"/>
+        </a:p>
+        <a:p>
+          <a:pPr marL="285750" lvl="1" indent="-285750" algn="l" defTabSz="1733550">
+            <a:lnSpc>
+              <a:spcPct val="90000"/>
+            </a:lnSpc>
+            <a:spcBef>
+              <a:spcPct val="0"/>
+            </a:spcBef>
+            <a:spcAft>
+              <a:spcPct val="15000"/>
+            </a:spcAft>
+            <a:buChar char="•"/>
+          </a:pPr>
+          <a:r>
+            <a:rPr lang="en-IN" sz="3900" kern="1200"/>
+            <a:t>Tushar Jaiswal</a:t>
+          </a:r>
+          <a:endParaRPr lang="en-IN" sz="3900" kern="1200" dirty="0"/>
+        </a:p>
+      </dsp:txBody>
+      <dsp:txXfrm>
+        <a:off x="3731506" y="2973177"/>
+        <a:ext cx="7929450" cy="1506694"/>
+      </dsp:txXfrm>
+    </dsp:sp>
+  </dsp:spTree>
+</dsp:drawing>
+</file>
+
+<file path=ppt/diagrams/drawing2.xml><?xml version="1.0" encoding="utf-8"?>
+<dsp:drawing xmlns:dgm="http://schemas.openxmlformats.org/drawingml/2006/diagram" xmlns:dsp="http://schemas.microsoft.com/office/drawing/2008/diagram" xmlns:a="http://schemas.openxmlformats.org/drawingml/2006/main">
+  <dsp:spTree>
+    <dsp:nvGrpSpPr>
+      <dsp:cNvPr id="0" name=""/>
+      <dsp:cNvGrpSpPr/>
+    </dsp:nvGrpSpPr>
+    <dsp:grpSpPr/>
+    <dsp:sp modelId="{B2EC4D11-144D-4B41-AACB-98C449109F80}">
+      <dsp:nvSpPr>
+        <dsp:cNvPr id="0" name=""/>
+        <dsp:cNvSpPr/>
+      </dsp:nvSpPr>
+      <dsp:spPr>
+        <a:xfrm>
+          <a:off x="56" y="109907"/>
+          <a:ext cx="5391727" cy="748800"/>
+        </a:xfrm>
+        <a:prstGeom prst="rect">
+          <a:avLst/>
+        </a:prstGeom>
+        <a:solidFill>
+          <a:schemeClr val="accent1">
+            <a:hueOff val="0"/>
+            <a:satOff val="0"/>
+            <a:lumOff val="0"/>
+            <a:alphaOff val="0"/>
+          </a:schemeClr>
+        </a:solidFill>
+        <a:ln w="19050" cap="rnd" cmpd="sng" algn="ctr">
+          <a:solidFill>
+            <a:schemeClr val="accent1">
+              <a:hueOff val="0"/>
+              <a:satOff val="0"/>
+              <a:lumOff val="0"/>
+              <a:alphaOff val="0"/>
+            </a:schemeClr>
+          </a:solidFill>
+          <a:prstDash val="solid"/>
+        </a:ln>
+        <a:effectLst/>
+      </dsp:spPr>
+      <dsp:style>
+        <a:lnRef idx="2">
+          <a:scrgbClr r="0" g="0" b="0"/>
+        </a:lnRef>
+        <a:fillRef idx="1">
+          <a:scrgbClr r="0" g="0" b="0"/>
+        </a:fillRef>
+        <a:effectRef idx="0">
+          <a:scrgbClr r="0" g="0" b="0"/>
+        </a:effectRef>
+        <a:fontRef idx="minor">
+          <a:schemeClr val="lt1"/>
+        </a:fontRef>
+      </dsp:style>
+      <dsp:txBody>
+        <a:bodyPr spcFirstLastPara="0" vert="horz" wrap="square" lIns="184912" tIns="105664" rIns="184912" bIns="105664" numCol="1" spcCol="1270" anchor="ctr" anchorCtr="0">
+          <a:noAutofit/>
+        </a:bodyPr>
+        <a:lstStyle/>
+        <a:p>
+          <a:pPr marL="0" lvl="0" indent="0" algn="ctr" defTabSz="1155700">
+            <a:lnSpc>
+              <a:spcPct val="90000"/>
+            </a:lnSpc>
+            <a:spcBef>
+              <a:spcPct val="0"/>
+            </a:spcBef>
+            <a:spcAft>
+              <a:spcPct val="35000"/>
+            </a:spcAft>
+            <a:buNone/>
+          </a:pPr>
+          <a:r>
+            <a:rPr lang="en-IN" sz="2600" kern="1200" dirty="0"/>
+            <a:t>Vision</a:t>
+          </a:r>
+        </a:p>
+      </dsp:txBody>
+      <dsp:txXfrm>
+        <a:off x="56" y="109907"/>
+        <a:ext cx="5391727" cy="748800"/>
+      </dsp:txXfrm>
+    </dsp:sp>
+    <dsp:sp modelId="{63853D33-8147-4807-B5D6-C81D86F6B43D}">
+      <dsp:nvSpPr>
+        <dsp:cNvPr id="0" name=""/>
+        <dsp:cNvSpPr/>
+      </dsp:nvSpPr>
+      <dsp:spPr>
+        <a:xfrm>
+          <a:off x="56" y="858707"/>
+          <a:ext cx="5391727" cy="3425760"/>
+        </a:xfrm>
+        <a:prstGeom prst="rect">
+          <a:avLst/>
+        </a:prstGeom>
+        <a:solidFill>
+          <a:schemeClr val="accent1">
+            <a:alpha val="90000"/>
+            <a:tint val="40000"/>
+            <a:hueOff val="0"/>
+            <a:satOff val="0"/>
+            <a:lumOff val="0"/>
+            <a:alphaOff val="0"/>
+          </a:schemeClr>
+        </a:solidFill>
+        <a:ln w="19050" cap="rnd" cmpd="sng" algn="ctr">
+          <a:solidFill>
+            <a:schemeClr val="accent1">
+              <a:alpha val="90000"/>
+              <a:tint val="40000"/>
+              <a:hueOff val="0"/>
+              <a:satOff val="0"/>
+              <a:lumOff val="0"/>
+              <a:alphaOff val="0"/>
+            </a:schemeClr>
+          </a:solidFill>
+          <a:prstDash val="solid"/>
+        </a:ln>
+        <a:effectLst/>
+      </dsp:spPr>
+      <dsp:style>
+        <a:lnRef idx="2">
+          <a:scrgbClr r="0" g="0" b="0"/>
+        </a:lnRef>
+        <a:fillRef idx="1">
+          <a:scrgbClr r="0" g="0" b="0"/>
+        </a:fillRef>
+        <a:effectRef idx="0">
+          <a:scrgbClr r="0" g="0" b="0"/>
+        </a:effectRef>
+        <a:fontRef idx="minor"/>
+      </dsp:style>
+      <dsp:txBody>
+        <a:bodyPr spcFirstLastPara="0" vert="horz" wrap="square" lIns="138684" tIns="138684" rIns="184912" bIns="208026" numCol="1" spcCol="1270" anchor="t" anchorCtr="0">
+          <a:noAutofit/>
+        </a:bodyPr>
+        <a:lstStyle/>
+        <a:p>
+          <a:pPr marL="228600" lvl="1" indent="-228600" algn="l" defTabSz="1155700">
+            <a:lnSpc>
+              <a:spcPct val="90000"/>
+            </a:lnSpc>
+            <a:spcBef>
+              <a:spcPct val="0"/>
+            </a:spcBef>
+            <a:spcAft>
+              <a:spcPct val="15000"/>
+            </a:spcAft>
+            <a:buChar char="•"/>
+          </a:pPr>
+          <a:r>
+            <a:rPr lang="en-IN" sz="2600" kern="1200" dirty="0"/>
+            <a:t>Leading Technology company in </a:t>
+          </a:r>
+          <a:r>
+            <a:rPr lang="en-IN" sz="2600" b="1" kern="1200" dirty="0"/>
+            <a:t>AI-native web and mobile solution</a:t>
+          </a:r>
+        </a:p>
+        <a:p>
+          <a:pPr marL="228600" lvl="1" indent="-228600" algn="l" defTabSz="1155700">
+            <a:lnSpc>
+              <a:spcPct val="90000"/>
+            </a:lnSpc>
+            <a:spcBef>
+              <a:spcPct val="0"/>
+            </a:spcBef>
+            <a:spcAft>
+              <a:spcPct val="15000"/>
+            </a:spcAft>
+            <a:buChar char="•"/>
+          </a:pPr>
+          <a:r>
+            <a:rPr lang="en-IN" sz="2600" b="0" kern="1200" dirty="0"/>
+            <a:t>Building </a:t>
+          </a:r>
+          <a:r>
+            <a:rPr lang="en-IN" sz="2600" b="1" kern="1200" dirty="0"/>
+            <a:t>intelligent and </a:t>
+          </a:r>
+          <a:r>
+            <a:rPr lang="en-US" sz="2600" b="1" kern="1200" dirty="0"/>
+            <a:t>scalable, and user-centric digital products</a:t>
+          </a:r>
+          <a:endParaRPr lang="en-IN" sz="2600" b="1" kern="1200" dirty="0"/>
+        </a:p>
+        <a:p>
+          <a:pPr marL="228600" lvl="1" indent="-228600" algn="l" defTabSz="1155700">
+            <a:lnSpc>
+              <a:spcPct val="90000"/>
+            </a:lnSpc>
+            <a:spcBef>
+              <a:spcPct val="0"/>
+            </a:spcBef>
+            <a:spcAft>
+              <a:spcPct val="15000"/>
+            </a:spcAft>
+            <a:buChar char="•"/>
+          </a:pPr>
+          <a:r>
+            <a:rPr lang="en-IN" sz="2600" b="0" kern="1200"/>
+            <a:t>Deliver</a:t>
+          </a:r>
+          <a:r>
+            <a:rPr lang="en-IN" sz="2600" b="1" kern="1200"/>
+            <a:t> </a:t>
+          </a:r>
+          <a:r>
+            <a:rPr lang="en-IN" sz="2600" kern="1200"/>
+            <a:t>high-performance applications across platforms</a:t>
+          </a:r>
+          <a:endParaRPr lang="en-IN" sz="2600" b="0" kern="1200" dirty="0"/>
+        </a:p>
+      </dsp:txBody>
+      <dsp:txXfrm>
+        <a:off x="56" y="858707"/>
+        <a:ext cx="5391727" cy="3425760"/>
+      </dsp:txXfrm>
+    </dsp:sp>
+    <dsp:sp modelId="{E34F7B5E-DB52-47D9-A342-A29A39CAC83C}">
+      <dsp:nvSpPr>
+        <dsp:cNvPr id="0" name=""/>
+        <dsp:cNvSpPr/>
+      </dsp:nvSpPr>
+      <dsp:spPr>
+        <a:xfrm>
+          <a:off x="6146625" y="109907"/>
+          <a:ext cx="5391727" cy="748800"/>
+        </a:xfrm>
+        <a:prstGeom prst="rect">
+          <a:avLst/>
+        </a:prstGeom>
+        <a:solidFill>
+          <a:schemeClr val="accent1">
+            <a:hueOff val="0"/>
+            <a:satOff val="0"/>
+            <a:lumOff val="0"/>
+            <a:alphaOff val="0"/>
+          </a:schemeClr>
+        </a:solidFill>
+        <a:ln w="19050" cap="rnd" cmpd="sng" algn="ctr">
+          <a:solidFill>
+            <a:schemeClr val="accent1">
+              <a:hueOff val="0"/>
+              <a:satOff val="0"/>
+              <a:lumOff val="0"/>
+              <a:alphaOff val="0"/>
+            </a:schemeClr>
+          </a:solidFill>
+          <a:prstDash val="solid"/>
+        </a:ln>
+        <a:effectLst/>
+      </dsp:spPr>
+      <dsp:style>
+        <a:lnRef idx="2">
+          <a:scrgbClr r="0" g="0" b="0"/>
+        </a:lnRef>
+        <a:fillRef idx="1">
+          <a:scrgbClr r="0" g="0" b="0"/>
+        </a:fillRef>
+        <a:effectRef idx="0">
+          <a:scrgbClr r="0" g="0" b="0"/>
+        </a:effectRef>
+        <a:fontRef idx="minor">
+          <a:schemeClr val="lt1"/>
+        </a:fontRef>
+      </dsp:style>
+      <dsp:txBody>
+        <a:bodyPr spcFirstLastPara="0" vert="horz" wrap="square" lIns="184912" tIns="105664" rIns="184912" bIns="105664" numCol="1" spcCol="1270" anchor="ctr" anchorCtr="0">
+          <a:noAutofit/>
+        </a:bodyPr>
+        <a:lstStyle/>
+        <a:p>
+          <a:pPr marL="0" lvl="0" indent="0" algn="ctr" defTabSz="1155700">
+            <a:lnSpc>
+              <a:spcPct val="90000"/>
+            </a:lnSpc>
+            <a:spcBef>
+              <a:spcPct val="0"/>
+            </a:spcBef>
+            <a:spcAft>
+              <a:spcPct val="35000"/>
+            </a:spcAft>
+            <a:buNone/>
+          </a:pPr>
+          <a:r>
+            <a:rPr lang="en-IN" sz="2600" kern="1200"/>
+            <a:t>Mission</a:t>
+          </a:r>
+          <a:endParaRPr lang="en-IN" sz="2600" kern="1200" dirty="0"/>
+        </a:p>
+      </dsp:txBody>
+      <dsp:txXfrm>
+        <a:off x="6146625" y="109907"/>
+        <a:ext cx="5391727" cy="748800"/>
+      </dsp:txXfrm>
+    </dsp:sp>
+    <dsp:sp modelId="{472554A7-6B74-4F73-83E1-A24CAA246678}">
+      <dsp:nvSpPr>
+        <dsp:cNvPr id="0" name=""/>
+        <dsp:cNvSpPr/>
+      </dsp:nvSpPr>
+      <dsp:spPr>
+        <a:xfrm>
+          <a:off x="6146625" y="858707"/>
+          <a:ext cx="5391727" cy="3425760"/>
+        </a:xfrm>
+        <a:prstGeom prst="rect">
+          <a:avLst/>
+        </a:prstGeom>
+        <a:solidFill>
+          <a:schemeClr val="accent1">
+            <a:alpha val="90000"/>
+            <a:tint val="40000"/>
+            <a:hueOff val="0"/>
+            <a:satOff val="0"/>
+            <a:lumOff val="0"/>
+            <a:alphaOff val="0"/>
+          </a:schemeClr>
+        </a:solidFill>
+        <a:ln w="19050" cap="rnd" cmpd="sng" algn="ctr">
+          <a:solidFill>
+            <a:schemeClr val="accent1">
+              <a:alpha val="90000"/>
+              <a:tint val="40000"/>
+              <a:hueOff val="0"/>
+              <a:satOff val="0"/>
+              <a:lumOff val="0"/>
+              <a:alphaOff val="0"/>
+            </a:schemeClr>
+          </a:solidFill>
+          <a:prstDash val="solid"/>
+        </a:ln>
+        <a:effectLst/>
+      </dsp:spPr>
+      <dsp:style>
+        <a:lnRef idx="2">
+          <a:scrgbClr r="0" g="0" b="0"/>
+        </a:lnRef>
+        <a:fillRef idx="1">
+          <a:scrgbClr r="0" g="0" b="0"/>
+        </a:fillRef>
+        <a:effectRef idx="0">
+          <a:scrgbClr r="0" g="0" b="0"/>
+        </a:effectRef>
+        <a:fontRef idx="minor"/>
+      </dsp:style>
+      <dsp:txBody>
+        <a:bodyPr spcFirstLastPara="0" vert="horz" wrap="square" lIns="138684" tIns="138684" rIns="184912" bIns="208026" numCol="1" spcCol="1270" anchor="t" anchorCtr="0">
+          <a:noAutofit/>
+        </a:bodyPr>
+        <a:lstStyle/>
+        <a:p>
+          <a:pPr marL="228600" lvl="1" indent="-228600" algn="l" defTabSz="1155700">
+            <a:lnSpc>
+              <a:spcPct val="90000"/>
+            </a:lnSpc>
+            <a:spcBef>
+              <a:spcPct val="0"/>
+            </a:spcBef>
+            <a:spcAft>
+              <a:spcPct val="15000"/>
+            </a:spcAft>
+            <a:buChar char="•"/>
+          </a:pPr>
+          <a:r>
+            <a:rPr lang="en-IN" sz="2600" kern="1200" dirty="0"/>
+            <a:t>Develop </a:t>
+          </a:r>
+          <a:r>
+            <a:rPr lang="en-IN" sz="2600" b="1" kern="1200" dirty="0"/>
+            <a:t>AI-powered</a:t>
+          </a:r>
+          <a:r>
+            <a:rPr lang="en-IN" sz="2600" kern="1200" dirty="0"/>
+            <a:t> application</a:t>
+          </a:r>
+        </a:p>
+        <a:p>
+          <a:pPr marL="228600" lvl="1" indent="-228600" algn="l" defTabSz="1155700">
+            <a:lnSpc>
+              <a:spcPct val="90000"/>
+            </a:lnSpc>
+            <a:spcBef>
+              <a:spcPct val="0"/>
+            </a:spcBef>
+            <a:spcAft>
+              <a:spcPct val="15000"/>
+            </a:spcAft>
+            <a:buChar char="•"/>
+          </a:pPr>
+          <a:r>
+            <a:rPr lang="en-IN" sz="2600" kern="1200" dirty="0"/>
+            <a:t>Scalable </a:t>
+          </a:r>
+          <a:r>
+            <a:rPr lang="en-IN" sz="2600" b="1" kern="1200" dirty="0"/>
+            <a:t>Web</a:t>
+          </a:r>
+          <a:r>
+            <a:rPr lang="en-IN" sz="2600" kern="1200" dirty="0"/>
+            <a:t> and </a:t>
+          </a:r>
+          <a:r>
+            <a:rPr lang="en-IN" sz="2600" b="1" kern="1200" dirty="0"/>
+            <a:t>Android</a:t>
+          </a:r>
+          <a:r>
+            <a:rPr lang="en-IN" sz="2600" kern="1200" dirty="0"/>
+            <a:t> application</a:t>
+          </a:r>
+        </a:p>
+        <a:p>
+          <a:pPr marL="228600" lvl="1" indent="-228600" algn="l" defTabSz="1155700">
+            <a:lnSpc>
+              <a:spcPct val="90000"/>
+            </a:lnSpc>
+            <a:spcBef>
+              <a:spcPct val="0"/>
+            </a:spcBef>
+            <a:spcAft>
+              <a:spcPct val="15000"/>
+            </a:spcAft>
+            <a:buChar char="•"/>
+          </a:pPr>
+          <a:r>
+            <a:rPr lang="en-IN" sz="2600" kern="1200" dirty="0"/>
+            <a:t>Adopt emerging technologies like </a:t>
+          </a:r>
+          <a:r>
+            <a:rPr lang="en-IN" sz="2600" b="1" kern="1200" dirty="0"/>
+            <a:t>AI, Automation and Cloud Computing</a:t>
+          </a:r>
+        </a:p>
+      </dsp:txBody>
+      <dsp:txXfrm>
+        <a:off x="6146625" y="858707"/>
+        <a:ext cx="5391727" cy="3425760"/>
+      </dsp:txXfrm>
+    </dsp:sp>
+  </dsp:spTree>
+</dsp:drawing>
+</file>
+
+<file path=ppt/diagrams/drawing3.xml><?xml version="1.0" encoding="utf-8"?>
 <dsp:drawing xmlns:dgm="http://schemas.openxmlformats.org/drawingml/2006/diagram" xmlns:dsp="http://schemas.microsoft.com/office/drawing/2008/diagram" xmlns:a="http://schemas.openxmlformats.org/drawingml/2006/main">
   <dsp:spTree>
     <dsp:nvGrpSpPr>
@@ -5286,7 +8967,7 @@
 </dsp:drawing>
 </file>
 
-<file path=ppt/diagrams/drawing2.xml><?xml version="1.0" encoding="utf-8"?>
+<file path=ppt/diagrams/drawing4.xml><?xml version="1.0" encoding="utf-8"?>
 <dsp:drawing xmlns:dgm="http://schemas.openxmlformats.org/drawingml/2006/diagram" xmlns:dsp="http://schemas.microsoft.com/office/drawing/2008/diagram" xmlns:a="http://schemas.openxmlformats.org/drawingml/2006/main">
   <dsp:spTree>
     <dsp:nvGrpSpPr>
@@ -6005,7 +9686,7 @@
 </dsp:drawing>
 </file>
 
-<file path=ppt/diagrams/drawing3.xml><?xml version="1.0" encoding="utf-8"?>
+<file path=ppt/diagrams/drawing5.xml><?xml version="1.0" encoding="utf-8"?>
 <dsp:drawing xmlns:dgm="http://schemas.openxmlformats.org/drawingml/2006/diagram" xmlns:dsp="http://schemas.microsoft.com/office/drawing/2008/diagram" xmlns:a="http://schemas.openxmlformats.org/drawingml/2006/main">
   <dsp:spTree>
     <dsp:nvGrpSpPr>
@@ -7189,7 +10870,7 @@
 </dsp:drawing>
 </file>
 
-<file path=ppt/diagrams/drawing4.xml><?xml version="1.0" encoding="utf-8"?>
+<file path=ppt/diagrams/drawing6.xml><?xml version="1.0" encoding="utf-8"?>
 <dsp:drawing xmlns:dgm="http://schemas.openxmlformats.org/drawingml/2006/diagram" xmlns:dsp="http://schemas.microsoft.com/office/drawing/2008/diagram" xmlns:a="http://schemas.openxmlformats.org/drawingml/2006/main">
   <dsp:spTree>
     <dsp:nvGrpSpPr>
@@ -7517,6 +11198,428 @@
 </file>
 
 <file path=ppt/diagrams/layout1.xml><?xml version="1.0" encoding="utf-8"?>
+<dgm:layoutDef xmlns:dgm="http://schemas.openxmlformats.org/drawingml/2006/diagram" xmlns:a="http://schemas.openxmlformats.org/drawingml/2006/main" uniqueId="urn:diagrams.loki3.com/BracketList">
+  <dgm:title val="Vertical Bracket List"/>
+  <dgm:desc val="Use to show grouped blocks of information.  Works well with large amounts of Level 2 text."/>
+  <dgm:catLst>
+    <dgm:cat type="list" pri="4110"/>
+    <dgm:cat type="officeonline" pri="3000"/>
+  </dgm:catLst>
+  <dgm:sampData>
+    <dgm:dataModel>
+      <dgm:ptLst>
+        <dgm:pt modelId="0" type="doc"/>
+        <dgm:pt modelId="1">
+          <dgm:prSet phldr="1"/>
+        </dgm:pt>
+        <dgm:pt modelId="11">
+          <dgm:prSet phldr="1"/>
+        </dgm:pt>
+        <dgm:pt modelId="2">
+          <dgm:prSet phldr="1"/>
+        </dgm:pt>
+        <dgm:pt modelId="21">
+          <dgm:prSet phldr="1"/>
+        </dgm:pt>
+      </dgm:ptLst>
+      <dgm:cxnLst>
+        <dgm:cxn modelId="3" srcId="0" destId="1" srcOrd="0" destOrd="0"/>
+        <dgm:cxn modelId="4" srcId="1" destId="11" srcOrd="0" destOrd="0"/>
+        <dgm:cxn modelId="5" srcId="0" destId="2" srcOrd="0" destOrd="0"/>
+        <dgm:cxn modelId="6" srcId="2" destId="21" srcOrd="0" destOrd="0"/>
+      </dgm:cxnLst>
+      <dgm:bg/>
+      <dgm:whole/>
+    </dgm:dataModel>
+  </dgm:sampData>
+  <dgm:styleData useDef="1">
+    <dgm:dataModel>
+      <dgm:ptLst/>
+      <dgm:bg/>
+      <dgm:whole/>
+    </dgm:dataModel>
+  </dgm:styleData>
+  <dgm:clrData useDef="1">
+    <dgm:dataModel>
+      <dgm:ptLst/>
+      <dgm:bg/>
+      <dgm:whole/>
+    </dgm:dataModel>
+  </dgm:clrData>
+  <dgm:layoutNode name="Name0">
+    <dgm:varLst>
+      <dgm:dir/>
+      <dgm:animLvl val="lvl"/>
+      <dgm:resizeHandles val="exact"/>
+    </dgm:varLst>
+    <dgm:choose name="Name1">
+      <dgm:if name="Name2" func="var" arg="dir" op="equ" val="norm">
+        <dgm:alg type="lin">
+          <dgm:param type="linDir" val="fromT"/>
+          <dgm:param type="nodeHorzAlign" val="l"/>
+        </dgm:alg>
+      </dgm:if>
+      <dgm:else name="Name3">
+        <dgm:alg type="lin">
+          <dgm:param type="linDir" val="fromT"/>
+          <dgm:param type="nodeHorzAlign" val="r"/>
+        </dgm:alg>
+      </dgm:else>
+    </dgm:choose>
+    <dgm:shape xmlns:r="http://schemas.openxmlformats.org/officeDocument/2006/relationships" r:blip="">
+      <dgm:adjLst/>
+    </dgm:shape>
+    <dgm:presOf/>
+    <dgm:constrLst>
+      <dgm:constr type="h" for="ch" forName="linNode" refType="h"/>
+      <dgm:constr type="w" for="ch" forName="linNode" refType="w"/>
+      <dgm:constr type="h" for="ch" forName="spV" refType="primFontSz" refFor="des" refForName="parTx" fact="0.1"/>
+      <dgm:constr type="primFontSz" for="des" forName="parTx" val="65"/>
+      <dgm:constr type="primFontSz" for="des" forName="desTx" refType="primFontSz" refFor="des" refForName="parTx"/>
+      <dgm:constr type="h" for="des" forName="parTx" refType="primFontSz" refFor="des" refForName="parTx" fact="0.55"/>
+      <dgm:constr type="h" for="des" forName="bracket" refType="primFontSz" refFor="des" refForName="parTx" fact="0.55"/>
+      <dgm:constr type="h" for="des" forName="desTx" refType="primFontSz" refFor="des" refForName="parTx" fact="0.55"/>
+    </dgm:constrLst>
+    <dgm:ruleLst>
+      <dgm:rule type="primFontSz" for="des" forName="parTx" val="5" fact="NaN" max="NaN"/>
+    </dgm:ruleLst>
+    <dgm:forEach name="Name4" axis="ch" ptType="node">
+      <dgm:layoutNode name="linNode">
+        <dgm:choose name="Name5">
+          <dgm:if name="Name6" func="var" arg="dir" op="equ" val="norm">
+            <dgm:alg type="lin">
+              <dgm:param type="linDir" val="fromL"/>
+            </dgm:alg>
+          </dgm:if>
+          <dgm:else name="Name7">
+            <dgm:alg type="lin">
+              <dgm:param type="linDir" val="fromR"/>
+            </dgm:alg>
+          </dgm:else>
+        </dgm:choose>
+        <dgm:shape xmlns:r="http://schemas.openxmlformats.org/officeDocument/2006/relationships" r:blip="">
+          <dgm:adjLst/>
+        </dgm:shape>
+        <dgm:presOf/>
+        <dgm:constrLst>
+          <dgm:constr type="w" for="ch" forName="parTx" refType="w" fact="0.25"/>
+          <dgm:constr type="w" for="ch" forName="bracket" refType="w" fact="0.05"/>
+          <dgm:constr type="w" for="ch" forName="spH" refType="w" fact="0.02"/>
+          <dgm:constr type="w" for="ch" forName="desTx" refType="w" fact="0.68"/>
+          <dgm:constr type="h" for="ch" forName="bracket" refType="h" refFor="ch" refForName="desTx" op="gte"/>
+          <dgm:constr type="h" for="ch" forName="bracket" refType="h" refFor="ch" refForName="parTx" op="gte"/>
+          <dgm:constr type="h" for="ch" forName="desTx" refType="h" refFor="ch" refForName="parTx" op="gte"/>
+        </dgm:constrLst>
+        <dgm:ruleLst/>
+        <dgm:layoutNode name="parTx" styleLbl="revTx">
+          <dgm:varLst>
+            <dgm:chMax val="1"/>
+            <dgm:bulletEnabled val="1"/>
+          </dgm:varLst>
+          <dgm:choose name="Name8">
+            <dgm:if name="Name9" func="var" arg="dir" op="equ" val="norm">
+              <dgm:alg type="tx">
+                <dgm:param type="parTxLTRAlign" val="r"/>
+              </dgm:alg>
+            </dgm:if>
+            <dgm:else name="Name10">
+              <dgm:alg type="tx">
+                <dgm:param type="parTxLTRAlign" val="l"/>
+              </dgm:alg>
+            </dgm:else>
+          </dgm:choose>
+          <dgm:shape xmlns:r="http://schemas.openxmlformats.org/officeDocument/2006/relationships" type="rect" r:blip="">
+            <dgm:adjLst/>
+          </dgm:shape>
+          <dgm:presOf axis="self" ptType="node"/>
+          <dgm:constrLst>
+            <dgm:constr type="tMarg" refType="primFontSz" fact="0.2"/>
+            <dgm:constr type="bMarg" refType="primFontSz" fact="0.2"/>
+          </dgm:constrLst>
+          <dgm:ruleLst>
+            <dgm:rule type="h" val="INF" fact="NaN" max="NaN"/>
+          </dgm:ruleLst>
+        </dgm:layoutNode>
+        <dgm:layoutNode name="bracket" styleLbl="parChTrans1D1">
+          <dgm:alg type="sp"/>
+          <dgm:choose name="Name11">
+            <dgm:if name="Name12" func="var" arg="dir" op="equ" val="norm">
+              <dgm:shape xmlns:r="http://schemas.openxmlformats.org/officeDocument/2006/relationships" type="leftBrace" r:blip="">
+                <dgm:adjLst>
+                  <dgm:adj idx="1" val="0.35"/>
+                </dgm:adjLst>
+              </dgm:shape>
+            </dgm:if>
+            <dgm:else name="Name13">
+              <dgm:shape xmlns:r="http://schemas.openxmlformats.org/officeDocument/2006/relationships" rot="180" type="leftBrace" r:blip="">
+                <dgm:adjLst>
+                  <dgm:adj idx="1" val="0.35"/>
+                </dgm:adjLst>
+              </dgm:shape>
+            </dgm:else>
+          </dgm:choose>
+          <dgm:presOf/>
+        </dgm:layoutNode>
+        <dgm:layoutNode name="spH">
+          <dgm:alg type="sp"/>
+        </dgm:layoutNode>
+        <dgm:choose name="Name14">
+          <dgm:if name="Name15" axis="ch" ptType="node" func="cnt" op="gte" val="1">
+            <dgm:layoutNode name="desTx" styleLbl="node1">
+              <dgm:varLst>
+                <dgm:bulletEnabled val="1"/>
+              </dgm:varLst>
+              <dgm:alg type="tx">
+                <dgm:param type="stBulletLvl" val="1"/>
+                <dgm:param type="txAnchorVertCh" val="mid"/>
+              </dgm:alg>
+              <dgm:shape xmlns:r="http://schemas.openxmlformats.org/officeDocument/2006/relationships" type="rect" r:blip="">
+                <dgm:adjLst/>
+              </dgm:shape>
+              <dgm:presOf axis="des" ptType="node"/>
+              <dgm:constrLst>
+                <dgm:constr type="secFontSz" refType="primFontSz"/>
+                <dgm:constr type="tMarg" refType="primFontSz" fact="0.3"/>
+                <dgm:constr type="bMarg" refType="primFontSz" fact="0.3"/>
+                <dgm:constr type="lMarg" refType="primFontSz" fact="0.3"/>
+                <dgm:constr type="rMarg" refType="primFontSz" fact="0.3"/>
+              </dgm:constrLst>
+              <dgm:ruleLst>
+                <dgm:rule type="h" val="INF" fact="NaN" max="NaN"/>
+              </dgm:ruleLst>
+            </dgm:layoutNode>
+          </dgm:if>
+          <dgm:else name="Name16"/>
+        </dgm:choose>
+      </dgm:layoutNode>
+      <dgm:forEach name="Name17" axis="followSib" ptType="sibTrans" cnt="1">
+        <dgm:layoutNode name="spV">
+          <dgm:alg type="sp"/>
+        </dgm:layoutNode>
+      </dgm:forEach>
+    </dgm:forEach>
+  </dgm:layoutNode>
+</dgm:layoutDef>
+</file>
+
+<file path=ppt/diagrams/layout2.xml><?xml version="1.0" encoding="utf-8"?>
+<dgm:layoutDef xmlns:dgm="http://schemas.openxmlformats.org/drawingml/2006/diagram" xmlns:a="http://schemas.openxmlformats.org/drawingml/2006/main" uniqueId="urn:microsoft.com/office/officeart/2005/8/layout/hList1">
+  <dgm:title val=""/>
+  <dgm:desc val=""/>
+  <dgm:catLst>
+    <dgm:cat type="list" pri="5000"/>
+    <dgm:cat type="convert" pri="5000"/>
+  </dgm:catLst>
+  <dgm:sampData>
+    <dgm:dataModel>
+      <dgm:ptLst>
+        <dgm:pt modelId="0" type="doc"/>
+        <dgm:pt modelId="1">
+          <dgm:prSet phldr="1"/>
+        </dgm:pt>
+        <dgm:pt modelId="11">
+          <dgm:prSet phldr="1"/>
+        </dgm:pt>
+        <dgm:pt modelId="12">
+          <dgm:prSet phldr="1"/>
+        </dgm:pt>
+        <dgm:pt modelId="2">
+          <dgm:prSet phldr="1"/>
+        </dgm:pt>
+        <dgm:pt modelId="21">
+          <dgm:prSet phldr="1"/>
+        </dgm:pt>
+        <dgm:pt modelId="22">
+          <dgm:prSet phldr="1"/>
+        </dgm:pt>
+        <dgm:pt modelId="3">
+          <dgm:prSet phldr="1"/>
+        </dgm:pt>
+        <dgm:pt modelId="31">
+          <dgm:prSet phldr="1"/>
+        </dgm:pt>
+        <dgm:pt modelId="32">
+          <dgm:prSet phldr="1"/>
+        </dgm:pt>
+      </dgm:ptLst>
+      <dgm:cxnLst>
+        <dgm:cxn modelId="4" srcId="0" destId="1" srcOrd="0" destOrd="0"/>
+        <dgm:cxn modelId="5" srcId="0" destId="2" srcOrd="1" destOrd="0"/>
+        <dgm:cxn modelId="6" srcId="0" destId="3" srcOrd="2" destOrd="0"/>
+        <dgm:cxn modelId="13" srcId="1" destId="11" srcOrd="0" destOrd="0"/>
+        <dgm:cxn modelId="14" srcId="1" destId="12" srcOrd="1" destOrd="0"/>
+        <dgm:cxn modelId="23" srcId="2" destId="21" srcOrd="0" destOrd="0"/>
+        <dgm:cxn modelId="24" srcId="2" destId="22" srcOrd="1" destOrd="0"/>
+        <dgm:cxn modelId="33" srcId="3" destId="31" srcOrd="0" destOrd="0"/>
+        <dgm:cxn modelId="34" srcId="3" destId="32" srcOrd="1" destOrd="0"/>
+      </dgm:cxnLst>
+      <dgm:bg/>
+      <dgm:whole/>
+    </dgm:dataModel>
+  </dgm:sampData>
+  <dgm:styleData>
+    <dgm:dataModel>
+      <dgm:ptLst>
+        <dgm:pt modelId="0" type="doc"/>
+        <dgm:pt modelId="1">
+          <dgm:prSet phldr="1"/>
+        </dgm:pt>
+        <dgm:pt modelId="2">
+          <dgm:prSet phldr="1"/>
+        </dgm:pt>
+      </dgm:ptLst>
+      <dgm:cxnLst>
+        <dgm:cxn modelId="3" srcId="0" destId="1" srcOrd="0" destOrd="0"/>
+        <dgm:cxn modelId="4" srcId="0" destId="2" srcOrd="1" destOrd="0"/>
+      </dgm:cxnLst>
+      <dgm:bg/>
+      <dgm:whole/>
+    </dgm:dataModel>
+  </dgm:styleData>
+  <dgm:clrData>
+    <dgm:dataModel>
+      <dgm:ptLst>
+        <dgm:pt modelId="0" type="doc"/>
+        <dgm:pt modelId="1">
+          <dgm:prSet phldr="1"/>
+        </dgm:pt>
+        <dgm:pt modelId="2">
+          <dgm:prSet phldr="1"/>
+        </dgm:pt>
+        <dgm:pt modelId="3">
+          <dgm:prSet phldr="1"/>
+        </dgm:pt>
+        <dgm:pt modelId="4">
+          <dgm:prSet phldr="1"/>
+        </dgm:pt>
+      </dgm:ptLst>
+      <dgm:cxnLst>
+        <dgm:cxn modelId="5" srcId="0" destId="1" srcOrd="0" destOrd="0"/>
+        <dgm:cxn modelId="6" srcId="0" destId="2" srcOrd="1" destOrd="0"/>
+        <dgm:cxn modelId="7" srcId="0" destId="3" srcOrd="2" destOrd="0"/>
+        <dgm:cxn modelId="8" srcId="0" destId="4" srcOrd="3" destOrd="0"/>
+      </dgm:cxnLst>
+      <dgm:bg/>
+      <dgm:whole/>
+    </dgm:dataModel>
+  </dgm:clrData>
+  <dgm:layoutNode name="Name0">
+    <dgm:varLst>
+      <dgm:dir/>
+      <dgm:animLvl val="lvl"/>
+      <dgm:resizeHandles val="exact"/>
+    </dgm:varLst>
+    <dgm:choose name="Name1">
+      <dgm:if name="Name2" func="var" arg="dir" op="equ" val="norm">
+        <dgm:alg type="lin"/>
+      </dgm:if>
+      <dgm:else name="Name3">
+        <dgm:alg type="lin">
+          <dgm:param type="linDir" val="fromR"/>
+        </dgm:alg>
+      </dgm:else>
+    </dgm:choose>
+    <dgm:shape xmlns:r="http://schemas.openxmlformats.org/officeDocument/2006/relationships" r:blip="">
+      <dgm:adjLst/>
+    </dgm:shape>
+    <dgm:presOf/>
+    <dgm:constrLst>
+      <dgm:constr type="h" for="ch" forName="composite" refType="h"/>
+      <dgm:constr type="w" for="ch" forName="composite" refType="w"/>
+      <dgm:constr type="w" for="des" forName="parTx"/>
+      <dgm:constr type="h" for="des" forName="parTx" op="equ"/>
+      <dgm:constr type="w" for="des" forName="desTx"/>
+      <dgm:constr type="h" for="des" forName="desTx" op="equ"/>
+      <dgm:constr type="primFontSz" for="des" forName="parTx" val="65"/>
+      <dgm:constr type="secFontSz" for="des" forName="desTx" refType="primFontSz" refFor="des" refForName="parTx" op="equ"/>
+      <dgm:constr type="h" for="des" forName="parTx" refType="primFontSz" refFor="des" refForName="parTx" fact="0.8"/>
+      <dgm:constr type="h" for="des" forName="desTx" refType="primFontSz" refFor="des" refForName="parTx" fact="1.22"/>
+      <dgm:constr type="w" for="ch" forName="space" refType="w" refFor="ch" refForName="composite" op="equ" fact="0.14"/>
+    </dgm:constrLst>
+    <dgm:ruleLst>
+      <dgm:rule type="w" for="ch" forName="composite" val="0" fact="NaN" max="NaN"/>
+      <dgm:rule type="primFontSz" for="des" forName="parTx" val="5" fact="NaN" max="NaN"/>
+    </dgm:ruleLst>
+    <dgm:forEach name="Name4" axis="ch" ptType="node">
+      <dgm:layoutNode name="composite">
+        <dgm:alg type="composite"/>
+        <dgm:shape xmlns:r="http://schemas.openxmlformats.org/officeDocument/2006/relationships" r:blip="">
+          <dgm:adjLst/>
+        </dgm:shape>
+        <dgm:presOf/>
+        <dgm:constrLst>
+          <dgm:constr type="l" for="ch" forName="parTx"/>
+          <dgm:constr type="w" for="ch" forName="parTx" refType="w"/>
+          <dgm:constr type="t" for="ch" forName="parTx"/>
+          <dgm:constr type="l" for="ch" forName="desTx"/>
+          <dgm:constr type="w" for="ch" forName="desTx" refType="w" refFor="ch" refForName="parTx"/>
+          <dgm:constr type="t" for="ch" forName="desTx" refType="h" refFor="ch" refForName="parTx"/>
+        </dgm:constrLst>
+        <dgm:ruleLst>
+          <dgm:rule type="h" val="INF" fact="NaN" max="NaN"/>
+        </dgm:ruleLst>
+        <dgm:layoutNode name="parTx" styleLbl="alignNode1">
+          <dgm:varLst>
+            <dgm:chMax val="0"/>
+            <dgm:chPref val="0"/>
+            <dgm:bulletEnabled val="1"/>
+          </dgm:varLst>
+          <dgm:alg type="tx"/>
+          <dgm:shape xmlns:r="http://schemas.openxmlformats.org/officeDocument/2006/relationships" type="rect" r:blip="">
+            <dgm:adjLst/>
+          </dgm:shape>
+          <dgm:presOf axis="self" ptType="node"/>
+          <dgm:constrLst>
+            <dgm:constr type="h" refType="w" op="lte" fact="0.4"/>
+            <dgm:constr type="h"/>
+            <dgm:constr type="tMarg" refType="primFontSz" fact="0.32"/>
+            <dgm:constr type="bMarg" refType="primFontSz" fact="0.32"/>
+          </dgm:constrLst>
+          <dgm:ruleLst>
+            <dgm:rule type="h" val="INF" fact="NaN" max="NaN"/>
+          </dgm:ruleLst>
+        </dgm:layoutNode>
+        <dgm:layoutNode name="desTx" styleLbl="alignAccFollowNode1">
+          <dgm:varLst>
+            <dgm:bulletEnabled val="1"/>
+          </dgm:varLst>
+          <dgm:alg type="tx">
+            <dgm:param type="stBulletLvl" val="1"/>
+          </dgm:alg>
+          <dgm:shape xmlns:r="http://schemas.openxmlformats.org/officeDocument/2006/relationships" type="rect" r:blip="">
+            <dgm:adjLst/>
+          </dgm:shape>
+          <dgm:presOf axis="des" ptType="node"/>
+          <dgm:constrLst>
+            <dgm:constr type="secFontSz" val="65"/>
+            <dgm:constr type="primFontSz" refType="secFontSz"/>
+            <dgm:constr type="h"/>
+            <dgm:constr type="lMarg" refType="primFontSz" fact="0.42"/>
+            <dgm:constr type="tMarg" refType="primFontSz" fact="0.42"/>
+            <dgm:constr type="bMarg" refType="primFontSz" fact="0.63"/>
+          </dgm:constrLst>
+          <dgm:ruleLst>
+            <dgm:rule type="h" val="INF" fact="NaN" max="NaN"/>
+          </dgm:ruleLst>
+        </dgm:layoutNode>
+      </dgm:layoutNode>
+      <dgm:forEach name="Name5" axis="followSib" ptType="sibTrans" cnt="1">
+        <dgm:layoutNode name="space">
+          <dgm:alg type="sp"/>
+          <dgm:shape xmlns:r="http://schemas.openxmlformats.org/officeDocument/2006/relationships" r:blip="">
+            <dgm:adjLst/>
+          </dgm:shape>
+          <dgm:presOf/>
+          <dgm:constrLst/>
+          <dgm:ruleLst/>
+        </dgm:layoutNode>
+      </dgm:forEach>
+    </dgm:forEach>
+  </dgm:layoutNode>
+</dgm:layoutDef>
+</file>
+
+<file path=ppt/diagrams/layout3.xml><?xml version="1.0" encoding="utf-8"?>
 <dgm:layoutDef xmlns:dgm="http://schemas.openxmlformats.org/drawingml/2006/diagram" xmlns:a="http://schemas.openxmlformats.org/drawingml/2006/main" uniqueId="urn:microsoft.com/office/officeart/2005/8/layout/hList6">
   <dgm:title val=""/>
   <dgm:desc val=""/>
@@ -7688,7 +11791,7 @@
 </dgm:layoutDef>
 </file>
 
-<file path=ppt/diagrams/layout2.xml><?xml version="1.0" encoding="utf-8"?>
+<file path=ppt/diagrams/layout4.xml><?xml version="1.0" encoding="utf-8"?>
 <dgm:layoutDef xmlns:dgm="http://schemas.openxmlformats.org/drawingml/2006/diagram" xmlns:a="http://schemas.openxmlformats.org/drawingml/2006/main" uniqueId="urn:microsoft.com/office/officeart/2011/layout/TabList">
   <dgm:title val="Tab List"/>
   <dgm:desc val="Use to show non-sequential or grouped blocks of information. Works well for lists with a small amount of Level 1 text. The first Level 2 displays next to the Level 1 text  and the remaining Level 2 text appears beneath the Level 1 text."/>
@@ -7996,7 +12099,7 @@
 </dgm:layoutDef>
 </file>
 
-<file path=ppt/diagrams/layout3.xml><?xml version="1.0" encoding="utf-8"?>
+<file path=ppt/diagrams/layout5.xml><?xml version="1.0" encoding="utf-8"?>
 <dgm:layoutDef xmlns:dgm="http://schemas.openxmlformats.org/drawingml/2006/diagram" xmlns:a="http://schemas.openxmlformats.org/drawingml/2006/main" uniqueId="urn:microsoft.com/office/officeart/2008/layout/SquareAccentList">
   <dgm:title val=""/>
   <dgm:desc val=""/>
@@ -8384,7 +12487,7 @@
 </dgm:layoutDef>
 </file>
 
-<file path=ppt/diagrams/layout4.xml><?xml version="1.0" encoding="utf-8"?>
+<file path=ppt/diagrams/layout6.xml><?xml version="1.0" encoding="utf-8"?>
 <dgm:layoutDef xmlns:dgm="http://schemas.openxmlformats.org/drawingml/2006/diagram" xmlns:a="http://schemas.openxmlformats.org/drawingml/2006/main" uniqueId="urn:microsoft.com/office/officeart/2005/8/layout/default">
   <dgm:title val=""/>
   <dgm:desc val=""/>
@@ -11634,6 +15737,2074 @@
 </file>
 
 <file path=ppt/diagrams/quickStyle4.xml><?xml version="1.0" encoding="utf-8"?>
+<dgm:styleDef xmlns:dgm="http://schemas.openxmlformats.org/drawingml/2006/diagram" xmlns:a="http://schemas.openxmlformats.org/drawingml/2006/main" uniqueId="urn:microsoft.com/office/officeart/2005/8/quickstyle/simple1">
+  <dgm:title val=""/>
+  <dgm:desc val=""/>
+  <dgm:catLst>
+    <dgm:cat type="simple" pri="10100"/>
+  </dgm:catLst>
+  <dgm:scene3d>
+    <a:camera prst="orthographicFront"/>
+    <a:lightRig rig="threePt" dir="t"/>
+  </dgm:scene3d>
+  <dgm:styleLbl name="node0">
+    <dgm:scene3d>
+      <a:camera prst="orthographicFront"/>
+      <a:lightRig rig="threePt" dir="t"/>
+    </dgm:scene3d>
+    <dgm:sp3d/>
+    <dgm:txPr/>
+    <dgm:style>
+      <a:lnRef idx="2">
+        <a:scrgbClr r="0" g="0" b="0"/>
+      </a:lnRef>
+      <a:fillRef idx="1">
+        <a:scrgbClr r="0" g="0" b="0"/>
+      </a:fillRef>
+      <a:effectRef idx="0">
+        <a:scrgbClr r="0" g="0" b="0"/>
+      </a:effectRef>
+      <a:fontRef idx="minor">
+        <a:schemeClr val="lt1"/>
+      </a:fontRef>
+    </dgm:style>
+  </dgm:styleLbl>
+  <dgm:styleLbl name="lnNode1">
+    <dgm:scene3d>
+      <a:camera prst="orthographicFront"/>
+      <a:lightRig rig="threePt" dir="t"/>
+    </dgm:scene3d>
+    <dgm:sp3d/>
+    <dgm:txPr/>
+    <dgm:style>
+      <a:lnRef idx="2">
+        <a:scrgbClr r="0" g="0" b="0"/>
+      </a:lnRef>
+      <a:fillRef idx="1">
+        <a:scrgbClr r="0" g="0" b="0"/>
+      </a:fillRef>
+      <a:effectRef idx="0">
+        <a:scrgbClr r="0" g="0" b="0"/>
+      </a:effectRef>
+      <a:fontRef idx="minor">
+        <a:schemeClr val="lt1"/>
+      </a:fontRef>
+    </dgm:style>
+  </dgm:styleLbl>
+  <dgm:styleLbl name="vennNode1">
+    <dgm:scene3d>
+      <a:camera prst="orthographicFront"/>
+      <a:lightRig rig="threePt" dir="t"/>
+    </dgm:scene3d>
+    <dgm:sp3d/>
+    <dgm:txPr/>
+    <dgm:style>
+      <a:lnRef idx="2">
+        <a:scrgbClr r="0" g="0" b="0"/>
+      </a:lnRef>
+      <a:fillRef idx="1">
+        <a:scrgbClr r="0" g="0" b="0"/>
+      </a:fillRef>
+      <a:effectRef idx="0">
+        <a:scrgbClr r="0" g="0" b="0"/>
+      </a:effectRef>
+      <a:fontRef idx="minor">
+        <a:schemeClr val="tx1"/>
+      </a:fontRef>
+    </dgm:style>
+  </dgm:styleLbl>
+  <dgm:styleLbl name="alignNode1">
+    <dgm:scene3d>
+      <a:camera prst="orthographicFront"/>
+      <a:lightRig rig="threePt" dir="t"/>
+    </dgm:scene3d>
+    <dgm:sp3d/>
+    <dgm:txPr/>
+    <dgm:style>
+      <a:lnRef idx="2">
+        <a:scrgbClr r="0" g="0" b="0"/>
+      </a:lnRef>
+      <a:fillRef idx="1">
+        <a:scrgbClr r="0" g="0" b="0"/>
+      </a:fillRef>
+      <a:effectRef idx="0">
+        <a:scrgbClr r="0" g="0" b="0"/>
+      </a:effectRef>
+      <a:fontRef idx="minor">
+        <a:schemeClr val="lt1"/>
+      </a:fontRef>
+    </dgm:style>
+  </dgm:styleLbl>
+  <dgm:styleLbl name="node1">
+    <dgm:scene3d>
+      <a:camera prst="orthographicFront"/>
+      <a:lightRig rig="threePt" dir="t"/>
+    </dgm:scene3d>
+    <dgm:sp3d/>
+    <dgm:txPr/>
+    <dgm:style>
+      <a:lnRef idx="2">
+        <a:scrgbClr r="0" g="0" b="0"/>
+      </a:lnRef>
+      <a:fillRef idx="1">
+        <a:scrgbClr r="0" g="0" b="0"/>
+      </a:fillRef>
+      <a:effectRef idx="0">
+        <a:scrgbClr r="0" g="0" b="0"/>
+      </a:effectRef>
+      <a:fontRef idx="minor">
+        <a:schemeClr val="lt1"/>
+      </a:fontRef>
+    </dgm:style>
+  </dgm:styleLbl>
+  <dgm:styleLbl name="node2">
+    <dgm:scene3d>
+      <a:camera prst="orthographicFront"/>
+      <a:lightRig rig="threePt" dir="t"/>
+    </dgm:scene3d>
+    <dgm:sp3d/>
+    <dgm:txPr/>
+    <dgm:style>
+      <a:lnRef idx="2">
+        <a:scrgbClr r="0" g="0" b="0"/>
+      </a:lnRef>
+      <a:fillRef idx="1">
+        <a:scrgbClr r="0" g="0" b="0"/>
+      </a:fillRef>
+      <a:effectRef idx="0">
+        <a:scrgbClr r="0" g="0" b="0"/>
+      </a:effectRef>
+      <a:fontRef idx="minor">
+        <a:schemeClr val="lt1"/>
+      </a:fontRef>
+    </dgm:style>
+  </dgm:styleLbl>
+  <dgm:styleLbl name="node3">
+    <dgm:scene3d>
+      <a:camera prst="orthographicFront"/>
+      <a:lightRig rig="threePt" dir="t"/>
+    </dgm:scene3d>
+    <dgm:sp3d/>
+    <dgm:txPr/>
+    <dgm:style>
+      <a:lnRef idx="2">
+        <a:scrgbClr r="0" g="0" b="0"/>
+      </a:lnRef>
+      <a:fillRef idx="1">
+        <a:scrgbClr r="0" g="0" b="0"/>
+      </a:fillRef>
+      <a:effectRef idx="0">
+        <a:scrgbClr r="0" g="0" b="0"/>
+      </a:effectRef>
+      <a:fontRef idx="minor">
+        <a:schemeClr val="lt1"/>
+      </a:fontRef>
+    </dgm:style>
+  </dgm:styleLbl>
+  <dgm:styleLbl name="node4">
+    <dgm:scene3d>
+      <a:camera prst="orthographicFront"/>
+      <a:lightRig rig="threePt" dir="t"/>
+    </dgm:scene3d>
+    <dgm:sp3d/>
+    <dgm:txPr/>
+    <dgm:style>
+      <a:lnRef idx="2">
+        <a:scrgbClr r="0" g="0" b="0"/>
+      </a:lnRef>
+      <a:fillRef idx="1">
+        <a:scrgbClr r="0" g="0" b="0"/>
+      </a:fillRef>
+      <a:effectRef idx="0">
+        <a:scrgbClr r="0" g="0" b="0"/>
+      </a:effectRef>
+      <a:fontRef idx="minor">
+        <a:schemeClr val="lt1"/>
+      </a:fontRef>
+    </dgm:style>
+  </dgm:styleLbl>
+  <dgm:styleLbl name="fgImgPlace1">
+    <dgm:scene3d>
+      <a:camera prst="orthographicFront"/>
+      <a:lightRig rig="threePt" dir="t"/>
+    </dgm:scene3d>
+    <dgm:sp3d/>
+    <dgm:txPr/>
+    <dgm:style>
+      <a:lnRef idx="2">
+        <a:scrgbClr r="0" g="0" b="0"/>
+      </a:lnRef>
+      <a:fillRef idx="1">
+        <a:scrgbClr r="0" g="0" b="0"/>
+      </a:fillRef>
+      <a:effectRef idx="0">
+        <a:scrgbClr r="0" g="0" b="0"/>
+      </a:effectRef>
+      <a:fontRef idx="minor"/>
+    </dgm:style>
+  </dgm:styleLbl>
+  <dgm:styleLbl name="alignImgPlace1">
+    <dgm:scene3d>
+      <a:camera prst="orthographicFront"/>
+      <a:lightRig rig="threePt" dir="t"/>
+    </dgm:scene3d>
+    <dgm:sp3d/>
+    <dgm:txPr/>
+    <dgm:style>
+      <a:lnRef idx="2">
+        <a:scrgbClr r="0" g="0" b="0"/>
+      </a:lnRef>
+      <a:fillRef idx="1">
+        <a:scrgbClr r="0" g="0" b="0"/>
+      </a:fillRef>
+      <a:effectRef idx="0">
+        <a:scrgbClr r="0" g="0" b="0"/>
+      </a:effectRef>
+      <a:fontRef idx="minor"/>
+    </dgm:style>
+  </dgm:styleLbl>
+  <dgm:styleLbl name="bgImgPlace1">
+    <dgm:scene3d>
+      <a:camera prst="orthographicFront"/>
+      <a:lightRig rig="threePt" dir="t"/>
+    </dgm:scene3d>
+    <dgm:sp3d/>
+    <dgm:txPr/>
+    <dgm:style>
+      <a:lnRef idx="2">
+        <a:scrgbClr r="0" g="0" b="0"/>
+      </a:lnRef>
+      <a:fillRef idx="1">
+        <a:scrgbClr r="0" g="0" b="0"/>
+      </a:fillRef>
+      <a:effectRef idx="0">
+        <a:scrgbClr r="0" g="0" b="0"/>
+      </a:effectRef>
+      <a:fontRef idx="minor"/>
+    </dgm:style>
+  </dgm:styleLbl>
+  <dgm:styleLbl name="sibTrans2D1">
+    <dgm:scene3d>
+      <a:camera prst="orthographicFront"/>
+      <a:lightRig rig="threePt" dir="t"/>
+    </dgm:scene3d>
+    <dgm:sp3d/>
+    <dgm:txPr/>
+    <dgm:style>
+      <a:lnRef idx="0">
+        <a:scrgbClr r="0" g="0" b="0"/>
+      </a:lnRef>
+      <a:fillRef idx="1">
+        <a:scrgbClr r="0" g="0" b="0"/>
+      </a:fillRef>
+      <a:effectRef idx="0">
+        <a:scrgbClr r="0" g="0" b="0"/>
+      </a:effectRef>
+      <a:fontRef idx="minor">
+        <a:schemeClr val="lt1"/>
+      </a:fontRef>
+    </dgm:style>
+  </dgm:styleLbl>
+  <dgm:styleLbl name="fgSibTrans2D1">
+    <dgm:scene3d>
+      <a:camera prst="orthographicFront"/>
+      <a:lightRig rig="threePt" dir="t"/>
+    </dgm:scene3d>
+    <dgm:sp3d/>
+    <dgm:txPr/>
+    <dgm:style>
+      <a:lnRef idx="0">
+        <a:scrgbClr r="0" g="0" b="0"/>
+      </a:lnRef>
+      <a:fillRef idx="1">
+        <a:scrgbClr r="0" g="0" b="0"/>
+      </a:fillRef>
+      <a:effectRef idx="0">
+        <a:scrgbClr r="0" g="0" b="0"/>
+      </a:effectRef>
+      <a:fontRef idx="minor">
+        <a:schemeClr val="lt1"/>
+      </a:fontRef>
+    </dgm:style>
+  </dgm:styleLbl>
+  <dgm:styleLbl name="bgSibTrans2D1">
+    <dgm:scene3d>
+      <a:camera prst="orthographicFront"/>
+      <a:lightRig rig="threePt" dir="t"/>
+    </dgm:scene3d>
+    <dgm:sp3d/>
+    <dgm:txPr/>
+    <dgm:style>
+      <a:lnRef idx="0">
+        <a:scrgbClr r="0" g="0" b="0"/>
+      </a:lnRef>
+      <a:fillRef idx="1">
+        <a:scrgbClr r="0" g="0" b="0"/>
+      </a:fillRef>
+      <a:effectRef idx="0">
+        <a:scrgbClr r="0" g="0" b="0"/>
+      </a:effectRef>
+      <a:fontRef idx="minor">
+        <a:schemeClr val="lt1"/>
+      </a:fontRef>
+    </dgm:style>
+  </dgm:styleLbl>
+  <dgm:styleLbl name="sibTrans1D1">
+    <dgm:scene3d>
+      <a:camera prst="orthographicFront"/>
+      <a:lightRig rig="threePt" dir="t"/>
+    </dgm:scene3d>
+    <dgm:sp3d/>
+    <dgm:txPr/>
+    <dgm:style>
+      <a:lnRef idx="1">
+        <a:scrgbClr r="0" g="0" b="0"/>
+      </a:lnRef>
+      <a:fillRef idx="0">
+        <a:scrgbClr r="0" g="0" b="0"/>
+      </a:fillRef>
+      <a:effectRef idx="0">
+        <a:scrgbClr r="0" g="0" b="0"/>
+      </a:effectRef>
+      <a:fontRef idx="minor"/>
+    </dgm:style>
+  </dgm:styleLbl>
+  <dgm:styleLbl name="callout">
+    <dgm:scene3d>
+      <a:camera prst="orthographicFront"/>
+      <a:lightRig rig="threePt" dir="t"/>
+    </dgm:scene3d>
+    <dgm:sp3d/>
+    <dgm:txPr/>
+    <dgm:style>
+      <a:lnRef idx="2">
+        <a:scrgbClr r="0" g="0" b="0"/>
+      </a:lnRef>
+      <a:fillRef idx="1">
+        <a:scrgbClr r="0" g="0" b="0"/>
+      </a:fillRef>
+      <a:effectRef idx="0">
+        <a:scrgbClr r="0" g="0" b="0"/>
+      </a:effectRef>
+      <a:fontRef idx="minor"/>
+    </dgm:style>
+  </dgm:styleLbl>
+  <dgm:styleLbl name="asst0">
+    <dgm:scene3d>
+      <a:camera prst="orthographicFront"/>
+      <a:lightRig rig="threePt" dir="t"/>
+    </dgm:scene3d>
+    <dgm:sp3d/>
+    <dgm:txPr/>
+    <dgm:style>
+      <a:lnRef idx="2">
+        <a:scrgbClr r="0" g="0" b="0"/>
+      </a:lnRef>
+      <a:fillRef idx="1">
+        <a:scrgbClr r="0" g="0" b="0"/>
+      </a:fillRef>
+      <a:effectRef idx="0">
+        <a:scrgbClr r="0" g="0" b="0"/>
+      </a:effectRef>
+      <a:fontRef idx="minor">
+        <a:schemeClr val="lt1"/>
+      </a:fontRef>
+    </dgm:style>
+  </dgm:styleLbl>
+  <dgm:styleLbl name="asst1">
+    <dgm:scene3d>
+      <a:camera prst="orthographicFront"/>
+      <a:lightRig rig="threePt" dir="t"/>
+    </dgm:scene3d>
+    <dgm:sp3d/>
+    <dgm:txPr/>
+    <dgm:style>
+      <a:lnRef idx="2">
+        <a:scrgbClr r="0" g="0" b="0"/>
+      </a:lnRef>
+      <a:fillRef idx="1">
+        <a:scrgbClr r="0" g="0" b="0"/>
+      </a:fillRef>
+      <a:effectRef idx="0">
+        <a:scrgbClr r="0" g="0" b="0"/>
+      </a:effectRef>
+      <a:fontRef idx="minor">
+        <a:schemeClr val="lt1"/>
+      </a:fontRef>
+    </dgm:style>
+  </dgm:styleLbl>
+  <dgm:styleLbl name="asst2">
+    <dgm:scene3d>
+      <a:camera prst="orthographicFront"/>
+      <a:lightRig rig="threePt" dir="t"/>
+    </dgm:scene3d>
+    <dgm:sp3d/>
+    <dgm:txPr/>
+    <dgm:style>
+      <a:lnRef idx="2">
+        <a:scrgbClr r="0" g="0" b="0"/>
+      </a:lnRef>
+      <a:fillRef idx="1">
+        <a:scrgbClr r="0" g="0" b="0"/>
+      </a:fillRef>
+      <a:effectRef idx="0">
+        <a:scrgbClr r="0" g="0" b="0"/>
+      </a:effectRef>
+      <a:fontRef idx="minor">
+        <a:schemeClr val="lt1"/>
+      </a:fontRef>
+    </dgm:style>
+  </dgm:styleLbl>
+  <dgm:styleLbl name="asst3">
+    <dgm:scene3d>
+      <a:camera prst="orthographicFront"/>
+      <a:lightRig rig="threePt" dir="t"/>
+    </dgm:scene3d>
+    <dgm:sp3d/>
+    <dgm:txPr/>
+    <dgm:style>
+      <a:lnRef idx="2">
+        <a:scrgbClr r="0" g="0" b="0"/>
+      </a:lnRef>
+      <a:fillRef idx="1">
+        <a:scrgbClr r="0" g="0" b="0"/>
+      </a:fillRef>
+      <a:effectRef idx="0">
+        <a:scrgbClr r="0" g="0" b="0"/>
+      </a:effectRef>
+      <a:fontRef idx="minor">
+        <a:schemeClr val="lt1"/>
+      </a:fontRef>
+    </dgm:style>
+  </dgm:styleLbl>
+  <dgm:styleLbl name="asst4">
+    <dgm:scene3d>
+      <a:camera prst="orthographicFront"/>
+      <a:lightRig rig="threePt" dir="t"/>
+    </dgm:scene3d>
+    <dgm:sp3d/>
+    <dgm:txPr/>
+    <dgm:style>
+      <a:lnRef idx="2">
+        <a:scrgbClr r="0" g="0" b="0"/>
+      </a:lnRef>
+      <a:fillRef idx="1">
+        <a:scrgbClr r="0" g="0" b="0"/>
+      </a:fillRef>
+      <a:effectRef idx="0">
+        <a:scrgbClr r="0" g="0" b="0"/>
+      </a:effectRef>
+      <a:fontRef idx="minor">
+        <a:schemeClr val="lt1"/>
+      </a:fontRef>
+    </dgm:style>
+  </dgm:styleLbl>
+  <dgm:styleLbl name="parChTrans2D1">
+    <dgm:scene3d>
+      <a:camera prst="orthographicFront"/>
+      <a:lightRig rig="threePt" dir="t"/>
+    </dgm:scene3d>
+    <dgm:sp3d/>
+    <dgm:txPr/>
+    <dgm:style>
+      <a:lnRef idx="2">
+        <a:scrgbClr r="0" g="0" b="0"/>
+      </a:lnRef>
+      <a:fillRef idx="1">
+        <a:scrgbClr r="0" g="0" b="0"/>
+      </a:fillRef>
+      <a:effectRef idx="0">
+        <a:scrgbClr r="0" g="0" b="0"/>
+      </a:effectRef>
+      <a:fontRef idx="minor">
+        <a:schemeClr val="lt1"/>
+      </a:fontRef>
+    </dgm:style>
+  </dgm:styleLbl>
+  <dgm:styleLbl name="parChTrans2D2">
+    <dgm:scene3d>
+      <a:camera prst="orthographicFront"/>
+      <a:lightRig rig="threePt" dir="t"/>
+    </dgm:scene3d>
+    <dgm:sp3d/>
+    <dgm:txPr/>
+    <dgm:style>
+      <a:lnRef idx="2">
+        <a:scrgbClr r="0" g="0" b="0"/>
+      </a:lnRef>
+      <a:fillRef idx="1">
+        <a:scrgbClr r="0" g="0" b="0"/>
+      </a:fillRef>
+      <a:effectRef idx="0">
+        <a:scrgbClr r="0" g="0" b="0"/>
+      </a:effectRef>
+      <a:fontRef idx="minor">
+        <a:schemeClr val="lt1"/>
+      </a:fontRef>
+    </dgm:style>
+  </dgm:styleLbl>
+  <dgm:styleLbl name="parChTrans2D3">
+    <dgm:scene3d>
+      <a:camera prst="orthographicFront"/>
+      <a:lightRig rig="threePt" dir="t"/>
+    </dgm:scene3d>
+    <dgm:sp3d/>
+    <dgm:txPr/>
+    <dgm:style>
+      <a:lnRef idx="2">
+        <a:scrgbClr r="0" g="0" b="0"/>
+      </a:lnRef>
+      <a:fillRef idx="1">
+        <a:scrgbClr r="0" g="0" b="0"/>
+      </a:fillRef>
+      <a:effectRef idx="0">
+        <a:scrgbClr r="0" g="0" b="0"/>
+      </a:effectRef>
+      <a:fontRef idx="minor">
+        <a:schemeClr val="lt1"/>
+      </a:fontRef>
+    </dgm:style>
+  </dgm:styleLbl>
+  <dgm:styleLbl name="parChTrans2D4">
+    <dgm:scene3d>
+      <a:camera prst="orthographicFront"/>
+      <a:lightRig rig="threePt" dir="t"/>
+    </dgm:scene3d>
+    <dgm:sp3d/>
+    <dgm:txPr/>
+    <dgm:style>
+      <a:lnRef idx="2">
+        <a:scrgbClr r="0" g="0" b="0"/>
+      </a:lnRef>
+      <a:fillRef idx="1">
+        <a:scrgbClr r="0" g="0" b="0"/>
+      </a:fillRef>
+      <a:effectRef idx="0">
+        <a:scrgbClr r="0" g="0" b="0"/>
+      </a:effectRef>
+      <a:fontRef idx="minor">
+        <a:schemeClr val="lt1"/>
+      </a:fontRef>
+    </dgm:style>
+  </dgm:styleLbl>
+  <dgm:styleLbl name="parChTrans1D1">
+    <dgm:scene3d>
+      <a:camera prst="orthographicFront"/>
+      <a:lightRig rig="threePt" dir="t"/>
+    </dgm:scene3d>
+    <dgm:sp3d/>
+    <dgm:txPr/>
+    <dgm:style>
+      <a:lnRef idx="2">
+        <a:scrgbClr r="0" g="0" b="0"/>
+      </a:lnRef>
+      <a:fillRef idx="0">
+        <a:scrgbClr r="0" g="0" b="0"/>
+      </a:fillRef>
+      <a:effectRef idx="0">
+        <a:scrgbClr r="0" g="0" b="0"/>
+      </a:effectRef>
+      <a:fontRef idx="minor"/>
+    </dgm:style>
+  </dgm:styleLbl>
+  <dgm:styleLbl name="parChTrans1D2">
+    <dgm:scene3d>
+      <a:camera prst="orthographicFront"/>
+      <a:lightRig rig="threePt" dir="t"/>
+    </dgm:scene3d>
+    <dgm:sp3d/>
+    <dgm:txPr/>
+    <dgm:style>
+      <a:lnRef idx="2">
+        <a:scrgbClr r="0" g="0" b="0"/>
+      </a:lnRef>
+      <a:fillRef idx="0">
+        <a:scrgbClr r="0" g="0" b="0"/>
+      </a:fillRef>
+      <a:effectRef idx="0">
+        <a:scrgbClr r="0" g="0" b="0"/>
+      </a:effectRef>
+      <a:fontRef idx="minor"/>
+    </dgm:style>
+  </dgm:styleLbl>
+  <dgm:styleLbl name="parChTrans1D3">
+    <dgm:scene3d>
+      <a:camera prst="orthographicFront"/>
+      <a:lightRig rig="threePt" dir="t"/>
+    </dgm:scene3d>
+    <dgm:sp3d/>
+    <dgm:txPr/>
+    <dgm:style>
+      <a:lnRef idx="2">
+        <a:scrgbClr r="0" g="0" b="0"/>
+      </a:lnRef>
+      <a:fillRef idx="0">
+        <a:scrgbClr r="0" g="0" b="0"/>
+      </a:fillRef>
+      <a:effectRef idx="0">
+        <a:scrgbClr r="0" g="0" b="0"/>
+      </a:effectRef>
+      <a:fontRef idx="minor"/>
+    </dgm:style>
+  </dgm:styleLbl>
+  <dgm:styleLbl name="parChTrans1D4">
+    <dgm:scene3d>
+      <a:camera prst="orthographicFront"/>
+      <a:lightRig rig="threePt" dir="t"/>
+    </dgm:scene3d>
+    <dgm:sp3d/>
+    <dgm:txPr/>
+    <dgm:style>
+      <a:lnRef idx="2">
+        <a:scrgbClr r="0" g="0" b="0"/>
+      </a:lnRef>
+      <a:fillRef idx="0">
+        <a:scrgbClr r="0" g="0" b="0"/>
+      </a:fillRef>
+      <a:effectRef idx="0">
+        <a:scrgbClr r="0" g="0" b="0"/>
+      </a:effectRef>
+      <a:fontRef idx="minor"/>
+    </dgm:style>
+  </dgm:styleLbl>
+  <dgm:styleLbl name="fgAcc1">
+    <dgm:scene3d>
+      <a:camera prst="orthographicFront"/>
+      <a:lightRig rig="threePt" dir="t"/>
+    </dgm:scene3d>
+    <dgm:sp3d/>
+    <dgm:txPr/>
+    <dgm:style>
+      <a:lnRef idx="2">
+        <a:scrgbClr r="0" g="0" b="0"/>
+      </a:lnRef>
+      <a:fillRef idx="1">
+        <a:scrgbClr r="0" g="0" b="0"/>
+      </a:fillRef>
+      <a:effectRef idx="0">
+        <a:scrgbClr r="0" g="0" b="0"/>
+      </a:effectRef>
+      <a:fontRef idx="minor"/>
+    </dgm:style>
+  </dgm:styleLbl>
+  <dgm:styleLbl name="conFgAcc1">
+    <dgm:scene3d>
+      <a:camera prst="orthographicFront"/>
+      <a:lightRig rig="threePt" dir="t"/>
+    </dgm:scene3d>
+    <dgm:sp3d/>
+    <dgm:txPr/>
+    <dgm:style>
+      <a:lnRef idx="2">
+        <a:scrgbClr r="0" g="0" b="0"/>
+      </a:lnRef>
+      <a:fillRef idx="1">
+        <a:scrgbClr r="0" g="0" b="0"/>
+      </a:fillRef>
+      <a:effectRef idx="0">
+        <a:scrgbClr r="0" g="0" b="0"/>
+      </a:effectRef>
+      <a:fontRef idx="minor"/>
+    </dgm:style>
+  </dgm:styleLbl>
+  <dgm:styleLbl name="alignAcc1">
+    <dgm:scene3d>
+      <a:camera prst="orthographicFront"/>
+      <a:lightRig rig="threePt" dir="t"/>
+    </dgm:scene3d>
+    <dgm:sp3d/>
+    <dgm:txPr/>
+    <dgm:style>
+      <a:lnRef idx="2">
+        <a:scrgbClr r="0" g="0" b="0"/>
+      </a:lnRef>
+      <a:fillRef idx="1">
+        <a:scrgbClr r="0" g="0" b="0"/>
+      </a:fillRef>
+      <a:effectRef idx="0">
+        <a:scrgbClr r="0" g="0" b="0"/>
+      </a:effectRef>
+      <a:fontRef idx="minor"/>
+    </dgm:style>
+  </dgm:styleLbl>
+  <dgm:styleLbl name="trAlignAcc1">
+    <dgm:scene3d>
+      <a:camera prst="orthographicFront"/>
+      <a:lightRig rig="threePt" dir="t"/>
+    </dgm:scene3d>
+    <dgm:sp3d/>
+    <dgm:txPr/>
+    <dgm:style>
+      <a:lnRef idx="1">
+        <a:scrgbClr r="0" g="0" b="0"/>
+      </a:lnRef>
+      <a:fillRef idx="1">
+        <a:scrgbClr r="0" g="0" b="0"/>
+      </a:fillRef>
+      <a:effectRef idx="0">
+        <a:scrgbClr r="0" g="0" b="0"/>
+      </a:effectRef>
+      <a:fontRef idx="minor"/>
+    </dgm:style>
+  </dgm:styleLbl>
+  <dgm:styleLbl name="bgAcc1">
+    <dgm:scene3d>
+      <a:camera prst="orthographicFront"/>
+      <a:lightRig rig="threePt" dir="t"/>
+    </dgm:scene3d>
+    <dgm:sp3d/>
+    <dgm:txPr/>
+    <dgm:style>
+      <a:lnRef idx="2">
+        <a:scrgbClr r="0" g="0" b="0"/>
+      </a:lnRef>
+      <a:fillRef idx="1">
+        <a:scrgbClr r="0" g="0" b="0"/>
+      </a:fillRef>
+      <a:effectRef idx="0">
+        <a:scrgbClr r="0" g="0" b="0"/>
+      </a:effectRef>
+      <a:fontRef idx="minor"/>
+    </dgm:style>
+  </dgm:styleLbl>
+  <dgm:styleLbl name="solidFgAcc1">
+    <dgm:scene3d>
+      <a:camera prst="orthographicFront"/>
+      <a:lightRig rig="threePt" dir="t"/>
+    </dgm:scene3d>
+    <dgm:sp3d/>
+    <dgm:txPr/>
+    <dgm:style>
+      <a:lnRef idx="2">
+        <a:scrgbClr r="0" g="0" b="0"/>
+      </a:lnRef>
+      <a:fillRef idx="1">
+        <a:scrgbClr r="0" g="0" b="0"/>
+      </a:fillRef>
+      <a:effectRef idx="0">
+        <a:scrgbClr r="0" g="0" b="0"/>
+      </a:effectRef>
+      <a:fontRef idx="minor"/>
+    </dgm:style>
+  </dgm:styleLbl>
+  <dgm:styleLbl name="solidAlignAcc1">
+    <dgm:scene3d>
+      <a:camera prst="orthographicFront"/>
+      <a:lightRig rig="threePt" dir="t"/>
+    </dgm:scene3d>
+    <dgm:sp3d/>
+    <dgm:txPr/>
+    <dgm:style>
+      <a:lnRef idx="2">
+        <a:scrgbClr r="0" g="0" b="0"/>
+      </a:lnRef>
+      <a:fillRef idx="1">
+        <a:scrgbClr r="0" g="0" b="0"/>
+      </a:fillRef>
+      <a:effectRef idx="0">
+        <a:scrgbClr r="0" g="0" b="0"/>
+      </a:effectRef>
+      <a:fontRef idx="minor"/>
+    </dgm:style>
+  </dgm:styleLbl>
+  <dgm:styleLbl name="solidBgAcc1">
+    <dgm:scene3d>
+      <a:camera prst="orthographicFront"/>
+      <a:lightRig rig="threePt" dir="t"/>
+    </dgm:scene3d>
+    <dgm:sp3d/>
+    <dgm:txPr/>
+    <dgm:style>
+      <a:lnRef idx="2">
+        <a:scrgbClr r="0" g="0" b="0"/>
+      </a:lnRef>
+      <a:fillRef idx="1">
+        <a:scrgbClr r="0" g="0" b="0"/>
+      </a:fillRef>
+      <a:effectRef idx="0">
+        <a:scrgbClr r="0" g="0" b="0"/>
+      </a:effectRef>
+      <a:fontRef idx="minor"/>
+    </dgm:style>
+  </dgm:styleLbl>
+  <dgm:styleLbl name="fgAccFollowNode1">
+    <dgm:scene3d>
+      <a:camera prst="orthographicFront"/>
+      <a:lightRig rig="threePt" dir="t"/>
+    </dgm:scene3d>
+    <dgm:sp3d/>
+    <dgm:txPr/>
+    <dgm:style>
+      <a:lnRef idx="2">
+        <a:scrgbClr r="0" g="0" b="0"/>
+      </a:lnRef>
+      <a:fillRef idx="1">
+        <a:scrgbClr r="0" g="0" b="0"/>
+      </a:fillRef>
+      <a:effectRef idx="0">
+        <a:scrgbClr r="0" g="0" b="0"/>
+      </a:effectRef>
+      <a:fontRef idx="minor"/>
+    </dgm:style>
+  </dgm:styleLbl>
+  <dgm:styleLbl name="alignAccFollowNode1">
+    <dgm:scene3d>
+      <a:camera prst="orthographicFront"/>
+      <a:lightRig rig="threePt" dir="t"/>
+    </dgm:scene3d>
+    <dgm:sp3d/>
+    <dgm:txPr/>
+    <dgm:style>
+      <a:lnRef idx="2">
+        <a:scrgbClr r="0" g="0" b="0"/>
+      </a:lnRef>
+      <a:fillRef idx="1">
+        <a:scrgbClr r="0" g="0" b="0"/>
+      </a:fillRef>
+      <a:effectRef idx="0">
+        <a:scrgbClr r="0" g="0" b="0"/>
+      </a:effectRef>
+      <a:fontRef idx="minor"/>
+    </dgm:style>
+  </dgm:styleLbl>
+  <dgm:styleLbl name="bgAccFollowNode1">
+    <dgm:scene3d>
+      <a:camera prst="orthographicFront"/>
+      <a:lightRig rig="threePt" dir="t"/>
+    </dgm:scene3d>
+    <dgm:sp3d/>
+    <dgm:txPr/>
+    <dgm:style>
+      <a:lnRef idx="2">
+        <a:scrgbClr r="0" g="0" b="0"/>
+      </a:lnRef>
+      <a:fillRef idx="1">
+        <a:scrgbClr r="0" g="0" b="0"/>
+      </a:fillRef>
+      <a:effectRef idx="0">
+        <a:scrgbClr r="0" g="0" b="0"/>
+      </a:effectRef>
+      <a:fontRef idx="minor"/>
+    </dgm:style>
+  </dgm:styleLbl>
+  <dgm:styleLbl name="fgAcc0">
+    <dgm:scene3d>
+      <a:camera prst="orthographicFront"/>
+      <a:lightRig rig="threePt" dir="t"/>
+    </dgm:scene3d>
+    <dgm:sp3d/>
+    <dgm:txPr/>
+    <dgm:style>
+      <a:lnRef idx="2">
+        <a:scrgbClr r="0" g="0" b="0"/>
+      </a:lnRef>
+      <a:fillRef idx="1">
+        <a:scrgbClr r="0" g="0" b="0"/>
+      </a:fillRef>
+      <a:effectRef idx="0">
+        <a:scrgbClr r="0" g="0" b="0"/>
+      </a:effectRef>
+      <a:fontRef idx="minor"/>
+    </dgm:style>
+  </dgm:styleLbl>
+  <dgm:styleLbl name="fgAcc2">
+    <dgm:scene3d>
+      <a:camera prst="orthographicFront"/>
+      <a:lightRig rig="threePt" dir="t"/>
+    </dgm:scene3d>
+    <dgm:sp3d/>
+    <dgm:txPr/>
+    <dgm:style>
+      <a:lnRef idx="2">
+        <a:scrgbClr r="0" g="0" b="0"/>
+      </a:lnRef>
+      <a:fillRef idx="1">
+        <a:scrgbClr r="0" g="0" b="0"/>
+      </a:fillRef>
+      <a:effectRef idx="0">
+        <a:scrgbClr r="0" g="0" b="0"/>
+      </a:effectRef>
+      <a:fontRef idx="minor"/>
+    </dgm:style>
+  </dgm:styleLbl>
+  <dgm:styleLbl name="fgAcc3">
+    <dgm:scene3d>
+      <a:camera prst="orthographicFront"/>
+      <a:lightRig rig="threePt" dir="t"/>
+    </dgm:scene3d>
+    <dgm:sp3d/>
+    <dgm:txPr/>
+    <dgm:style>
+      <a:lnRef idx="2">
+        <a:scrgbClr r="0" g="0" b="0"/>
+      </a:lnRef>
+      <a:fillRef idx="1">
+        <a:scrgbClr r="0" g="0" b="0"/>
+      </a:fillRef>
+      <a:effectRef idx="0">
+        <a:scrgbClr r="0" g="0" b="0"/>
+      </a:effectRef>
+      <a:fontRef idx="minor"/>
+    </dgm:style>
+  </dgm:styleLbl>
+  <dgm:styleLbl name="fgAcc4">
+    <dgm:scene3d>
+      <a:camera prst="orthographicFront"/>
+      <a:lightRig rig="threePt" dir="t"/>
+    </dgm:scene3d>
+    <dgm:sp3d/>
+    <dgm:txPr/>
+    <dgm:style>
+      <a:lnRef idx="2">
+        <a:scrgbClr r="0" g="0" b="0"/>
+      </a:lnRef>
+      <a:fillRef idx="1">
+        <a:scrgbClr r="0" g="0" b="0"/>
+      </a:fillRef>
+      <a:effectRef idx="0">
+        <a:scrgbClr r="0" g="0" b="0"/>
+      </a:effectRef>
+      <a:fontRef idx="minor"/>
+    </dgm:style>
+  </dgm:styleLbl>
+  <dgm:styleLbl name="bgShp">
+    <dgm:scene3d>
+      <a:camera prst="orthographicFront"/>
+      <a:lightRig rig="threePt" dir="t"/>
+    </dgm:scene3d>
+    <dgm:sp3d/>
+    <dgm:txPr/>
+    <dgm:style>
+      <a:lnRef idx="0">
+        <a:scrgbClr r="0" g="0" b="0"/>
+      </a:lnRef>
+      <a:fillRef idx="1">
+        <a:scrgbClr r="0" g="0" b="0"/>
+      </a:fillRef>
+      <a:effectRef idx="0">
+        <a:scrgbClr r="0" g="0" b="0"/>
+      </a:effectRef>
+      <a:fontRef idx="minor"/>
+    </dgm:style>
+  </dgm:styleLbl>
+  <dgm:styleLbl name="dkBgShp">
+    <dgm:scene3d>
+      <a:camera prst="orthographicFront"/>
+      <a:lightRig rig="threePt" dir="t"/>
+    </dgm:scene3d>
+    <dgm:sp3d/>
+    <dgm:txPr/>
+    <dgm:style>
+      <a:lnRef idx="0">
+        <a:scrgbClr r="0" g="0" b="0"/>
+      </a:lnRef>
+      <a:fillRef idx="1">
+        <a:scrgbClr r="0" g="0" b="0"/>
+      </a:fillRef>
+      <a:effectRef idx="0">
+        <a:scrgbClr r="0" g="0" b="0"/>
+      </a:effectRef>
+      <a:fontRef idx="minor"/>
+    </dgm:style>
+  </dgm:styleLbl>
+  <dgm:styleLbl name="trBgShp">
+    <dgm:scene3d>
+      <a:camera prst="orthographicFront"/>
+      <a:lightRig rig="threePt" dir="t"/>
+    </dgm:scene3d>
+    <dgm:sp3d/>
+    <dgm:txPr/>
+    <dgm:style>
+      <a:lnRef idx="0">
+        <a:scrgbClr r="0" g="0" b="0"/>
+      </a:lnRef>
+      <a:fillRef idx="1">
+        <a:scrgbClr r="0" g="0" b="0"/>
+      </a:fillRef>
+      <a:effectRef idx="0">
+        <a:scrgbClr r="0" g="0" b="0"/>
+      </a:effectRef>
+      <a:fontRef idx="minor"/>
+    </dgm:style>
+  </dgm:styleLbl>
+  <dgm:styleLbl name="fgShp">
+    <dgm:scene3d>
+      <a:camera prst="orthographicFront"/>
+      <a:lightRig rig="threePt" dir="t"/>
+    </dgm:scene3d>
+    <dgm:sp3d/>
+    <dgm:txPr/>
+    <dgm:style>
+      <a:lnRef idx="2">
+        <a:scrgbClr r="0" g="0" b="0"/>
+      </a:lnRef>
+      <a:fillRef idx="1">
+        <a:scrgbClr r="0" g="0" b="0"/>
+      </a:fillRef>
+      <a:effectRef idx="0">
+        <a:scrgbClr r="0" g="0" b="0"/>
+      </a:effectRef>
+      <a:fontRef idx="minor"/>
+    </dgm:style>
+  </dgm:styleLbl>
+  <dgm:styleLbl name="revTx">
+    <dgm:scene3d>
+      <a:camera prst="orthographicFront"/>
+      <a:lightRig rig="threePt" dir="t"/>
+    </dgm:scene3d>
+    <dgm:sp3d/>
+    <dgm:txPr/>
+    <dgm:style>
+      <a:lnRef idx="0">
+        <a:scrgbClr r="0" g="0" b="0"/>
+      </a:lnRef>
+      <a:fillRef idx="0">
+        <a:scrgbClr r="0" g="0" b="0"/>
+      </a:fillRef>
+      <a:effectRef idx="0">
+        <a:scrgbClr r="0" g="0" b="0"/>
+      </a:effectRef>
+      <a:fontRef idx="minor"/>
+    </dgm:style>
+  </dgm:styleLbl>
+</dgm:styleDef>
+</file>
+
+<file path=ppt/diagrams/quickStyle5.xml><?xml version="1.0" encoding="utf-8"?>
+<dgm:styleDef xmlns:dgm="http://schemas.openxmlformats.org/drawingml/2006/diagram" xmlns:a="http://schemas.openxmlformats.org/drawingml/2006/main" uniqueId="urn:microsoft.com/office/officeart/2005/8/quickstyle/simple1">
+  <dgm:title val=""/>
+  <dgm:desc val=""/>
+  <dgm:catLst>
+    <dgm:cat type="simple" pri="10100"/>
+  </dgm:catLst>
+  <dgm:scene3d>
+    <a:camera prst="orthographicFront"/>
+    <a:lightRig rig="threePt" dir="t"/>
+  </dgm:scene3d>
+  <dgm:styleLbl name="node0">
+    <dgm:scene3d>
+      <a:camera prst="orthographicFront"/>
+      <a:lightRig rig="threePt" dir="t"/>
+    </dgm:scene3d>
+    <dgm:sp3d/>
+    <dgm:txPr/>
+    <dgm:style>
+      <a:lnRef idx="2">
+        <a:scrgbClr r="0" g="0" b="0"/>
+      </a:lnRef>
+      <a:fillRef idx="1">
+        <a:scrgbClr r="0" g="0" b="0"/>
+      </a:fillRef>
+      <a:effectRef idx="0">
+        <a:scrgbClr r="0" g="0" b="0"/>
+      </a:effectRef>
+      <a:fontRef idx="minor">
+        <a:schemeClr val="lt1"/>
+      </a:fontRef>
+    </dgm:style>
+  </dgm:styleLbl>
+  <dgm:styleLbl name="lnNode1">
+    <dgm:scene3d>
+      <a:camera prst="orthographicFront"/>
+      <a:lightRig rig="threePt" dir="t"/>
+    </dgm:scene3d>
+    <dgm:sp3d/>
+    <dgm:txPr/>
+    <dgm:style>
+      <a:lnRef idx="2">
+        <a:scrgbClr r="0" g="0" b="0"/>
+      </a:lnRef>
+      <a:fillRef idx="1">
+        <a:scrgbClr r="0" g="0" b="0"/>
+      </a:fillRef>
+      <a:effectRef idx="0">
+        <a:scrgbClr r="0" g="0" b="0"/>
+      </a:effectRef>
+      <a:fontRef idx="minor">
+        <a:schemeClr val="lt1"/>
+      </a:fontRef>
+    </dgm:style>
+  </dgm:styleLbl>
+  <dgm:styleLbl name="vennNode1">
+    <dgm:scene3d>
+      <a:camera prst="orthographicFront"/>
+      <a:lightRig rig="threePt" dir="t"/>
+    </dgm:scene3d>
+    <dgm:sp3d/>
+    <dgm:txPr/>
+    <dgm:style>
+      <a:lnRef idx="2">
+        <a:scrgbClr r="0" g="0" b="0"/>
+      </a:lnRef>
+      <a:fillRef idx="1">
+        <a:scrgbClr r="0" g="0" b="0"/>
+      </a:fillRef>
+      <a:effectRef idx="0">
+        <a:scrgbClr r="0" g="0" b="0"/>
+      </a:effectRef>
+      <a:fontRef idx="minor">
+        <a:schemeClr val="tx1"/>
+      </a:fontRef>
+    </dgm:style>
+  </dgm:styleLbl>
+  <dgm:styleLbl name="alignNode1">
+    <dgm:scene3d>
+      <a:camera prst="orthographicFront"/>
+      <a:lightRig rig="threePt" dir="t"/>
+    </dgm:scene3d>
+    <dgm:sp3d/>
+    <dgm:txPr/>
+    <dgm:style>
+      <a:lnRef idx="2">
+        <a:scrgbClr r="0" g="0" b="0"/>
+      </a:lnRef>
+      <a:fillRef idx="1">
+        <a:scrgbClr r="0" g="0" b="0"/>
+      </a:fillRef>
+      <a:effectRef idx="0">
+        <a:scrgbClr r="0" g="0" b="0"/>
+      </a:effectRef>
+      <a:fontRef idx="minor">
+        <a:schemeClr val="lt1"/>
+      </a:fontRef>
+    </dgm:style>
+  </dgm:styleLbl>
+  <dgm:styleLbl name="node1">
+    <dgm:scene3d>
+      <a:camera prst="orthographicFront"/>
+      <a:lightRig rig="threePt" dir="t"/>
+    </dgm:scene3d>
+    <dgm:sp3d/>
+    <dgm:txPr/>
+    <dgm:style>
+      <a:lnRef idx="2">
+        <a:scrgbClr r="0" g="0" b="0"/>
+      </a:lnRef>
+      <a:fillRef idx="1">
+        <a:scrgbClr r="0" g="0" b="0"/>
+      </a:fillRef>
+      <a:effectRef idx="0">
+        <a:scrgbClr r="0" g="0" b="0"/>
+      </a:effectRef>
+      <a:fontRef idx="minor">
+        <a:schemeClr val="lt1"/>
+      </a:fontRef>
+    </dgm:style>
+  </dgm:styleLbl>
+  <dgm:styleLbl name="node2">
+    <dgm:scene3d>
+      <a:camera prst="orthographicFront"/>
+      <a:lightRig rig="threePt" dir="t"/>
+    </dgm:scene3d>
+    <dgm:sp3d/>
+    <dgm:txPr/>
+    <dgm:style>
+      <a:lnRef idx="2">
+        <a:scrgbClr r="0" g="0" b="0"/>
+      </a:lnRef>
+      <a:fillRef idx="1">
+        <a:scrgbClr r="0" g="0" b="0"/>
+      </a:fillRef>
+      <a:effectRef idx="0">
+        <a:scrgbClr r="0" g="0" b="0"/>
+      </a:effectRef>
+      <a:fontRef idx="minor">
+        <a:schemeClr val="lt1"/>
+      </a:fontRef>
+    </dgm:style>
+  </dgm:styleLbl>
+  <dgm:styleLbl name="node3">
+    <dgm:scene3d>
+      <a:camera prst="orthographicFront"/>
+      <a:lightRig rig="threePt" dir="t"/>
+    </dgm:scene3d>
+    <dgm:sp3d/>
+    <dgm:txPr/>
+    <dgm:style>
+      <a:lnRef idx="2">
+        <a:scrgbClr r="0" g="0" b="0"/>
+      </a:lnRef>
+      <a:fillRef idx="1">
+        <a:scrgbClr r="0" g="0" b="0"/>
+      </a:fillRef>
+      <a:effectRef idx="0">
+        <a:scrgbClr r="0" g="0" b="0"/>
+      </a:effectRef>
+      <a:fontRef idx="minor">
+        <a:schemeClr val="lt1"/>
+      </a:fontRef>
+    </dgm:style>
+  </dgm:styleLbl>
+  <dgm:styleLbl name="node4">
+    <dgm:scene3d>
+      <a:camera prst="orthographicFront"/>
+      <a:lightRig rig="threePt" dir="t"/>
+    </dgm:scene3d>
+    <dgm:sp3d/>
+    <dgm:txPr/>
+    <dgm:style>
+      <a:lnRef idx="2">
+        <a:scrgbClr r="0" g="0" b="0"/>
+      </a:lnRef>
+      <a:fillRef idx="1">
+        <a:scrgbClr r="0" g="0" b="0"/>
+      </a:fillRef>
+      <a:effectRef idx="0">
+        <a:scrgbClr r="0" g="0" b="0"/>
+      </a:effectRef>
+      <a:fontRef idx="minor">
+        <a:schemeClr val="lt1"/>
+      </a:fontRef>
+    </dgm:style>
+  </dgm:styleLbl>
+  <dgm:styleLbl name="fgImgPlace1">
+    <dgm:scene3d>
+      <a:camera prst="orthographicFront"/>
+      <a:lightRig rig="threePt" dir="t"/>
+    </dgm:scene3d>
+    <dgm:sp3d/>
+    <dgm:txPr/>
+    <dgm:style>
+      <a:lnRef idx="2">
+        <a:scrgbClr r="0" g="0" b="0"/>
+      </a:lnRef>
+      <a:fillRef idx="1">
+        <a:scrgbClr r="0" g="0" b="0"/>
+      </a:fillRef>
+      <a:effectRef idx="0">
+        <a:scrgbClr r="0" g="0" b="0"/>
+      </a:effectRef>
+      <a:fontRef idx="minor"/>
+    </dgm:style>
+  </dgm:styleLbl>
+  <dgm:styleLbl name="alignImgPlace1">
+    <dgm:scene3d>
+      <a:camera prst="orthographicFront"/>
+      <a:lightRig rig="threePt" dir="t"/>
+    </dgm:scene3d>
+    <dgm:sp3d/>
+    <dgm:txPr/>
+    <dgm:style>
+      <a:lnRef idx="2">
+        <a:scrgbClr r="0" g="0" b="0"/>
+      </a:lnRef>
+      <a:fillRef idx="1">
+        <a:scrgbClr r="0" g="0" b="0"/>
+      </a:fillRef>
+      <a:effectRef idx="0">
+        <a:scrgbClr r="0" g="0" b="0"/>
+      </a:effectRef>
+      <a:fontRef idx="minor"/>
+    </dgm:style>
+  </dgm:styleLbl>
+  <dgm:styleLbl name="bgImgPlace1">
+    <dgm:scene3d>
+      <a:camera prst="orthographicFront"/>
+      <a:lightRig rig="threePt" dir="t"/>
+    </dgm:scene3d>
+    <dgm:sp3d/>
+    <dgm:txPr/>
+    <dgm:style>
+      <a:lnRef idx="2">
+        <a:scrgbClr r="0" g="0" b="0"/>
+      </a:lnRef>
+      <a:fillRef idx="1">
+        <a:scrgbClr r="0" g="0" b="0"/>
+      </a:fillRef>
+      <a:effectRef idx="0">
+        <a:scrgbClr r="0" g="0" b="0"/>
+      </a:effectRef>
+      <a:fontRef idx="minor"/>
+    </dgm:style>
+  </dgm:styleLbl>
+  <dgm:styleLbl name="sibTrans2D1">
+    <dgm:scene3d>
+      <a:camera prst="orthographicFront"/>
+      <a:lightRig rig="threePt" dir="t"/>
+    </dgm:scene3d>
+    <dgm:sp3d/>
+    <dgm:txPr/>
+    <dgm:style>
+      <a:lnRef idx="0">
+        <a:scrgbClr r="0" g="0" b="0"/>
+      </a:lnRef>
+      <a:fillRef idx="1">
+        <a:scrgbClr r="0" g="0" b="0"/>
+      </a:fillRef>
+      <a:effectRef idx="0">
+        <a:scrgbClr r="0" g="0" b="0"/>
+      </a:effectRef>
+      <a:fontRef idx="minor">
+        <a:schemeClr val="lt1"/>
+      </a:fontRef>
+    </dgm:style>
+  </dgm:styleLbl>
+  <dgm:styleLbl name="fgSibTrans2D1">
+    <dgm:scene3d>
+      <a:camera prst="orthographicFront"/>
+      <a:lightRig rig="threePt" dir="t"/>
+    </dgm:scene3d>
+    <dgm:sp3d/>
+    <dgm:txPr/>
+    <dgm:style>
+      <a:lnRef idx="0">
+        <a:scrgbClr r="0" g="0" b="0"/>
+      </a:lnRef>
+      <a:fillRef idx="1">
+        <a:scrgbClr r="0" g="0" b="0"/>
+      </a:fillRef>
+      <a:effectRef idx="0">
+        <a:scrgbClr r="0" g="0" b="0"/>
+      </a:effectRef>
+      <a:fontRef idx="minor">
+        <a:schemeClr val="lt1"/>
+      </a:fontRef>
+    </dgm:style>
+  </dgm:styleLbl>
+  <dgm:styleLbl name="bgSibTrans2D1">
+    <dgm:scene3d>
+      <a:camera prst="orthographicFront"/>
+      <a:lightRig rig="threePt" dir="t"/>
+    </dgm:scene3d>
+    <dgm:sp3d/>
+    <dgm:txPr/>
+    <dgm:style>
+      <a:lnRef idx="0">
+        <a:scrgbClr r="0" g="0" b="0"/>
+      </a:lnRef>
+      <a:fillRef idx="1">
+        <a:scrgbClr r="0" g="0" b="0"/>
+      </a:fillRef>
+      <a:effectRef idx="0">
+        <a:scrgbClr r="0" g="0" b="0"/>
+      </a:effectRef>
+      <a:fontRef idx="minor">
+        <a:schemeClr val="lt1"/>
+      </a:fontRef>
+    </dgm:style>
+  </dgm:styleLbl>
+  <dgm:styleLbl name="sibTrans1D1">
+    <dgm:scene3d>
+      <a:camera prst="orthographicFront"/>
+      <a:lightRig rig="threePt" dir="t"/>
+    </dgm:scene3d>
+    <dgm:sp3d/>
+    <dgm:txPr/>
+    <dgm:style>
+      <a:lnRef idx="1">
+        <a:scrgbClr r="0" g="0" b="0"/>
+      </a:lnRef>
+      <a:fillRef idx="0">
+        <a:scrgbClr r="0" g="0" b="0"/>
+      </a:fillRef>
+      <a:effectRef idx="0">
+        <a:scrgbClr r="0" g="0" b="0"/>
+      </a:effectRef>
+      <a:fontRef idx="minor"/>
+    </dgm:style>
+  </dgm:styleLbl>
+  <dgm:styleLbl name="callout">
+    <dgm:scene3d>
+      <a:camera prst="orthographicFront"/>
+      <a:lightRig rig="threePt" dir="t"/>
+    </dgm:scene3d>
+    <dgm:sp3d/>
+    <dgm:txPr/>
+    <dgm:style>
+      <a:lnRef idx="2">
+        <a:scrgbClr r="0" g="0" b="0"/>
+      </a:lnRef>
+      <a:fillRef idx="1">
+        <a:scrgbClr r="0" g="0" b="0"/>
+      </a:fillRef>
+      <a:effectRef idx="0">
+        <a:scrgbClr r="0" g="0" b="0"/>
+      </a:effectRef>
+      <a:fontRef idx="minor"/>
+    </dgm:style>
+  </dgm:styleLbl>
+  <dgm:styleLbl name="asst0">
+    <dgm:scene3d>
+      <a:camera prst="orthographicFront"/>
+      <a:lightRig rig="threePt" dir="t"/>
+    </dgm:scene3d>
+    <dgm:sp3d/>
+    <dgm:txPr/>
+    <dgm:style>
+      <a:lnRef idx="2">
+        <a:scrgbClr r="0" g="0" b="0"/>
+      </a:lnRef>
+      <a:fillRef idx="1">
+        <a:scrgbClr r="0" g="0" b="0"/>
+      </a:fillRef>
+      <a:effectRef idx="0">
+        <a:scrgbClr r="0" g="0" b="0"/>
+      </a:effectRef>
+      <a:fontRef idx="minor">
+        <a:schemeClr val="lt1"/>
+      </a:fontRef>
+    </dgm:style>
+  </dgm:styleLbl>
+  <dgm:styleLbl name="asst1">
+    <dgm:scene3d>
+      <a:camera prst="orthographicFront"/>
+      <a:lightRig rig="threePt" dir="t"/>
+    </dgm:scene3d>
+    <dgm:sp3d/>
+    <dgm:txPr/>
+    <dgm:style>
+      <a:lnRef idx="2">
+        <a:scrgbClr r="0" g="0" b="0"/>
+      </a:lnRef>
+      <a:fillRef idx="1">
+        <a:scrgbClr r="0" g="0" b="0"/>
+      </a:fillRef>
+      <a:effectRef idx="0">
+        <a:scrgbClr r="0" g="0" b="0"/>
+      </a:effectRef>
+      <a:fontRef idx="minor">
+        <a:schemeClr val="lt1"/>
+      </a:fontRef>
+    </dgm:style>
+  </dgm:styleLbl>
+  <dgm:styleLbl name="asst2">
+    <dgm:scene3d>
+      <a:camera prst="orthographicFront"/>
+      <a:lightRig rig="threePt" dir="t"/>
+    </dgm:scene3d>
+    <dgm:sp3d/>
+    <dgm:txPr/>
+    <dgm:style>
+      <a:lnRef idx="2">
+        <a:scrgbClr r="0" g="0" b="0"/>
+      </a:lnRef>
+      <a:fillRef idx="1">
+        <a:scrgbClr r="0" g="0" b="0"/>
+      </a:fillRef>
+      <a:effectRef idx="0">
+        <a:scrgbClr r="0" g="0" b="0"/>
+      </a:effectRef>
+      <a:fontRef idx="minor">
+        <a:schemeClr val="lt1"/>
+      </a:fontRef>
+    </dgm:style>
+  </dgm:styleLbl>
+  <dgm:styleLbl name="asst3">
+    <dgm:scene3d>
+      <a:camera prst="orthographicFront"/>
+      <a:lightRig rig="threePt" dir="t"/>
+    </dgm:scene3d>
+    <dgm:sp3d/>
+    <dgm:txPr/>
+    <dgm:style>
+      <a:lnRef idx="2">
+        <a:scrgbClr r="0" g="0" b="0"/>
+      </a:lnRef>
+      <a:fillRef idx="1">
+        <a:scrgbClr r="0" g="0" b="0"/>
+      </a:fillRef>
+      <a:effectRef idx="0">
+        <a:scrgbClr r="0" g="0" b="0"/>
+      </a:effectRef>
+      <a:fontRef idx="minor">
+        <a:schemeClr val="lt1"/>
+      </a:fontRef>
+    </dgm:style>
+  </dgm:styleLbl>
+  <dgm:styleLbl name="asst4">
+    <dgm:scene3d>
+      <a:camera prst="orthographicFront"/>
+      <a:lightRig rig="threePt" dir="t"/>
+    </dgm:scene3d>
+    <dgm:sp3d/>
+    <dgm:txPr/>
+    <dgm:style>
+      <a:lnRef idx="2">
+        <a:scrgbClr r="0" g="0" b="0"/>
+      </a:lnRef>
+      <a:fillRef idx="1">
+        <a:scrgbClr r="0" g="0" b="0"/>
+      </a:fillRef>
+      <a:effectRef idx="0">
+        <a:scrgbClr r="0" g="0" b="0"/>
+      </a:effectRef>
+      <a:fontRef idx="minor">
+        <a:schemeClr val="lt1"/>
+      </a:fontRef>
+    </dgm:style>
+  </dgm:styleLbl>
+  <dgm:styleLbl name="parChTrans2D1">
+    <dgm:scene3d>
+      <a:camera prst="orthographicFront"/>
+      <a:lightRig rig="threePt" dir="t"/>
+    </dgm:scene3d>
+    <dgm:sp3d/>
+    <dgm:txPr/>
+    <dgm:style>
+      <a:lnRef idx="2">
+        <a:scrgbClr r="0" g="0" b="0"/>
+      </a:lnRef>
+      <a:fillRef idx="1">
+        <a:scrgbClr r="0" g="0" b="0"/>
+      </a:fillRef>
+      <a:effectRef idx="0">
+        <a:scrgbClr r="0" g="0" b="0"/>
+      </a:effectRef>
+      <a:fontRef idx="minor">
+        <a:schemeClr val="lt1"/>
+      </a:fontRef>
+    </dgm:style>
+  </dgm:styleLbl>
+  <dgm:styleLbl name="parChTrans2D2">
+    <dgm:scene3d>
+      <a:camera prst="orthographicFront"/>
+      <a:lightRig rig="threePt" dir="t"/>
+    </dgm:scene3d>
+    <dgm:sp3d/>
+    <dgm:txPr/>
+    <dgm:style>
+      <a:lnRef idx="2">
+        <a:scrgbClr r="0" g="0" b="0"/>
+      </a:lnRef>
+      <a:fillRef idx="1">
+        <a:scrgbClr r="0" g="0" b="0"/>
+      </a:fillRef>
+      <a:effectRef idx="0">
+        <a:scrgbClr r="0" g="0" b="0"/>
+      </a:effectRef>
+      <a:fontRef idx="minor">
+        <a:schemeClr val="lt1"/>
+      </a:fontRef>
+    </dgm:style>
+  </dgm:styleLbl>
+  <dgm:styleLbl name="parChTrans2D3">
+    <dgm:scene3d>
+      <a:camera prst="orthographicFront"/>
+      <a:lightRig rig="threePt" dir="t"/>
+    </dgm:scene3d>
+    <dgm:sp3d/>
+    <dgm:txPr/>
+    <dgm:style>
+      <a:lnRef idx="2">
+        <a:scrgbClr r="0" g="0" b="0"/>
+      </a:lnRef>
+      <a:fillRef idx="1">
+        <a:scrgbClr r="0" g="0" b="0"/>
+      </a:fillRef>
+      <a:effectRef idx="0">
+        <a:scrgbClr r="0" g="0" b="0"/>
+      </a:effectRef>
+      <a:fontRef idx="minor">
+        <a:schemeClr val="lt1"/>
+      </a:fontRef>
+    </dgm:style>
+  </dgm:styleLbl>
+  <dgm:styleLbl name="parChTrans2D4">
+    <dgm:scene3d>
+      <a:camera prst="orthographicFront"/>
+      <a:lightRig rig="threePt" dir="t"/>
+    </dgm:scene3d>
+    <dgm:sp3d/>
+    <dgm:txPr/>
+    <dgm:style>
+      <a:lnRef idx="2">
+        <a:scrgbClr r="0" g="0" b="0"/>
+      </a:lnRef>
+      <a:fillRef idx="1">
+        <a:scrgbClr r="0" g="0" b="0"/>
+      </a:fillRef>
+      <a:effectRef idx="0">
+        <a:scrgbClr r="0" g="0" b="0"/>
+      </a:effectRef>
+      <a:fontRef idx="minor">
+        <a:schemeClr val="lt1"/>
+      </a:fontRef>
+    </dgm:style>
+  </dgm:styleLbl>
+  <dgm:styleLbl name="parChTrans1D1">
+    <dgm:scene3d>
+      <a:camera prst="orthographicFront"/>
+      <a:lightRig rig="threePt" dir="t"/>
+    </dgm:scene3d>
+    <dgm:sp3d/>
+    <dgm:txPr/>
+    <dgm:style>
+      <a:lnRef idx="2">
+        <a:scrgbClr r="0" g="0" b="0"/>
+      </a:lnRef>
+      <a:fillRef idx="0">
+        <a:scrgbClr r="0" g="0" b="0"/>
+      </a:fillRef>
+      <a:effectRef idx="0">
+        <a:scrgbClr r="0" g="0" b="0"/>
+      </a:effectRef>
+      <a:fontRef idx="minor"/>
+    </dgm:style>
+  </dgm:styleLbl>
+  <dgm:styleLbl name="parChTrans1D2">
+    <dgm:scene3d>
+      <a:camera prst="orthographicFront"/>
+      <a:lightRig rig="threePt" dir="t"/>
+    </dgm:scene3d>
+    <dgm:sp3d/>
+    <dgm:txPr/>
+    <dgm:style>
+      <a:lnRef idx="2">
+        <a:scrgbClr r="0" g="0" b="0"/>
+      </a:lnRef>
+      <a:fillRef idx="0">
+        <a:scrgbClr r="0" g="0" b="0"/>
+      </a:fillRef>
+      <a:effectRef idx="0">
+        <a:scrgbClr r="0" g="0" b="0"/>
+      </a:effectRef>
+      <a:fontRef idx="minor"/>
+    </dgm:style>
+  </dgm:styleLbl>
+  <dgm:styleLbl name="parChTrans1D3">
+    <dgm:scene3d>
+      <a:camera prst="orthographicFront"/>
+      <a:lightRig rig="threePt" dir="t"/>
+    </dgm:scene3d>
+    <dgm:sp3d/>
+    <dgm:txPr/>
+    <dgm:style>
+      <a:lnRef idx="2">
+        <a:scrgbClr r="0" g="0" b="0"/>
+      </a:lnRef>
+      <a:fillRef idx="0">
+        <a:scrgbClr r="0" g="0" b="0"/>
+      </a:fillRef>
+      <a:effectRef idx="0">
+        <a:scrgbClr r="0" g="0" b="0"/>
+      </a:effectRef>
+      <a:fontRef idx="minor"/>
+    </dgm:style>
+  </dgm:styleLbl>
+  <dgm:styleLbl name="parChTrans1D4">
+    <dgm:scene3d>
+      <a:camera prst="orthographicFront"/>
+      <a:lightRig rig="threePt" dir="t"/>
+    </dgm:scene3d>
+    <dgm:sp3d/>
+    <dgm:txPr/>
+    <dgm:style>
+      <a:lnRef idx="2">
+        <a:scrgbClr r="0" g="0" b="0"/>
+      </a:lnRef>
+      <a:fillRef idx="0">
+        <a:scrgbClr r="0" g="0" b="0"/>
+      </a:fillRef>
+      <a:effectRef idx="0">
+        <a:scrgbClr r="0" g="0" b="0"/>
+      </a:effectRef>
+      <a:fontRef idx="minor"/>
+    </dgm:style>
+  </dgm:styleLbl>
+  <dgm:styleLbl name="fgAcc1">
+    <dgm:scene3d>
+      <a:camera prst="orthographicFront"/>
+      <a:lightRig rig="threePt" dir="t"/>
+    </dgm:scene3d>
+    <dgm:sp3d/>
+    <dgm:txPr/>
+    <dgm:style>
+      <a:lnRef idx="2">
+        <a:scrgbClr r="0" g="0" b="0"/>
+      </a:lnRef>
+      <a:fillRef idx="1">
+        <a:scrgbClr r="0" g="0" b="0"/>
+      </a:fillRef>
+      <a:effectRef idx="0">
+        <a:scrgbClr r="0" g="0" b="0"/>
+      </a:effectRef>
+      <a:fontRef idx="minor"/>
+    </dgm:style>
+  </dgm:styleLbl>
+  <dgm:styleLbl name="conFgAcc1">
+    <dgm:scene3d>
+      <a:camera prst="orthographicFront"/>
+      <a:lightRig rig="threePt" dir="t"/>
+    </dgm:scene3d>
+    <dgm:sp3d/>
+    <dgm:txPr/>
+    <dgm:style>
+      <a:lnRef idx="2">
+        <a:scrgbClr r="0" g="0" b="0"/>
+      </a:lnRef>
+      <a:fillRef idx="1">
+        <a:scrgbClr r="0" g="0" b="0"/>
+      </a:fillRef>
+      <a:effectRef idx="0">
+        <a:scrgbClr r="0" g="0" b="0"/>
+      </a:effectRef>
+      <a:fontRef idx="minor"/>
+    </dgm:style>
+  </dgm:styleLbl>
+  <dgm:styleLbl name="alignAcc1">
+    <dgm:scene3d>
+      <a:camera prst="orthographicFront"/>
+      <a:lightRig rig="threePt" dir="t"/>
+    </dgm:scene3d>
+    <dgm:sp3d/>
+    <dgm:txPr/>
+    <dgm:style>
+      <a:lnRef idx="2">
+        <a:scrgbClr r="0" g="0" b="0"/>
+      </a:lnRef>
+      <a:fillRef idx="1">
+        <a:scrgbClr r="0" g="0" b="0"/>
+      </a:fillRef>
+      <a:effectRef idx="0">
+        <a:scrgbClr r="0" g="0" b="0"/>
+      </a:effectRef>
+      <a:fontRef idx="minor"/>
+    </dgm:style>
+  </dgm:styleLbl>
+  <dgm:styleLbl name="trAlignAcc1">
+    <dgm:scene3d>
+      <a:camera prst="orthographicFront"/>
+      <a:lightRig rig="threePt" dir="t"/>
+    </dgm:scene3d>
+    <dgm:sp3d/>
+    <dgm:txPr/>
+    <dgm:style>
+      <a:lnRef idx="1">
+        <a:scrgbClr r="0" g="0" b="0"/>
+      </a:lnRef>
+      <a:fillRef idx="1">
+        <a:scrgbClr r="0" g="0" b="0"/>
+      </a:fillRef>
+      <a:effectRef idx="0">
+        <a:scrgbClr r="0" g="0" b="0"/>
+      </a:effectRef>
+      <a:fontRef idx="minor"/>
+    </dgm:style>
+  </dgm:styleLbl>
+  <dgm:styleLbl name="bgAcc1">
+    <dgm:scene3d>
+      <a:camera prst="orthographicFront"/>
+      <a:lightRig rig="threePt" dir="t"/>
+    </dgm:scene3d>
+    <dgm:sp3d/>
+    <dgm:txPr/>
+    <dgm:style>
+      <a:lnRef idx="2">
+        <a:scrgbClr r="0" g="0" b="0"/>
+      </a:lnRef>
+      <a:fillRef idx="1">
+        <a:scrgbClr r="0" g="0" b="0"/>
+      </a:fillRef>
+      <a:effectRef idx="0">
+        <a:scrgbClr r="0" g="0" b="0"/>
+      </a:effectRef>
+      <a:fontRef idx="minor"/>
+    </dgm:style>
+  </dgm:styleLbl>
+  <dgm:styleLbl name="solidFgAcc1">
+    <dgm:scene3d>
+      <a:camera prst="orthographicFront"/>
+      <a:lightRig rig="threePt" dir="t"/>
+    </dgm:scene3d>
+    <dgm:sp3d/>
+    <dgm:txPr/>
+    <dgm:style>
+      <a:lnRef idx="2">
+        <a:scrgbClr r="0" g="0" b="0"/>
+      </a:lnRef>
+      <a:fillRef idx="1">
+        <a:scrgbClr r="0" g="0" b="0"/>
+      </a:fillRef>
+      <a:effectRef idx="0">
+        <a:scrgbClr r="0" g="0" b="0"/>
+      </a:effectRef>
+      <a:fontRef idx="minor"/>
+    </dgm:style>
+  </dgm:styleLbl>
+  <dgm:styleLbl name="solidAlignAcc1">
+    <dgm:scene3d>
+      <a:camera prst="orthographicFront"/>
+      <a:lightRig rig="threePt" dir="t"/>
+    </dgm:scene3d>
+    <dgm:sp3d/>
+    <dgm:txPr/>
+    <dgm:style>
+      <a:lnRef idx="2">
+        <a:scrgbClr r="0" g="0" b="0"/>
+      </a:lnRef>
+      <a:fillRef idx="1">
+        <a:scrgbClr r="0" g="0" b="0"/>
+      </a:fillRef>
+      <a:effectRef idx="0">
+        <a:scrgbClr r="0" g="0" b="0"/>
+      </a:effectRef>
+      <a:fontRef idx="minor"/>
+    </dgm:style>
+  </dgm:styleLbl>
+  <dgm:styleLbl name="solidBgAcc1">
+    <dgm:scene3d>
+      <a:camera prst="orthographicFront"/>
+      <a:lightRig rig="threePt" dir="t"/>
+    </dgm:scene3d>
+    <dgm:sp3d/>
+    <dgm:txPr/>
+    <dgm:style>
+      <a:lnRef idx="2">
+        <a:scrgbClr r="0" g="0" b="0"/>
+      </a:lnRef>
+      <a:fillRef idx="1">
+        <a:scrgbClr r="0" g="0" b="0"/>
+      </a:fillRef>
+      <a:effectRef idx="0">
+        <a:scrgbClr r="0" g="0" b="0"/>
+      </a:effectRef>
+      <a:fontRef idx="minor"/>
+    </dgm:style>
+  </dgm:styleLbl>
+  <dgm:styleLbl name="fgAccFollowNode1">
+    <dgm:scene3d>
+      <a:camera prst="orthographicFront"/>
+      <a:lightRig rig="threePt" dir="t"/>
+    </dgm:scene3d>
+    <dgm:sp3d/>
+    <dgm:txPr/>
+    <dgm:style>
+      <a:lnRef idx="2">
+        <a:scrgbClr r="0" g="0" b="0"/>
+      </a:lnRef>
+      <a:fillRef idx="1">
+        <a:scrgbClr r="0" g="0" b="0"/>
+      </a:fillRef>
+      <a:effectRef idx="0">
+        <a:scrgbClr r="0" g="0" b="0"/>
+      </a:effectRef>
+      <a:fontRef idx="minor"/>
+    </dgm:style>
+  </dgm:styleLbl>
+  <dgm:styleLbl name="alignAccFollowNode1">
+    <dgm:scene3d>
+      <a:camera prst="orthographicFront"/>
+      <a:lightRig rig="threePt" dir="t"/>
+    </dgm:scene3d>
+    <dgm:sp3d/>
+    <dgm:txPr/>
+    <dgm:style>
+      <a:lnRef idx="2">
+        <a:scrgbClr r="0" g="0" b="0"/>
+      </a:lnRef>
+      <a:fillRef idx="1">
+        <a:scrgbClr r="0" g="0" b="0"/>
+      </a:fillRef>
+      <a:effectRef idx="0">
+        <a:scrgbClr r="0" g="0" b="0"/>
+      </a:effectRef>
+      <a:fontRef idx="minor"/>
+    </dgm:style>
+  </dgm:styleLbl>
+  <dgm:styleLbl name="bgAccFollowNode1">
+    <dgm:scene3d>
+      <a:camera prst="orthographicFront"/>
+      <a:lightRig rig="threePt" dir="t"/>
+    </dgm:scene3d>
+    <dgm:sp3d/>
+    <dgm:txPr/>
+    <dgm:style>
+      <a:lnRef idx="2">
+        <a:scrgbClr r="0" g="0" b="0"/>
+      </a:lnRef>
+      <a:fillRef idx="1">
+        <a:scrgbClr r="0" g="0" b="0"/>
+      </a:fillRef>
+      <a:effectRef idx="0">
+        <a:scrgbClr r="0" g="0" b="0"/>
+      </a:effectRef>
+      <a:fontRef idx="minor"/>
+    </dgm:style>
+  </dgm:styleLbl>
+  <dgm:styleLbl name="fgAcc0">
+    <dgm:scene3d>
+      <a:camera prst="orthographicFront"/>
+      <a:lightRig rig="threePt" dir="t"/>
+    </dgm:scene3d>
+    <dgm:sp3d/>
+    <dgm:txPr/>
+    <dgm:style>
+      <a:lnRef idx="2">
+        <a:scrgbClr r="0" g="0" b="0"/>
+      </a:lnRef>
+      <a:fillRef idx="1">
+        <a:scrgbClr r="0" g="0" b="0"/>
+      </a:fillRef>
+      <a:effectRef idx="0">
+        <a:scrgbClr r="0" g="0" b="0"/>
+      </a:effectRef>
+      <a:fontRef idx="minor"/>
+    </dgm:style>
+  </dgm:styleLbl>
+  <dgm:styleLbl name="fgAcc2">
+    <dgm:scene3d>
+      <a:camera prst="orthographicFront"/>
+      <a:lightRig rig="threePt" dir="t"/>
+    </dgm:scene3d>
+    <dgm:sp3d/>
+    <dgm:txPr/>
+    <dgm:style>
+      <a:lnRef idx="2">
+        <a:scrgbClr r="0" g="0" b="0"/>
+      </a:lnRef>
+      <a:fillRef idx="1">
+        <a:scrgbClr r="0" g="0" b="0"/>
+      </a:fillRef>
+      <a:effectRef idx="0">
+        <a:scrgbClr r="0" g="0" b="0"/>
+      </a:effectRef>
+      <a:fontRef idx="minor"/>
+    </dgm:style>
+  </dgm:styleLbl>
+  <dgm:styleLbl name="fgAcc3">
+    <dgm:scene3d>
+      <a:camera prst="orthographicFront"/>
+      <a:lightRig rig="threePt" dir="t"/>
+    </dgm:scene3d>
+    <dgm:sp3d/>
+    <dgm:txPr/>
+    <dgm:style>
+      <a:lnRef idx="2">
+        <a:scrgbClr r="0" g="0" b="0"/>
+      </a:lnRef>
+      <a:fillRef idx="1">
+        <a:scrgbClr r="0" g="0" b="0"/>
+      </a:fillRef>
+      <a:effectRef idx="0">
+        <a:scrgbClr r="0" g="0" b="0"/>
+      </a:effectRef>
+      <a:fontRef idx="minor"/>
+    </dgm:style>
+  </dgm:styleLbl>
+  <dgm:styleLbl name="fgAcc4">
+    <dgm:scene3d>
+      <a:camera prst="orthographicFront"/>
+      <a:lightRig rig="threePt" dir="t"/>
+    </dgm:scene3d>
+    <dgm:sp3d/>
+    <dgm:txPr/>
+    <dgm:style>
+      <a:lnRef idx="2">
+        <a:scrgbClr r="0" g="0" b="0"/>
+      </a:lnRef>
+      <a:fillRef idx="1">
+        <a:scrgbClr r="0" g="0" b="0"/>
+      </a:fillRef>
+      <a:effectRef idx="0">
+        <a:scrgbClr r="0" g="0" b="0"/>
+      </a:effectRef>
+      <a:fontRef idx="minor"/>
+    </dgm:style>
+  </dgm:styleLbl>
+  <dgm:styleLbl name="bgShp">
+    <dgm:scene3d>
+      <a:camera prst="orthographicFront"/>
+      <a:lightRig rig="threePt" dir="t"/>
+    </dgm:scene3d>
+    <dgm:sp3d/>
+    <dgm:txPr/>
+    <dgm:style>
+      <a:lnRef idx="0">
+        <a:scrgbClr r="0" g="0" b="0"/>
+      </a:lnRef>
+      <a:fillRef idx="1">
+        <a:scrgbClr r="0" g="0" b="0"/>
+      </a:fillRef>
+      <a:effectRef idx="0">
+        <a:scrgbClr r="0" g="0" b="0"/>
+      </a:effectRef>
+      <a:fontRef idx="minor"/>
+    </dgm:style>
+  </dgm:styleLbl>
+  <dgm:styleLbl name="dkBgShp">
+    <dgm:scene3d>
+      <a:camera prst="orthographicFront"/>
+      <a:lightRig rig="threePt" dir="t"/>
+    </dgm:scene3d>
+    <dgm:sp3d/>
+    <dgm:txPr/>
+    <dgm:style>
+      <a:lnRef idx="0">
+        <a:scrgbClr r="0" g="0" b="0"/>
+      </a:lnRef>
+      <a:fillRef idx="1">
+        <a:scrgbClr r="0" g="0" b="0"/>
+      </a:fillRef>
+      <a:effectRef idx="0">
+        <a:scrgbClr r="0" g="0" b="0"/>
+      </a:effectRef>
+      <a:fontRef idx="minor"/>
+    </dgm:style>
+  </dgm:styleLbl>
+  <dgm:styleLbl name="trBgShp">
+    <dgm:scene3d>
+      <a:camera prst="orthographicFront"/>
+      <a:lightRig rig="threePt" dir="t"/>
+    </dgm:scene3d>
+    <dgm:sp3d/>
+    <dgm:txPr/>
+    <dgm:style>
+      <a:lnRef idx="0">
+        <a:scrgbClr r="0" g="0" b="0"/>
+      </a:lnRef>
+      <a:fillRef idx="1">
+        <a:scrgbClr r="0" g="0" b="0"/>
+      </a:fillRef>
+      <a:effectRef idx="0">
+        <a:scrgbClr r="0" g="0" b="0"/>
+      </a:effectRef>
+      <a:fontRef idx="minor"/>
+    </dgm:style>
+  </dgm:styleLbl>
+  <dgm:styleLbl name="fgShp">
+    <dgm:scene3d>
+      <a:camera prst="orthographicFront"/>
+      <a:lightRig rig="threePt" dir="t"/>
+    </dgm:scene3d>
+    <dgm:sp3d/>
+    <dgm:txPr/>
+    <dgm:style>
+      <a:lnRef idx="2">
+        <a:scrgbClr r="0" g="0" b="0"/>
+      </a:lnRef>
+      <a:fillRef idx="1">
+        <a:scrgbClr r="0" g="0" b="0"/>
+      </a:fillRef>
+      <a:effectRef idx="0">
+        <a:scrgbClr r="0" g="0" b="0"/>
+      </a:effectRef>
+      <a:fontRef idx="minor"/>
+    </dgm:style>
+  </dgm:styleLbl>
+  <dgm:styleLbl name="revTx">
+    <dgm:scene3d>
+      <a:camera prst="orthographicFront"/>
+      <a:lightRig rig="threePt" dir="t"/>
+    </dgm:scene3d>
+    <dgm:sp3d/>
+    <dgm:txPr/>
+    <dgm:style>
+      <a:lnRef idx="0">
+        <a:scrgbClr r="0" g="0" b="0"/>
+      </a:lnRef>
+      <a:fillRef idx="0">
+        <a:scrgbClr r="0" g="0" b="0"/>
+      </a:fillRef>
+      <a:effectRef idx="0">
+        <a:scrgbClr r="0" g="0" b="0"/>
+      </a:effectRef>
+      <a:fontRef idx="minor"/>
+    </dgm:style>
+  </dgm:styleLbl>
+</dgm:styleDef>
+</file>
+
+<file path=ppt/diagrams/quickStyle6.xml><?xml version="1.0" encoding="utf-8"?>
 <dgm:styleDef xmlns:dgm="http://schemas.openxmlformats.org/drawingml/2006/diagram" xmlns:a="http://schemas.openxmlformats.org/drawingml/2006/main" uniqueId="urn:microsoft.com/office/officeart/2005/8/quickstyle/simple1">
   <dgm:title val=""/>
   <dgm:desc val=""/>
@@ -13169,7 +19340,7 @@
           <a:p>
             <a:fld id="{6F9B1175-2E81-484D-B046-BD91174B45FC}" type="datetimeFigureOut">
               <a:rPr lang="en-IN" smtClean="0"/>
-              <a:t>29-04-2026</a:t>
+              <a:t>01-05-2026</a:t>
             </a:fld>
             <a:endParaRPr lang="en-IN"/>
           </a:p>
@@ -13465,7 +19636,7 @@
           <a:p>
             <a:fld id="{6F9B1175-2E81-484D-B046-BD91174B45FC}" type="datetimeFigureOut">
               <a:rPr lang="en-IN" smtClean="0"/>
-              <a:t>29-04-2026</a:t>
+              <a:t>01-05-2026</a:t>
             </a:fld>
             <a:endParaRPr lang="en-IN"/>
           </a:p>
@@ -13713,7 +19884,7 @@
           <a:p>
             <a:fld id="{6F9B1175-2E81-484D-B046-BD91174B45FC}" type="datetimeFigureOut">
               <a:rPr lang="en-IN" smtClean="0"/>
-              <a:t>29-04-2026</a:t>
+              <a:t>01-05-2026</a:t>
             </a:fld>
             <a:endParaRPr lang="en-IN"/>
           </a:p>
@@ -14253,7 +20424,7 @@
           <a:p>
             <a:fld id="{6F9B1175-2E81-484D-B046-BD91174B45FC}" type="datetimeFigureOut">
               <a:rPr lang="en-IN" smtClean="0"/>
-              <a:t>29-04-2026</a:t>
+              <a:t>01-05-2026</a:t>
             </a:fld>
             <a:endParaRPr lang="en-IN"/>
           </a:p>
@@ -14501,7 +20672,7 @@
           <a:p>
             <a:fld id="{6F9B1175-2E81-484D-B046-BD91174B45FC}" type="datetimeFigureOut">
               <a:rPr lang="en-IN" smtClean="0"/>
-              <a:t>29-04-2026</a:t>
+              <a:t>01-05-2026</a:t>
             </a:fld>
             <a:endParaRPr lang="en-IN"/>
           </a:p>
@@ -15033,7 +21204,7 @@
           <a:p>
             <a:fld id="{6F9B1175-2E81-484D-B046-BD91174B45FC}" type="datetimeFigureOut">
               <a:rPr lang="en-IN" smtClean="0"/>
-              <a:t>29-04-2026</a:t>
+              <a:t>01-05-2026</a:t>
             </a:fld>
             <a:endParaRPr lang="en-IN"/>
           </a:p>
@@ -15330,7 +21501,7 @@
           <a:p>
             <a:fld id="{6F9B1175-2E81-484D-B046-BD91174B45FC}" type="datetimeFigureOut">
               <a:rPr lang="en-IN" smtClean="0"/>
-              <a:t>29-04-2026</a:t>
+              <a:t>01-05-2026</a:t>
             </a:fld>
             <a:endParaRPr lang="en-IN"/>
           </a:p>
@@ -15504,7 +21675,7 @@
           <a:p>
             <a:fld id="{6F9B1175-2E81-484D-B046-BD91174B45FC}" type="datetimeFigureOut">
               <a:rPr lang="en-IN" smtClean="0"/>
-              <a:t>29-04-2026</a:t>
+              <a:t>01-05-2026</a:t>
             </a:fld>
             <a:endParaRPr lang="en-IN"/>
           </a:p>
@@ -15684,7 +21855,7 @@
           <a:p>
             <a:fld id="{6F9B1175-2E81-484D-B046-BD91174B45FC}" type="datetimeFigureOut">
               <a:rPr lang="en-IN" smtClean="0"/>
-              <a:t>29-04-2026</a:t>
+              <a:t>01-05-2026</a:t>
             </a:fld>
             <a:endParaRPr lang="en-IN"/>
           </a:p>
@@ -15947,7 +22118,7 @@
           <a:p>
             <a:fld id="{6F9B1175-2E81-484D-B046-BD91174B45FC}" type="datetimeFigureOut">
               <a:rPr lang="en-IN" smtClean="0"/>
-              <a:t>29-04-2026</a:t>
+              <a:t>01-05-2026</a:t>
             </a:fld>
             <a:endParaRPr lang="en-IN"/>
           </a:p>
@@ -16117,7 +22288,7 @@
           <a:p>
             <a:fld id="{6F9B1175-2E81-484D-B046-BD91174B45FC}" type="datetimeFigureOut">
               <a:rPr lang="en-IN" smtClean="0"/>
-              <a:t>29-04-2026</a:t>
+              <a:t>01-05-2026</a:t>
             </a:fld>
             <a:endParaRPr lang="en-IN"/>
           </a:p>
@@ -16287,7 +22458,7 @@
           <a:p>
             <a:fld id="{6F9B1175-2E81-484D-B046-BD91174B45FC}" type="datetimeFigureOut">
               <a:rPr lang="en-IN" smtClean="0"/>
-              <a:t>29-04-2026</a:t>
+              <a:t>01-05-2026</a:t>
             </a:fld>
             <a:endParaRPr lang="en-IN"/>
           </a:p>
@@ -16538,7 +22709,7 @@
           <a:p>
             <a:fld id="{6F9B1175-2E81-484D-B046-BD91174B45FC}" type="datetimeFigureOut">
               <a:rPr lang="en-IN" smtClean="0"/>
-              <a:t>29-04-2026</a:t>
+              <a:t>01-05-2026</a:t>
             </a:fld>
             <a:endParaRPr lang="en-IN"/>
           </a:p>
@@ -16830,7 +23001,7 @@
           <a:p>
             <a:fld id="{6F9B1175-2E81-484D-B046-BD91174B45FC}" type="datetimeFigureOut">
               <a:rPr lang="en-IN" smtClean="0"/>
-              <a:t>29-04-2026</a:t>
+              <a:t>01-05-2026</a:t>
             </a:fld>
             <a:endParaRPr lang="en-IN"/>
           </a:p>
@@ -17260,7 +23431,7 @@
           <a:p>
             <a:fld id="{6F9B1175-2E81-484D-B046-BD91174B45FC}" type="datetimeFigureOut">
               <a:rPr lang="en-IN" smtClean="0"/>
-              <a:t>29-04-2026</a:t>
+              <a:t>01-05-2026</a:t>
             </a:fld>
             <a:endParaRPr lang="en-IN"/>
           </a:p>
@@ -17383,7 +23554,7 @@
           <a:p>
             <a:fld id="{6F9B1175-2E81-484D-B046-BD91174B45FC}" type="datetimeFigureOut">
               <a:rPr lang="en-IN" smtClean="0"/>
-              <a:t>29-04-2026</a:t>
+              <a:t>01-05-2026</a:t>
             </a:fld>
             <a:endParaRPr lang="en-IN"/>
           </a:p>
@@ -17478,7 +23649,7 @@
           <a:p>
             <a:fld id="{6F9B1175-2E81-484D-B046-BD91174B45FC}" type="datetimeFigureOut">
               <a:rPr lang="en-IN" smtClean="0"/>
-              <a:t>29-04-2026</a:t>
+              <a:t>01-05-2026</a:t>
             </a:fld>
             <a:endParaRPr lang="en-IN"/>
           </a:p>
@@ -17761,7 +23932,7 @@
           <a:p>
             <a:fld id="{6F9B1175-2E81-484D-B046-BD91174B45FC}" type="datetimeFigureOut">
               <a:rPr lang="en-IN" smtClean="0"/>
-              <a:t>29-04-2026</a:t>
+              <a:t>01-05-2026</a:t>
             </a:fld>
             <a:endParaRPr lang="en-IN"/>
           </a:p>
@@ -18052,7 +24223,7 @@
           <a:p>
             <a:fld id="{6F9B1175-2E81-484D-B046-BD91174B45FC}" type="datetimeFigureOut">
               <a:rPr lang="en-IN" smtClean="0"/>
-              <a:t>29-04-2026</a:t>
+              <a:t>01-05-2026</a:t>
             </a:fld>
             <a:endParaRPr lang="en-IN"/>
           </a:p>
@@ -18353,7 +24524,7 @@
           <a:p>
             <a:fld id="{6F9B1175-2E81-484D-B046-BD91174B45FC}" type="datetimeFigureOut">
               <a:rPr lang="en-IN" smtClean="0"/>
-              <a:t>29-04-2026</a:t>
+              <a:t>01-05-2026</a:t>
             </a:fld>
             <a:endParaRPr lang="en-IN"/>
           </a:p>
@@ -18601,7 +24772,7 @@
           <a:p>
             <a:fld id="{6F9B1175-2E81-484D-B046-BD91174B45FC}" type="datetimeFigureOut">
               <a:rPr lang="en-IN" smtClean="0"/>
-              <a:t>29-04-2026</a:t>
+              <a:t>01-05-2026</a:t>
             </a:fld>
             <a:endParaRPr lang="en-IN"/>
           </a:p>
@@ -19137,7 +25308,7 @@
           <a:p>
             <a:fld id="{6F9B1175-2E81-484D-B046-BD91174B45FC}" type="datetimeFigureOut">
               <a:rPr lang="en-IN" smtClean="0"/>
-              <a:t>29-04-2026</a:t>
+              <a:t>01-05-2026</a:t>
             </a:fld>
             <a:endParaRPr lang="en-IN"/>
           </a:p>
@@ -19383,7 +25554,7 @@
           <a:p>
             <a:fld id="{6F9B1175-2E81-484D-B046-BD91174B45FC}" type="datetimeFigureOut">
               <a:rPr lang="en-IN" smtClean="0"/>
-              <a:t>29-04-2026</a:t>
+              <a:t>01-05-2026</a:t>
             </a:fld>
             <a:endParaRPr lang="en-IN"/>
           </a:p>
@@ -19631,7 +25802,7 @@
           <a:p>
             <a:fld id="{6F9B1175-2E81-484D-B046-BD91174B45FC}" type="datetimeFigureOut">
               <a:rPr lang="en-IN" smtClean="0"/>
-              <a:t>29-04-2026</a:t>
+              <a:t>01-05-2026</a:t>
             </a:fld>
             <a:endParaRPr lang="en-IN"/>
           </a:p>
@@ -20174,7 +26345,7 @@
           <a:p>
             <a:fld id="{6F9B1175-2E81-484D-B046-BD91174B45FC}" type="datetimeFigureOut">
               <a:rPr lang="en-IN" smtClean="0"/>
-              <a:t>29-04-2026</a:t>
+              <a:t>01-05-2026</a:t>
             </a:fld>
             <a:endParaRPr lang="en-IN"/>
           </a:p>
@@ -20484,7 +26655,7 @@
           <a:p>
             <a:fld id="{6F9B1175-2E81-484D-B046-BD91174B45FC}" type="datetimeFigureOut">
               <a:rPr lang="en-IN" smtClean="0"/>
-              <a:t>29-04-2026</a:t>
+              <a:t>01-05-2026</a:t>
             </a:fld>
             <a:endParaRPr lang="en-IN"/>
           </a:p>
@@ -20659,7 +26830,7 @@
           <a:p>
             <a:fld id="{6F9B1175-2E81-484D-B046-BD91174B45FC}" type="datetimeFigureOut">
               <a:rPr lang="en-IN" smtClean="0"/>
-              <a:t>29-04-2026</a:t>
+              <a:t>01-05-2026</a:t>
             </a:fld>
             <a:endParaRPr lang="en-IN"/>
           </a:p>
@@ -20839,7 +27010,7 @@
           <a:p>
             <a:fld id="{6F9B1175-2E81-484D-B046-BD91174B45FC}" type="datetimeFigureOut">
               <a:rPr lang="en-IN" smtClean="0"/>
-              <a:t>29-04-2026</a:t>
+              <a:t>01-05-2026</a:t>
             </a:fld>
             <a:endParaRPr lang="en-IN"/>
           </a:p>
@@ -21088,7 +27259,7 @@
           <a:p>
             <a:fld id="{6F9B1175-2E81-484D-B046-BD91174B45FC}" type="datetimeFigureOut">
               <a:rPr lang="en-IN" smtClean="0"/>
-              <a:t>29-04-2026</a:t>
+              <a:t>01-05-2026</a:t>
             </a:fld>
             <a:endParaRPr lang="en-IN"/>
           </a:p>
@@ -21355,7 +27526,7 @@
           <a:p>
             <a:fld id="{6F9B1175-2E81-484D-B046-BD91174B45FC}" type="datetimeFigureOut">
               <a:rPr lang="en-IN" smtClean="0"/>
-              <a:t>29-04-2026</a:t>
+              <a:t>01-05-2026</a:t>
             </a:fld>
             <a:endParaRPr lang="en-IN"/>
           </a:p>
@@ -21684,7 +27855,7 @@
           <a:p>
             <a:fld id="{6F9B1175-2E81-484D-B046-BD91174B45FC}" type="datetimeFigureOut">
               <a:rPr lang="en-IN" smtClean="0"/>
-              <a:t>29-04-2026</a:t>
+              <a:t>01-05-2026</a:t>
             </a:fld>
             <a:endParaRPr lang="en-IN"/>
           </a:p>
@@ -22007,7 +28178,7 @@
           <a:p>
             <a:fld id="{6F9B1175-2E81-484D-B046-BD91174B45FC}" type="datetimeFigureOut">
               <a:rPr lang="en-IN" smtClean="0"/>
-              <a:t>29-04-2026</a:t>
+              <a:t>01-05-2026</a:t>
             </a:fld>
             <a:endParaRPr lang="en-IN"/>
           </a:p>
@@ -22464,7 +28635,7 @@
           <a:p>
             <a:fld id="{6F9B1175-2E81-484D-B046-BD91174B45FC}" type="datetimeFigureOut">
               <a:rPr lang="en-IN" smtClean="0"/>
-              <a:t>29-04-2026</a:t>
+              <a:t>01-05-2026</a:t>
             </a:fld>
             <a:endParaRPr lang="en-IN"/>
           </a:p>
@@ -22848,7 +29019,7 @@
           <a:p>
             <a:fld id="{6F9B1175-2E81-484D-B046-BD91174B45FC}" type="datetimeFigureOut">
               <a:rPr lang="en-IN" smtClean="0"/>
-              <a:t>29-04-2026</a:t>
+              <a:t>01-05-2026</a:t>
             </a:fld>
             <a:endParaRPr lang="en-IN"/>
           </a:p>
@@ -22966,7 +29137,7 @@
           <a:p>
             <a:fld id="{6F9B1175-2E81-484D-B046-BD91174B45FC}" type="datetimeFigureOut">
               <a:rPr lang="en-IN" smtClean="0"/>
-              <a:t>29-04-2026</a:t>
+              <a:t>01-05-2026</a:t>
             </a:fld>
             <a:endParaRPr lang="en-IN"/>
           </a:p>
@@ -23143,7 +29314,7 @@
           <a:p>
             <a:fld id="{6F9B1175-2E81-484D-B046-BD91174B45FC}" type="datetimeFigureOut">
               <a:rPr lang="en-IN" smtClean="0"/>
-              <a:t>29-04-2026</a:t>
+              <a:t>01-05-2026</a:t>
             </a:fld>
             <a:endParaRPr lang="en-IN"/>
           </a:p>
@@ -23476,7 +29647,7 @@
           <a:p>
             <a:fld id="{6F9B1175-2E81-484D-B046-BD91174B45FC}" type="datetimeFigureOut">
               <a:rPr lang="en-IN" smtClean="0"/>
-              <a:t>29-04-2026</a:t>
+              <a:t>01-05-2026</a:t>
             </a:fld>
             <a:endParaRPr lang="en-IN"/>
           </a:p>
@@ -23821,7 +29992,7 @@
           <a:p>
             <a:fld id="{6F9B1175-2E81-484D-B046-BD91174B45FC}" type="datetimeFigureOut">
               <a:rPr lang="en-IN" smtClean="0"/>
-              <a:t>29-04-2026</a:t>
+              <a:t>01-05-2026</a:t>
             </a:fld>
             <a:endParaRPr lang="en-IN"/>
           </a:p>
@@ -24159,7 +30330,7 @@
           <a:p>
             <a:fld id="{6F9B1175-2E81-484D-B046-BD91174B45FC}" type="datetimeFigureOut">
               <a:rPr lang="en-IN" smtClean="0"/>
-              <a:t>29-04-2026</a:t>
+              <a:t>01-05-2026</a:t>
             </a:fld>
             <a:endParaRPr lang="en-IN"/>
           </a:p>
@@ -24560,7 +30731,7 @@
           <a:p>
             <a:fld id="{6F9B1175-2E81-484D-B046-BD91174B45FC}" type="datetimeFigureOut">
               <a:rPr lang="en-IN" smtClean="0"/>
-              <a:t>29-04-2026</a:t>
+              <a:t>01-05-2026</a:t>
             </a:fld>
             <a:endParaRPr lang="en-IN"/>
           </a:p>
@@ -24896,7 +31067,7 @@
           <a:p>
             <a:fld id="{6F9B1175-2E81-484D-B046-BD91174B45FC}" type="datetimeFigureOut">
               <a:rPr lang="en-IN" smtClean="0"/>
-              <a:t>29-04-2026</a:t>
+              <a:t>01-05-2026</a:t>
             </a:fld>
             <a:endParaRPr lang="en-IN"/>
           </a:p>
@@ -25216,7 +31387,7 @@
           <a:p>
             <a:fld id="{6F9B1175-2E81-484D-B046-BD91174B45FC}" type="datetimeFigureOut">
               <a:rPr lang="en-IN" smtClean="0"/>
-              <a:t>29-04-2026</a:t>
+              <a:t>01-05-2026</a:t>
             </a:fld>
             <a:endParaRPr lang="en-IN"/>
           </a:p>
@@ -25612,7 +31783,7 @@
           <a:p>
             <a:fld id="{6F9B1175-2E81-484D-B046-BD91174B45FC}" type="datetimeFigureOut">
               <a:rPr lang="en-IN" smtClean="0"/>
-              <a:t>29-04-2026</a:t>
+              <a:t>01-05-2026</a:t>
             </a:fld>
             <a:endParaRPr lang="en-IN"/>
           </a:p>
@@ -25869,7 +32040,7 @@
           <a:p>
             <a:fld id="{6F9B1175-2E81-484D-B046-BD91174B45FC}" type="datetimeFigureOut">
               <a:rPr lang="en-IN" smtClean="0"/>
-              <a:t>29-04-2026</a:t>
+              <a:t>01-05-2026</a:t>
             </a:fld>
             <a:endParaRPr lang="en-IN"/>
           </a:p>
@@ -26393,7 +32564,7 @@
           <a:p>
             <a:fld id="{6F9B1175-2E81-484D-B046-BD91174B45FC}" type="datetimeFigureOut">
               <a:rPr lang="en-IN" smtClean="0"/>
-              <a:t>29-04-2026</a:t>
+              <a:t>01-05-2026</a:t>
             </a:fld>
             <a:endParaRPr lang="en-IN"/>
           </a:p>
@@ -26573,7 +32744,7 @@
           <a:p>
             <a:fld id="{6F9B1175-2E81-484D-B046-BD91174B45FC}" type="datetimeFigureOut">
               <a:rPr lang="en-IN" smtClean="0"/>
-              <a:t>29-04-2026</a:t>
+              <a:t>01-05-2026</a:t>
             </a:fld>
             <a:endParaRPr lang="en-IN"/>
           </a:p>
@@ -27119,7 +33290,7 @@
           <a:p>
             <a:fld id="{6F9B1175-2E81-484D-B046-BD91174B45FC}" type="datetimeFigureOut">
               <a:rPr lang="en-IN" smtClean="0"/>
-              <a:t>29-04-2026</a:t>
+              <a:t>01-05-2026</a:t>
             </a:fld>
             <a:endParaRPr lang="en-IN"/>
           </a:p>
@@ -27298,7 +33469,7 @@
           <a:p>
             <a:fld id="{6F9B1175-2E81-484D-B046-BD91174B45FC}" type="datetimeFigureOut">
               <a:rPr lang="en-IN" smtClean="0"/>
-              <a:t>29-04-2026</a:t>
+              <a:t>01-05-2026</a:t>
             </a:fld>
             <a:endParaRPr lang="en-IN"/>
           </a:p>
@@ -27611,7 +33782,7 @@
           <a:p>
             <a:fld id="{6F9B1175-2E81-484D-B046-BD91174B45FC}" type="datetimeFigureOut">
               <a:rPr lang="en-IN" smtClean="0"/>
-              <a:t>29-04-2026</a:t>
+              <a:t>01-05-2026</a:t>
             </a:fld>
             <a:endParaRPr lang="en-IN"/>
           </a:p>
@@ -27997,7 +34168,7 @@
           <a:p>
             <a:fld id="{6F9B1175-2E81-484D-B046-BD91174B45FC}" type="datetimeFigureOut">
               <a:rPr lang="en-IN" smtClean="0"/>
-              <a:t>29-04-2026</a:t>
+              <a:t>01-05-2026</a:t>
             </a:fld>
             <a:endParaRPr lang="en-IN"/>
           </a:p>
@@ -28431,7 +34602,7 @@
           <a:p>
             <a:fld id="{6F9B1175-2E81-484D-B046-BD91174B45FC}" type="datetimeFigureOut">
               <a:rPr lang="en-IN" smtClean="0"/>
-              <a:t>29-04-2026</a:t>
+              <a:t>01-05-2026</a:t>
             </a:fld>
             <a:endParaRPr lang="en-IN"/>
           </a:p>
@@ -28549,7 +34720,7 @@
           <a:p>
             <a:fld id="{6F9B1175-2E81-484D-B046-BD91174B45FC}" type="datetimeFigureOut">
               <a:rPr lang="en-IN" smtClean="0"/>
-              <a:t>29-04-2026</a:t>
+              <a:t>01-05-2026</a:t>
             </a:fld>
             <a:endParaRPr lang="en-IN"/>
           </a:p>
@@ -28644,7 +34815,7 @@
           <a:p>
             <a:fld id="{6F9B1175-2E81-484D-B046-BD91174B45FC}" type="datetimeFigureOut">
               <a:rPr lang="en-IN" smtClean="0"/>
-              <a:t>29-04-2026</a:t>
+              <a:t>01-05-2026</a:t>
             </a:fld>
             <a:endParaRPr lang="en-IN"/>
           </a:p>
@@ -28994,7 +35165,7 @@
           <a:p>
             <a:fld id="{6F9B1175-2E81-484D-B046-BD91174B45FC}" type="datetimeFigureOut">
               <a:rPr lang="en-IN" smtClean="0"/>
-              <a:t>29-04-2026</a:t>
+              <a:t>01-05-2026</a:t>
             </a:fld>
             <a:endParaRPr lang="en-IN"/>
           </a:p>
@@ -29419,7 +35590,7 @@
           <a:p>
             <a:fld id="{6F9B1175-2E81-484D-B046-BD91174B45FC}" type="datetimeFigureOut">
               <a:rPr lang="en-IN" smtClean="0"/>
-              <a:t>29-04-2026</a:t>
+              <a:t>01-05-2026</a:t>
             </a:fld>
             <a:endParaRPr lang="en-IN"/>
           </a:p>
@@ -29607,7 +35778,7 @@
           <a:p>
             <a:fld id="{6F9B1175-2E81-484D-B046-BD91174B45FC}" type="datetimeFigureOut">
               <a:rPr lang="en-IN" smtClean="0"/>
-              <a:t>29-04-2026</a:t>
+              <a:t>01-05-2026</a:t>
             </a:fld>
             <a:endParaRPr lang="en-IN"/>
           </a:p>
@@ -29777,7 +35948,7 @@
           <a:p>
             <a:fld id="{6F9B1175-2E81-484D-B046-BD91174B45FC}" type="datetimeFigureOut">
               <a:rPr lang="en-IN" smtClean="0"/>
-              <a:t>29-04-2026</a:t>
+              <a:t>01-05-2026</a:t>
             </a:fld>
             <a:endParaRPr lang="en-IN"/>
           </a:p>
@@ -29957,7 +36128,7 @@
           <a:p>
             <a:fld id="{6F9B1175-2E81-484D-B046-BD91174B45FC}" type="datetimeFigureOut">
               <a:rPr lang="en-IN" smtClean="0"/>
-              <a:t>29-04-2026</a:t>
+              <a:t>01-05-2026</a:t>
             </a:fld>
             <a:endParaRPr lang="en-IN"/>
           </a:p>
@@ -30052,7 +36223,7 @@
           <a:p>
             <a:fld id="{6F9B1175-2E81-484D-B046-BD91174B45FC}" type="datetimeFigureOut">
               <a:rPr lang="en-IN" smtClean="0"/>
-              <a:t>29-04-2026</a:t>
+              <a:t>01-05-2026</a:t>
             </a:fld>
             <a:endParaRPr lang="en-IN"/>
           </a:p>
@@ -30335,7 +36506,7 @@
           <a:p>
             <a:fld id="{6F9B1175-2E81-484D-B046-BD91174B45FC}" type="datetimeFigureOut">
               <a:rPr lang="en-IN" smtClean="0"/>
-              <a:t>29-04-2026</a:t>
+              <a:t>01-05-2026</a:t>
             </a:fld>
             <a:endParaRPr lang="en-IN"/>
           </a:p>
@@ -30626,7 +36797,7 @@
           <a:p>
             <a:fld id="{6F9B1175-2E81-484D-B046-BD91174B45FC}" type="datetimeFigureOut">
               <a:rPr lang="en-IN" smtClean="0"/>
-              <a:t>29-04-2026</a:t>
+              <a:t>01-05-2026</a:t>
             </a:fld>
             <a:endParaRPr lang="en-IN"/>
           </a:p>
@@ -31156,7 +37327,7 @@
           <a:p>
             <a:fld id="{6F9B1175-2E81-484D-B046-BD91174B45FC}" type="datetimeFigureOut">
               <a:rPr lang="en-IN" smtClean="0"/>
-              <a:t>29-04-2026</a:t>
+              <a:t>01-05-2026</a:t>
             </a:fld>
             <a:endParaRPr lang="en-IN"/>
           </a:p>
@@ -31830,7 +38001,7 @@
           <a:p>
             <a:fld id="{6F9B1175-2E81-484D-B046-BD91174B45FC}" type="datetimeFigureOut">
               <a:rPr lang="en-IN" smtClean="0"/>
-              <a:t>29-04-2026</a:t>
+              <a:t>01-05-2026</a:t>
             </a:fld>
             <a:endParaRPr lang="en-IN"/>
           </a:p>
@@ -34441,7 +40612,7 @@
           <a:p>
             <a:fld id="{6F9B1175-2E81-484D-B046-BD91174B45FC}" type="datetimeFigureOut">
               <a:rPr lang="en-IN" smtClean="0"/>
-              <a:t>29-04-2026</a:t>
+              <a:t>01-05-2026</a:t>
             </a:fld>
             <a:endParaRPr lang="en-IN"/>
           </a:p>
@@ -35092,7 +41263,7 @@
           <a:p>
             <a:fld id="{6F9B1175-2E81-484D-B046-BD91174B45FC}" type="datetimeFigureOut">
               <a:rPr lang="en-IN" smtClean="0"/>
-              <a:t>29-04-2026</a:t>
+              <a:t>01-05-2026</a:t>
             </a:fld>
             <a:endParaRPr lang="en-IN"/>
           </a:p>
@@ -35812,9 +41983,16 @@
             <p:ph type="ctrTitle"/>
           </p:nvPr>
         </p:nvSpPr>
-        <p:spPr/>
+        <p:spPr>
+          <a:xfrm>
+            <a:off x="1751012" y="609601"/>
+            <a:ext cx="7873755" cy="757286"/>
+          </a:xfrm>
+        </p:spPr>
         <p:txBody>
-          <a:bodyPr/>
+          <a:bodyPr>
+            <a:normAutofit fontScale="90000"/>
+          </a:bodyPr>
           <a:lstStyle/>
           <a:p>
             <a:r>
@@ -35825,31 +42003,34 @@
           </a:p>
         </p:txBody>
       </p:sp>
-      <p:sp>
-        <p:nvSpPr>
-          <p:cNvPr id="3" name="Subtitle 2">
+      <p:graphicFrame>
+        <p:nvGraphicFramePr>
+          <p:cNvPr id="6" name="Diagram 5">
             <a:extLst>
               <a:ext uri="{FF2B5EF4-FFF2-40B4-BE49-F238E27FC236}">
-                <a16:creationId xmlns:a16="http://schemas.microsoft.com/office/drawing/2014/main" id="{21064F6D-A729-6CD8-B4E9-30BA03E22C90}"/>
+                <a16:creationId xmlns:a16="http://schemas.microsoft.com/office/drawing/2014/main" id="{029B5E7D-7F52-F404-D017-1B8319F763FF}"/>
               </a:ext>
             </a:extLst>
           </p:cNvPr>
-          <p:cNvSpPr>
-            <a:spLocks noGrp="1"/>
-          </p:cNvSpPr>
+          <p:cNvGraphicFramePr/>
           <p:nvPr>
-            <p:ph type="subTitle" idx="1"/>
+            <p:extLst>
+              <p:ext uri="{D42A27DB-BD31-4B8C-83A1-F6EECF244321}">
+                <p14:modId xmlns:p14="http://schemas.microsoft.com/office/powerpoint/2010/main" val="1683913629"/>
+              </p:ext>
+            </p:extLst>
           </p:nvPr>
-        </p:nvSpPr>
-        <p:spPr/>
-        <p:txBody>
-          <a:bodyPr/>
-          <a:lstStyle/>
-          <a:p>
-            <a:endParaRPr lang="en-IN" dirty="0"/>
-          </a:p>
-        </p:txBody>
-      </p:sp>
+        </p:nvGraphicFramePr>
+        <p:xfrm>
+          <a:off x="273377" y="1640264"/>
+          <a:ext cx="11660957" cy="4498069"/>
+        </p:xfrm>
+        <a:graphic>
+          <a:graphicData uri="http://schemas.openxmlformats.org/drawingml/2006/diagram">
+            <dgm:relIds xmlns:dgm="http://schemas.openxmlformats.org/drawingml/2006/diagram" xmlns:r="http://schemas.openxmlformats.org/officeDocument/2006/relationships" r:dm="rId2" r:lo="rId3" r:qs="rId4" r:cs="rId5"/>
+          </a:graphicData>
+        </a:graphic>
+      </p:graphicFrame>
     </p:spTree>
     <p:extLst>
       <p:ext uri="{BB962C8B-B14F-4D97-AF65-F5344CB8AC3E}">
@@ -35864,6 +42045,97 @@
 </file>
 
 <file path=ppt/slides/slide3.xml><?xml version="1.0" encoding="utf-8"?>
+<p:sld xmlns:a="http://schemas.openxmlformats.org/drawingml/2006/main" xmlns:r="http://schemas.openxmlformats.org/officeDocument/2006/relationships" xmlns:p="http://schemas.openxmlformats.org/presentationml/2006/main">
+  <p:cSld>
+    <p:spTree>
+      <p:nvGrpSpPr>
+        <p:cNvPr id="1" name=""/>
+        <p:cNvGrpSpPr/>
+        <p:nvPr/>
+      </p:nvGrpSpPr>
+      <p:grpSpPr>
+        <a:xfrm>
+          <a:off x="0" y="0"/>
+          <a:ext cx="0" cy="0"/>
+          <a:chOff x="0" y="0"/>
+          <a:chExt cx="0" cy="0"/>
+        </a:xfrm>
+      </p:grpSpPr>
+      <p:sp>
+        <p:nvSpPr>
+          <p:cNvPr id="2" name="Title 1">
+            <a:extLst>
+              <a:ext uri="{FF2B5EF4-FFF2-40B4-BE49-F238E27FC236}">
+                <a16:creationId xmlns:a16="http://schemas.microsoft.com/office/drawing/2014/main" id="{99FD9B20-EC3F-7632-B1DE-05AEFA448CBD}"/>
+              </a:ext>
+            </a:extLst>
+          </p:cNvPr>
+          <p:cNvSpPr>
+            <a:spLocks noGrp="1"/>
+          </p:cNvSpPr>
+          <p:nvPr>
+            <p:ph type="title"/>
+          </p:nvPr>
+        </p:nvSpPr>
+        <p:spPr>
+          <a:xfrm>
+            <a:off x="3818626" y="421064"/>
+            <a:ext cx="9905998" cy="1905000"/>
+          </a:xfrm>
+        </p:spPr>
+        <p:txBody>
+          <a:bodyPr/>
+          <a:lstStyle/>
+          <a:p>
+            <a:r>
+              <a:rPr lang="en-IN" dirty="0"/>
+              <a:t>Mission and Vision</a:t>
+            </a:r>
+          </a:p>
+        </p:txBody>
+      </p:sp>
+      <p:graphicFrame>
+        <p:nvGraphicFramePr>
+          <p:cNvPr id="3" name="Diagram 2">
+            <a:extLst>
+              <a:ext uri="{FF2B5EF4-FFF2-40B4-BE49-F238E27FC236}">
+                <a16:creationId xmlns:a16="http://schemas.microsoft.com/office/drawing/2014/main" id="{50C7622D-828F-4614-ED6A-4548C78AF997}"/>
+              </a:ext>
+            </a:extLst>
+          </p:cNvPr>
+          <p:cNvGraphicFramePr/>
+          <p:nvPr>
+            <p:extLst>
+              <p:ext uri="{D42A27DB-BD31-4B8C-83A1-F6EECF244321}">
+                <p14:modId xmlns:p14="http://schemas.microsoft.com/office/powerpoint/2010/main" val="2017105523"/>
+              </p:ext>
+            </p:extLst>
+          </p:nvPr>
+        </p:nvGraphicFramePr>
+        <p:xfrm>
+          <a:off x="179109" y="1743959"/>
+          <a:ext cx="11538409" cy="4394374"/>
+        </p:xfrm>
+        <a:graphic>
+          <a:graphicData uri="http://schemas.openxmlformats.org/drawingml/2006/diagram">
+            <dgm:relIds xmlns:dgm="http://schemas.openxmlformats.org/drawingml/2006/diagram" xmlns:r="http://schemas.openxmlformats.org/officeDocument/2006/relationships" r:dm="rId2" r:lo="rId3" r:qs="rId4" r:cs="rId5"/>
+          </a:graphicData>
+        </a:graphic>
+      </p:graphicFrame>
+    </p:spTree>
+    <p:extLst>
+      <p:ext uri="{BB962C8B-B14F-4D97-AF65-F5344CB8AC3E}">
+        <p14:creationId xmlns:p14="http://schemas.microsoft.com/office/powerpoint/2010/main" val="191296808"/>
+      </p:ext>
+    </p:extLst>
+  </p:cSld>
+  <p:clrMapOvr>
+    <a:masterClrMapping/>
+  </p:clrMapOvr>
+</p:sld>
+</file>
+
+<file path=ppt/slides/slide4.xml><?xml version="1.0" encoding="utf-8"?>
 <p:sld xmlns:a="http://schemas.openxmlformats.org/drawingml/2006/main" xmlns:r="http://schemas.openxmlformats.org/officeDocument/2006/relationships" xmlns:p="http://schemas.openxmlformats.org/presentationml/2006/main">
   <p:cSld>
     <p:spTree>
@@ -36101,7 +42373,7 @@
 </p:sld>
 </file>
 
-<file path=ppt/slides/slide4.xml><?xml version="1.0" encoding="utf-8"?>
+<file path=ppt/slides/slide5.xml><?xml version="1.0" encoding="utf-8"?>
 <p:sld xmlns:a="http://schemas.openxmlformats.org/drawingml/2006/main" xmlns:r="http://schemas.openxmlformats.org/officeDocument/2006/relationships" xmlns:p="http://schemas.openxmlformats.org/presentationml/2006/main">
   <p:cSld>
     <p:spTree>
@@ -36193,7 +42465,7 @@
 </p:sld>
 </file>
 
-<file path=ppt/slides/slide5.xml><?xml version="1.0" encoding="utf-8"?>
+<file path=ppt/slides/slide6.xml><?xml version="1.0" encoding="utf-8"?>
 <p:sld xmlns:a="http://schemas.openxmlformats.org/drawingml/2006/main" xmlns:r="http://schemas.openxmlformats.org/officeDocument/2006/relationships" xmlns:p="http://schemas.openxmlformats.org/presentationml/2006/main">
   <p:cSld>
     <p:spTree>
@@ -36251,7 +42523,7 @@
 </p:sld>
 </file>
 
-<file path=ppt/slides/slide6.xml><?xml version="1.0" encoding="utf-8"?>
+<file path=ppt/slides/slide7.xml><?xml version="1.0" encoding="utf-8"?>
 <p:sld xmlns:a="http://schemas.openxmlformats.org/drawingml/2006/main" xmlns:r="http://schemas.openxmlformats.org/officeDocument/2006/relationships" xmlns:p="http://schemas.openxmlformats.org/presentationml/2006/main">
   <p:cSld>
     <p:spTree>
@@ -36309,7 +42581,7 @@
 </p:sld>
 </file>
 
-<file path=ppt/slides/slide7.xml><?xml version="1.0" encoding="utf-8"?>
+<file path=ppt/slides/slide8.xml><?xml version="1.0" encoding="utf-8"?>
 <p:sld xmlns:a="http://schemas.openxmlformats.org/drawingml/2006/main" xmlns:r="http://schemas.openxmlformats.org/officeDocument/2006/relationships" xmlns:p="http://schemas.openxmlformats.org/presentationml/2006/main">
   <p:cSld>
     <p:spTree>
